--- a/deliverables/assessment-2/A2_Presentation.pptx
+++ b/deliverables/assessment-2/A2_Presentation.pptx
@@ -357,7 +357,7 @@
             <a:pPr/>
             <a:r>
               <a:rPr lang="en-AU" dirty="0"/>
-              <a:t>Hello, I'm Yangyang Xiao. Joy of Giving redistributes toys and books, and our team must explain its social and environmental contribution. My research asks how a brief parent survey can assess perceived changes in access to suitable play resources. I propose a small set of targeted questions, with clear rules for what the answers can tell us.</a:t>
+              <a:t>Hello, I'm Yangyang Xiao. My research asks how a brief parent survey can describe families' reported changes in access to suitable play resources after a Joy of Giving visit. The contribution is a measurement framework for our impact report.</a:t>
             </a:r>
           </a:p>
         </p:txBody>
@@ -417,7 +417,7 @@
             <a:pPr/>
             <a:r>
               <a:rPr lang="en-AU" dirty="0"/>
-              <a:t>Reference slide for reading only. The six-minute spoken presentation ends on slide eight.</a:t>
+              <a:t>References for reading only. Government Digital Service (GDS) (n.d.b) Radios. GOV.UK Design System. Official source repository, viewed 19 October 2026. https://github.com/alphagov/govuk-design-system Government Digital Service (GDS) (n.d.c) Check answers. GOV.UK Design System. Official source repository, viewed 19 October 2026. https://github.com/alphagov/govuk-design-system Nguyen, L. (2026a) Week 2: Action Research &amp; Data Collection. COMM5030, UNSW Sydney, lecture guide, pp.18–19 and 29–30. Supplied course material. Nguyen, L. (2026b) Week 3: Social Impact Measurement. COMM5030, UNSW Sydney, lecture slides, pp.25–31 and 42. Supplied course material. Nguyen, L. (2026c) Week 5: Systems Thinking. COMM5030, UNSW Sydney, lecture slides, pp.17–28. Supplied course material. GDS Radios source: https://github.com/alphagov/govuk-design-system/blob/a1bfd60d1e0fcc2de52a1d357b934c3098ec62a6/src/components/radios/index.md . GDS Check answers source: https://github.com/alphagov/govuk-design-system/blob/a1bfd60d1e0fcc2de52a1d357b934c3098ec62a6/src/patterns/check-answers/index.md . Preparation: ChatGPT assisted drafting, Image Gen informed the selected visual direction, and PPT Master exported the editable presentation.</a:t>
             </a:r>
           </a:p>
         </p:txBody>
@@ -477,7 +477,7 @@
             <a:pPr/>
             <a:r>
               <a:rPr lang="en-AU" dirty="0"/>
-              <a:t>Appendix for reading only. These are draft items for client review and cognitive testing with adult carers. They have not been validated or administered.</a:t>
+              <a:t>Appendix for reading only. These proposed items are for review and testing, not an administered questionnaire. Display the selected visit date and use the same nominated child throughout. The four-week before/after windows should remain fixed. Q4 uses the last seven days as separate recent-use context. All participation is voluntary and support does not depend on taking part. Keep valid unsure responses and leave response options unselected. Let carers review their answers before submission. Review question meaning, recall periods and response selection in cognitive interviews; these are proposed operations informed by the ONS method description. If digital, conduct an end-to-end walkthrough too: UX can expose understanding problems as well as completion and navigation problems. The three-minute target concerns form completion, excluding interview probes. A short pilot is not full scale validation.</a:t>
             </a:r>
           </a:p>
         </p:txBody>
@@ -537,7 +537,7 @@
             <a:pPr/>
             <a:r>
               <a:rPr lang="en-AU" dirty="0"/>
-              <a:t>Appendix for reading only. Use the stated item-specific reporting rules; no observed participant results are presented.</a:t>
+              <a:t>Appendix for reading only. Use item-specific substantive-response denominators and display all excluded categories as separate counts. For Q1, valid change categories run from much harder through no change to much easier; show unsure and skipped counts separately. For Q2, keep not sure and prefer not to answer separate from substantive frequency categories. For Q3, show not sure and not used yet separately from fit ratings. For Q4, show unknown separately from zero to seven days. Q5 comments support themes and examples, not population prevalence. The items serve different roles and must not be summed. None of these reporting rules creates a causal programme-effect estimate.</a:t>
             </a:r>
           </a:p>
         </p:txBody>
@@ -597,7 +597,7 @@
             <a:pPr/>
             <a:r>
               <a:rPr lang="en-AU" dirty="0"/>
-              <a:t>This is a desk-based design study, not a completed family survey. I reviewed course frameworks and five official methods documents from three institutions, then compared measurement options against relevance, respondent burden, feasibility and interpretation. The resulting questions are proposals for testing. They have not been validated for Joy of Giving, and no participant outcomes are estimated here.</a:t>
+              <a:t>I used a desk-based review, comparing measurement options against relevance, respondent burden, feasibility and interpretation. Toy Libraries Australia supplies sector evidence about access, cost and appropriate toys. The ONS report supports questionnaire testing, while World Bank and GDS guidance informs measurement and administration. Each source has a different role. These proposed items have not been validated in Joy of Giving, and I collected no participant data.</a:t>
             </a:r>
           </a:p>
         </p:txBody>
@@ -657,7 +657,7 @@
             <a:pPr/>
             <a:r>
               <a:rPr lang="en-AU" dirty="0"/>
-              <a:t>The first distinction is between activity and change. Toy counts show what the organisation distributed. Family counts show reach. Neither establishes whether a child could access suitable resources more easily. In a proposed logic model, redistribution is the activity, items received are outputs, and easier access is an intended short-term outcome. That link depends on whether items suit the child, reach the household and remain usable. General satisfaction answers another question: whether the service experience was positive. It is useful feedback, but a positive experience can coexist with unchanged access. For the impact report, keep output counts, service feedback and reported access change in separate categories. Longer-term child development remains outside this study.</a:t>
+              <a:t>The intended outcome is improved access to suitable play resources. Toy redistribution is the activity, and items received are outputs. Family-reported access change is evidence about the outcome, rather than the outcome itself. Satisfaction describes service experience. Keeping these separate prevents a positive service rating or a toy count from standing in for improved access.</a:t>
             </a:r>
           </a:p>
         </p:txBody>
@@ -717,7 +717,7 @@
             <a:pPr/>
             <a:r>
               <a:rPr lang="en-AU" dirty="0"/>
-              <a:t>My second conclusion is to treat access as several related questions, rather than one untested score. Availability concerns whether a family can obtain relevant resources when needed. Affordability concerns cost barriers. Suitability concerns whether items meet the nominated child's play needs. These are candidate dimensions for client review and family testing. Actual use supplies context: receiving an item does not tell us whether it was used. But frequent use also does not prove that access improved or that development changed. Week five's systems perspective adds a question: could transport, storage or household circumstances explain the answer? A neutral open question can reveal constraints without assuming that every family benefited.</a:t>
+              <a:t>Toy Libraries Australia's submission changes the proposed content. It reports wider choice and saving money as joining motives, describes uneven service access, and presents developmentally appropriate toys as a benefit. I therefore retain overall access change, cost barriers and perceived suitability. This sector submission reports market research without full survey methods. Lending also differs from redistribution, so it suggests candidates rather than validating this questionnaire. Availability remains a coverage gap because Q1 does not measure it separately. Q2 and Q3 provide context, while Q4 records use and Q5 asks about barriers. Transport, storage and household circumstances may help explain an answer.</a:t>
             </a:r>
           </a:p>
         </p:txBody>
@@ -777,7 +777,7 @@
             <a:pPr/>
             <a:r>
               <a:rPr lang="en-AU" dirty="0"/>
-              <a:t>The comparison shows why no single measure is sufficient. Distribution records can be reused to describe programme activity, but do not measure household change. A satisfaction question is simple, but only indirectly related to access. A direct change question fits the outcome more closely, although it asks parents to recall an earlier period. A short set of specific questions plus a comment provides more interpretation, at the cost of extra response time and analysis. A longer instrument also requires staff time to check incomplete responses and code open comments. My recommendation is a brief combination, with each item earning its place. Retain an item only if its answer informs a report claim or a decision. Its actual burden should be tested, rather than assumed.</a:t>
+              <a:t>The matrix applies all four criteria. Relevance comes first because access change is the research question; feasibility then limits what fits before A3. Usable records can have low burden but mainly describe activity. Satisfaction is simple but weakly aligned with access change. Retrospective change needs one follow-up, but relies on recall. Prospective baseline and follow-up reduces reliance on recalled change, but needs two waves, comparable questions, linkage and enough time; attrition remains. My conditional choice is retrospective change plus contextual items if an eligible four-week follow-up fits. Prefer a suitable prospective design if feasible. If neither fits, audit existing questions and data. Burden and interpretation remain constraints. These are design judgements, not measured ratings.</a:t>
             </a:r>
           </a:p>
         </p:txBody>
@@ -837,7 +837,7 @@
             <a:pPr/>
             <a:r>
               <a:rPr lang="en-AU" dirty="0"/>
-              <a:t>The draft has five questions: perceived access change, cost barriers, suitability, recent use and a neutral explanation, including difficulties. I propose inviting adult carers four weeks after a selected visit, with clear before-and-after periods for the change question. This timing is a design choice to pilot, not an established optimum. Explain which child and resources to consider. Include uncertainty where valid, leave response options unselected, and let respondents review answers before submitting. Keep the change categories separate, and show missing and uncertain responses. Cost, suitability and use provide context; they should not be added into an unvalidated total. The full wording is in the appendix. Testing must check comprehension as well as completion time. Ask carers to explain each question in their own words before finalising it.</a:t>
+              <a:t>The items have distinct reporting roles. Q1 is the main reported access-change indicator. Q2 covers cost, Q3 perceived suitability, and Q4 recent use; these provide context. Q5 helps explain change and barriers. Report categories and valid item counts, while showing uncertain and skipped answers separately. Do not combine the answers into an access score.</a:t>
             </a:r>
           </a:p>
         </p:txBody>
@@ -897,7 +897,7 @@
             <a:pPr/>
             <a:r>
               <a:rPr lang="en-AU" dirty="0"/>
-              <a:t>The main limitation is that recalled change is not a causal estimate. More engaged families may be more likely to respond, while other household changes may affect access. Say 'among responding families' and specify the period. Records and interviews strengthen interpretation but cannot establish the counterfactual. The general guidance also needs testing in this particular family and toy context.</a:t>
+              <a:t>Recall can distort the comparison, and responding families may differ from others. Specify the reference periods and say 'among responding families'. Without an adequate comparison, neither retrospective nor prospective responses establish programme effects. Records and interviews can help interpret accounts, but do not remove that limitation.</a:t>
             </a:r>
           </a:p>
         </p:txBody>
@@ -957,7 +957,7 @@
             <a:pPr/>
             <a:r>
               <a:rPr lang="en-AU" dirty="0"/>
-              <a:t>Before Assessment Three, agree the priority outcome with the client, test understanding and burden with adult carers, then revise and compare responses with available records or interviews. The team receives a questionnaire, an indicator dictionary and reporting rules. These support both the impact report and public communication. My contribution is a way to describe reported access change while matching every claim to the evidence.</a:t>
+              <a:t>First, ask the client or tutor to arrange recruitment and confirm contact arrangements, baseline data and the A3 analysis deadline. Check whether families already passed four weeks; a new wait must still leave analysis and writing time. Second, I propose three to five adult-carer cognitive interviews, probing question meaning, recall periods and answer choices. Log misunderstandings, missing options and form completion time. The proposed three-minute form target excludes interview probes. Following ONS, add an end-to-end walkthrough if digital; UX also checks understanding. Third, reword unclear terms, add options, remove unnecessary items and recheck changes. If the survey is fixed or time too short, audit current questions and data, then recommend the next cycle. The team receives the survey, indicator guide and reporting rules for its impact report and media collateral.</a:t>
             </a:r>
           </a:p>
         </p:txBody>
@@ -1017,7 +1017,7 @@
             <a:pPr/>
             <a:r>
               <a:rPr lang="en-AU" dirty="0"/>
-              <a:t>Reference slide for reading only. The six-minute spoken presentation ends on slide eight.</a:t>
+              <a:t>References for reading only. Toy Libraries Australia (2024) Opportunities in the circular economy: Productivity Commission submission. Submission 130, November, pp.1–3. Supplied PDF; industry submission reporting sector evidence. Office for National Statistics (ONS) (n.d.) Question and questionnaire development overview for Census 2021. §§3–4, §7 and Annex 2. Supplied converted reading copy, pp.4, 7, 14, 18–19; viewed 19 October 2026. Bjarkefur, K., de Andrade, L.C., Daniels, B. and Jones, M.R. (2021) Development Research in Practice: The DIME Analytics Data Handbook. World Bank, chs.3–4, source version viewed 19 October 2026. https://github.com/worldbank/dime-data-handbook Government Digital Service (GDS) (n.d.a) Question pages. GOV.UK Design System. Official source repository, viewed 19 October 2026. https://github.com/alphagov/govuk-design-system The ONS source consulted was the supplied converted reading copy, not an ONS-issued PDF. Its original publication date was not shown. The embedded original-report link is https://www.ons.gov.uk/census/censustransformationprogramme/questiondevelopment/questionandquestionnairedevelopmentoverviewforcensus2021. TLA is an industry submission; its family-motive figures cite Glow Market Research, whose original survey methods were not supplied. No proportions from that market research are used here. World Bank source chapters: https://github.com/worldbank/dime-data-handbook/tree/96442f873e3fb81fd1359669eeb2a548cb9c4be5/chapters . GDS Question pages source: https://github.com/alphagov/govuk-design-system/blob/a1bfd60d1e0fcc2de52a1d357b934c3098ec62a6/src/patterns/question-pages/index.md .</a:t>
             </a:r>
           </a:p>
         </p:txBody>
@@ -1032,7 +1032,7 @@
 
 <file path=ppt/slideLayouts/slideLayout7.xml><?xml version="1.0" encoding="utf-8"?>
 <p:sldLayout xmlns:a="http://schemas.openxmlformats.org/drawingml/2006/main" xmlns:p="http://schemas.openxmlformats.org/presentationml/2006/main" type="blank" preserve="1">
-  <p:cSld name="comm5030_play_access — Blank">
+  <p:cSld name="comm5030_play_access_v2 — Blank">
     <p:spTree>
       <p:nvGrpSpPr>
         <p:cNvPr id="1" name=""/>
@@ -1122,7 +1122,7 @@
 
 <file path=ppt/slideMasters/slideMaster1.xml><?xml version="1.0" encoding="utf-8"?>
 <p:sldMaster xmlns:a="http://schemas.openxmlformats.org/drawingml/2006/main" xmlns:p="http://schemas.openxmlformats.org/presentationml/2006/main" xmlns:r="http://schemas.openxmlformats.org/officeDocument/2006/relationships">
-  <p:cSld name="comm5030_play_access — Master">
+  <p:cSld name="comm5030_play_access_v2 — Master">
     <p:bg>
       <p:bgRef idx="1001">
         <a:schemeClr val="bg1"/>
@@ -2646,9 +2646,9 @@
         <p:grpSpPr>
           <a:xfrm>
             <a:off x="669036" y="527050"/>
-            <a:ext cx="8961808" cy="645414"/>
+            <a:ext cx="8443383" cy="645414"/>
             <a:chOff x="669036" y="527050"/>
-            <a:chExt cx="8961808" cy="645414"/>
+            <a:chExt cx="8443383" cy="645414"/>
           </a:xfrm>
         </p:grpSpPr>
         <p:sp>
@@ -2660,7 +2660,7 @@
           <p:spPr>
             <a:xfrm>
               <a:off x="669036" y="527050"/>
-              <a:ext cx="8961808" cy="645414"/>
+              <a:ext cx="8443383" cy="645414"/>
             </a:xfrm>
             <a:prstGeom prst="rect">
               <a:avLst/>
@@ -2686,7 +2686,7 @@
                   <a:ea typeface="+mn-ea"/>
                   <a:cs typeface="+mn-cs"/>
                 </a:rPr>
-                <a:t>References | guidance and course context</a:t>
+                <a:t>References | design and course context</a:t>
               </a:r>
             </a:p>
           </p:txBody>
@@ -2736,10 +2736,10 @@
         </p:nvGrpSpPr>
         <p:grpSpPr>
           <a:xfrm>
-            <a:off x="677418" y="1739900"/>
-            <a:ext cx="7280711" cy="876046"/>
-            <a:chOff x="677418" y="1739900"/>
-            <a:chExt cx="7280711" cy="876046"/>
+            <a:off x="677418" y="1606550"/>
+            <a:ext cx="7280711" cy="809371"/>
+            <a:chOff x="677418" y="1606550"/>
+            <a:chExt cx="7280711" cy="809371"/>
           </a:xfrm>
         </p:grpSpPr>
         <p:sp>
@@ -2750,8 +2750,8 @@
           </p:nvSpPr>
           <p:spPr>
             <a:xfrm>
-              <a:off x="677418" y="1739900"/>
-              <a:ext cx="4385561" cy="322707"/>
+              <a:off x="677418" y="1606550"/>
+              <a:ext cx="4397826" cy="322707"/>
             </a:xfrm>
             <a:prstGeom prst="rect">
               <a:avLst/>
@@ -2777,7 +2777,7 @@
                   <a:ea typeface="+mn-ea"/>
                   <a:cs typeface="+mn-cs"/>
                 </a:rPr>
-                <a:t>Government Digital Service (GDS) (n.d.c)</a:t>
+                <a:t>Government Digital Service (GDS) (n.d.b)</a:t>
               </a:r>
             </a:p>
           </p:txBody>
@@ -2790,8 +2790,8 @@
           </p:nvSpPr>
           <p:spPr>
             <a:xfrm>
-              <a:off x="678942" y="2054225"/>
-              <a:ext cx="3439756" cy="264033"/>
+              <a:off x="678942" y="1901825"/>
+              <a:ext cx="2763532" cy="264033"/>
             </a:xfrm>
             <a:prstGeom prst="rect">
               <a:avLst/>
@@ -2817,7 +2817,7 @@
                   <a:ea typeface="+mn-ea"/>
                   <a:cs typeface="+mn-cs"/>
                 </a:rPr>
-                <a:t>Check answers. GOV.UK Design System.</a:t>
+                <a:t>Radios. GOV.UK Design System.</a:t>
               </a:r>
             </a:p>
           </p:txBody>
@@ -2830,7 +2830,7 @@
           </p:nvSpPr>
           <p:spPr>
             <a:xfrm>
-              <a:off x="679704" y="2381250"/>
+              <a:off x="679704" y="2181225"/>
               <a:ext cx="7278425" cy="234696"/>
             </a:xfrm>
             <a:prstGeom prst="rect">
@@ -2871,10 +2871,10 @@
         </p:nvGrpSpPr>
         <p:grpSpPr>
           <a:xfrm>
-            <a:off x="677418" y="2740025"/>
-            <a:ext cx="6621790" cy="876046"/>
-            <a:chOff x="677418" y="2740025"/>
-            <a:chExt cx="6621790" cy="876046"/>
+            <a:off x="677418" y="2444750"/>
+            <a:ext cx="7280711" cy="809371"/>
+            <a:chOff x="677418" y="2444750"/>
+            <a:chExt cx="7280711" cy="809371"/>
           </a:xfrm>
         </p:grpSpPr>
         <p:sp>
@@ -2885,8 +2885,8 @@
           </p:nvSpPr>
           <p:spPr>
             <a:xfrm>
-              <a:off x="677418" y="2740025"/>
-              <a:ext cx="2007217" cy="322707"/>
+              <a:off x="677418" y="2444750"/>
+              <a:ext cx="4385561" cy="322707"/>
             </a:xfrm>
             <a:prstGeom prst="rect">
               <a:avLst/>
@@ -2912,7 +2912,7 @@
                   <a:ea typeface="+mn-ea"/>
                   <a:cs typeface="+mn-cs"/>
                 </a:rPr>
-                <a:t>Nguyen, L. (2026a)</a:t>
+                <a:t>Government Digital Service (GDS) (n.d.c)</a:t>
               </a:r>
             </a:p>
           </p:txBody>
@@ -2925,8 +2925,8 @@
           </p:nvSpPr>
           <p:spPr>
             <a:xfrm>
-              <a:off x="678942" y="3054350"/>
-              <a:ext cx="3600848" cy="264033"/>
+              <a:off x="678942" y="2740025"/>
+              <a:ext cx="3439756" cy="264033"/>
             </a:xfrm>
             <a:prstGeom prst="rect">
               <a:avLst/>
@@ -2952,7 +2952,7 @@
                   <a:ea typeface="+mn-ea"/>
                   <a:cs typeface="+mn-cs"/>
                 </a:rPr>
-                <a:t>Week 2: Action Research &amp; Data Collection.</a:t>
+                <a:t>Check answers. GOV.UK Design System.</a:t>
               </a:r>
             </a:p>
           </p:txBody>
@@ -2965,8 +2965,8 @@
           </p:nvSpPr>
           <p:spPr>
             <a:xfrm>
-              <a:off x="679704" y="3381375"/>
-              <a:ext cx="6619504" cy="234696"/>
+              <a:off x="679704" y="3019425"/>
+              <a:ext cx="7278425" cy="234696"/>
             </a:xfrm>
             <a:prstGeom prst="rect">
               <a:avLst/>
@@ -2992,7 +2992,7 @@
                   <a:ea typeface="+mn-ea"/>
                   <a:cs typeface="+mn-cs"/>
                 </a:rPr>
-                <a:t>COMM5030, UNSW Sydney, lecture guide, pp.18–19 and 29–30. Supplied course material.</a:t>
+                <a:t>Official source repository, viewed 19 October 2026. https://github.com/alphagov/govuk-design-system</a:t>
               </a:r>
             </a:p>
           </p:txBody>
@@ -3006,10 +3006,10 @@
         </p:nvGrpSpPr>
         <p:grpSpPr>
           <a:xfrm>
-            <a:off x="677418" y="3740150"/>
-            <a:ext cx="6366043" cy="876046"/>
-            <a:chOff x="677418" y="3740150"/>
-            <a:chExt cx="6366043" cy="876046"/>
+            <a:off x="677418" y="3282950"/>
+            <a:ext cx="6621790" cy="809371"/>
+            <a:chOff x="677418" y="3282950"/>
+            <a:chExt cx="6621790" cy="809371"/>
           </a:xfrm>
         </p:grpSpPr>
         <p:sp>
@@ -3020,8 +3020,8 @@
           </p:nvSpPr>
           <p:spPr>
             <a:xfrm>
-              <a:off x="677418" y="3740150"/>
-              <a:ext cx="2019516" cy="322707"/>
+              <a:off x="677418" y="3282950"/>
+              <a:ext cx="2007217" cy="322707"/>
             </a:xfrm>
             <a:prstGeom prst="rect">
               <a:avLst/>
@@ -3047,7 +3047,7 @@
                   <a:ea typeface="+mn-ea"/>
                   <a:cs typeface="+mn-cs"/>
                 </a:rPr>
-                <a:t>Nguyen, L. (2026b)</a:t>
+                <a:t>Nguyen, L. (2026a)</a:t>
               </a:r>
             </a:p>
           </p:txBody>
@@ -3060,8 +3060,8 @@
           </p:nvSpPr>
           <p:spPr>
             <a:xfrm>
-              <a:off x="678942" y="4054475"/>
-              <a:ext cx="3059147" cy="264033"/>
+              <a:off x="678942" y="3578225"/>
+              <a:ext cx="3600848" cy="264033"/>
             </a:xfrm>
             <a:prstGeom prst="rect">
               <a:avLst/>
@@ -3087,7 +3087,7 @@
                   <a:ea typeface="+mn-ea"/>
                   <a:cs typeface="+mn-cs"/>
                 </a:rPr>
-                <a:t>Week 3: Social Impact Measurement.</a:t>
+                <a:t>Week 2: Action Research &amp; Data Collection.</a:t>
               </a:r>
             </a:p>
           </p:txBody>
@@ -3100,8 +3100,8 @@
           </p:nvSpPr>
           <p:spPr>
             <a:xfrm>
-              <a:off x="679704" y="4381500"/>
-              <a:ext cx="6363757" cy="234696"/>
+              <a:off x="679704" y="3857625"/>
+              <a:ext cx="6619504" cy="234696"/>
             </a:xfrm>
             <a:prstGeom prst="rect">
               <a:avLst/>
@@ -3127,7 +3127,7 @@
                   <a:ea typeface="+mn-ea"/>
                   <a:cs typeface="+mn-cs"/>
                 </a:rPr>
-                <a:t>COMM5030, UNSW Sydney, lecture slides, pp.25–31 and 42. Supplied course material.</a:t>
+                <a:t>COMM5030, UNSW Sydney, lecture guide, pp.18–19 and 29–30. Supplied course material.</a:t>
               </a:r>
             </a:p>
           </p:txBody>
@@ -3141,10 +3141,10 @@
         </p:nvGrpSpPr>
         <p:grpSpPr>
           <a:xfrm>
-            <a:off x="677418" y="4740275"/>
-            <a:ext cx="5824928" cy="876046"/>
-            <a:chOff x="677418" y="4740275"/>
-            <a:chExt cx="5824928" cy="876046"/>
+            <a:off x="677418" y="4121150"/>
+            <a:ext cx="6366043" cy="809371"/>
+            <a:chOff x="677418" y="4121150"/>
+            <a:chExt cx="6366043" cy="809371"/>
           </a:xfrm>
         </p:grpSpPr>
         <p:sp>
@@ -3155,8 +3155,8 @@
           </p:nvSpPr>
           <p:spPr>
             <a:xfrm>
-              <a:off x="677418" y="4740275"/>
-              <a:ext cx="2007217" cy="322707"/>
+              <a:off x="677418" y="4121150"/>
+              <a:ext cx="2019516" cy="322707"/>
             </a:xfrm>
             <a:prstGeom prst="rect">
               <a:avLst/>
@@ -3182,7 +3182,7 @@
                   <a:ea typeface="+mn-ea"/>
                   <a:cs typeface="+mn-cs"/>
                 </a:rPr>
-                <a:t>Nguyen, L. (2026c)</a:t>
+                <a:t>Nguyen, L. (2026b)</a:t>
               </a:r>
             </a:p>
           </p:txBody>
@@ -3195,8 +3195,8 @@
           </p:nvSpPr>
           <p:spPr>
             <a:xfrm>
-              <a:off x="678942" y="5054600"/>
-              <a:ext cx="2235211" cy="264033"/>
+              <a:off x="678942" y="4416425"/>
+              <a:ext cx="3059147" cy="264033"/>
             </a:xfrm>
             <a:prstGeom prst="rect">
               <a:avLst/>
@@ -3222,7 +3222,7 @@
                   <a:ea typeface="+mn-ea"/>
                   <a:cs typeface="+mn-cs"/>
                 </a:rPr>
-                <a:t>Week 5: Systems Thinking.</a:t>
+                <a:t>Week 3: Social Impact Measurement.</a:t>
               </a:r>
             </a:p>
           </p:txBody>
@@ -3235,8 +3235,8 @@
           </p:nvSpPr>
           <p:spPr>
             <a:xfrm>
-              <a:off x="679704" y="5381625"/>
-              <a:ext cx="5822642" cy="234696"/>
+              <a:off x="679704" y="4695825"/>
+              <a:ext cx="6363757" cy="234696"/>
             </a:xfrm>
             <a:prstGeom prst="rect">
               <a:avLst/>
@@ -3262,7 +3262,7 @@
                   <a:ea typeface="+mn-ea"/>
                   <a:cs typeface="+mn-cs"/>
                 </a:rPr>
-                <a:t>COMM5030, UNSW Sydney, lecture slides, pp.17–28. Supplied course material.</a:t>
+                <a:t>COMM5030, UNSW Sydney, lecture slides, pp.25–31 and 42. Supplied course material.</a:t>
               </a:r>
             </a:p>
           </p:txBody>
@@ -3270,16 +3270,16 @@
       </p:grpSp>
       <p:grpSp>
         <p:nvGrpSpPr>
-          <p:cNvPr id="22" name="preparation-note"/>
+          <p:cNvPr id="24" name="reference-5"/>
           <p:cNvGrpSpPr/>
           <p:nvPr/>
         </p:nvGrpSpPr>
         <p:grpSpPr>
           <a:xfrm>
-            <a:off x="679704" y="5953125"/>
-            <a:ext cx="7839211" cy="234696"/>
-            <a:chOff x="679704" y="5953125"/>
-            <a:chExt cx="7839211" cy="234696"/>
+            <a:off x="677418" y="4959350"/>
+            <a:ext cx="5824928" cy="809371"/>
+            <a:chOff x="677418" y="4959350"/>
+            <a:chExt cx="5824928" cy="809371"/>
           </a:xfrm>
         </p:grpSpPr>
         <p:sp>
@@ -3290,8 +3290,8 @@
           </p:nvSpPr>
           <p:spPr>
             <a:xfrm>
-              <a:off x="679704" y="5953125"/>
-              <a:ext cx="7839211" cy="234696"/>
+              <a:off x="677418" y="4959350"/>
+              <a:ext cx="2007217" cy="322707"/>
             </a:xfrm>
             <a:prstGeom prst="rect">
               <a:avLst/>
@@ -3309,6 +3309,141 @@
             <a:p>
               <a:pPr algn="l"/>
               <a:r>
+                <a:rPr lang="en-AU" sz="1650" b="1" dirty="0">
+                  <a:solidFill>
+                    <a:schemeClr val="accent1"/>
+                  </a:solidFill>
+                  <a:latin typeface="+mn-lt"/>
+                  <a:ea typeface="+mn-ea"/>
+                  <a:cs typeface="+mn-cs"/>
+                </a:rPr>
+                <a:t>Nguyen, L. (2026c)</a:t>
+              </a:r>
+            </a:p>
+          </p:txBody>
+        </p:sp>
+        <p:sp>
+          <p:nvSpPr>
+            <p:cNvPr id="22" name="TextBox 22"/>
+            <p:cNvSpPr txBox="1"/>
+            <p:nvPr/>
+          </p:nvSpPr>
+          <p:spPr>
+            <a:xfrm>
+              <a:off x="678942" y="5254625"/>
+              <a:ext cx="2235211" cy="264033"/>
+            </a:xfrm>
+            <a:prstGeom prst="rect">
+              <a:avLst/>
+            </a:prstGeom>
+            <a:noFill/>
+            <a:ln>
+              <a:noFill/>
+            </a:ln>
+          </p:spPr>
+          <p:txBody>
+            <a:bodyPr wrap="none" lIns="0" tIns="0" rIns="0" bIns="0" anchor="t" anchorCtr="0">
+              <a:spAutoFit/>
+            </a:bodyPr>
+            <a:lstStyle/>
+            <a:p>
+              <a:pPr algn="l"/>
+              <a:r>
+                <a:rPr lang="en-AU" sz="1350" dirty="0">
+                  <a:solidFill>
+                    <a:schemeClr val="dk1"/>
+                  </a:solidFill>
+                  <a:latin typeface="+mn-lt"/>
+                  <a:ea typeface="+mn-ea"/>
+                  <a:cs typeface="+mn-cs"/>
+                </a:rPr>
+                <a:t>Week 5: Systems Thinking.</a:t>
+              </a:r>
+            </a:p>
+          </p:txBody>
+        </p:sp>
+        <p:sp>
+          <p:nvSpPr>
+            <p:cNvPr id="23" name="TextBox 23"/>
+            <p:cNvSpPr txBox="1"/>
+            <p:nvPr/>
+          </p:nvSpPr>
+          <p:spPr>
+            <a:xfrm>
+              <a:off x="679704" y="5534025"/>
+              <a:ext cx="5822642" cy="234696"/>
+            </a:xfrm>
+            <a:prstGeom prst="rect">
+              <a:avLst/>
+            </a:prstGeom>
+            <a:noFill/>
+            <a:ln>
+              <a:noFill/>
+            </a:ln>
+          </p:spPr>
+          <p:txBody>
+            <a:bodyPr wrap="none" lIns="0" tIns="0" rIns="0" bIns="0" anchor="t" anchorCtr="0">
+              <a:spAutoFit/>
+            </a:bodyPr>
+            <a:lstStyle/>
+            <a:p>
+              <a:pPr algn="l"/>
+              <a:r>
+                <a:rPr lang="en-AU" sz="1200" dirty="0">
+                  <a:solidFill>
+                    <a:schemeClr val="accent6"/>
+                  </a:solidFill>
+                  <a:latin typeface="+mn-lt"/>
+                  <a:ea typeface="+mn-ea"/>
+                  <a:cs typeface="+mn-cs"/>
+                </a:rPr>
+                <a:t>COMM5030, UNSW Sydney, lecture slides, pp.17–28. Supplied course material.</a:t>
+              </a:r>
+            </a:p>
+          </p:txBody>
+        </p:sp>
+      </p:grpSp>
+      <p:grpSp>
+        <p:nvGrpSpPr>
+          <p:cNvPr id="26" name="preparation"/>
+          <p:cNvGrpSpPr/>
+          <p:nvPr/>
+        </p:nvGrpSpPr>
+        <p:grpSpPr>
+          <a:xfrm>
+            <a:off x="679704" y="5962650"/>
+            <a:ext cx="7839211" cy="234696"/>
+            <a:chOff x="679704" y="5962650"/>
+            <a:chExt cx="7839211" cy="234696"/>
+          </a:xfrm>
+        </p:grpSpPr>
+        <p:sp>
+          <p:nvSpPr>
+            <p:cNvPr id="25" name="TextBox 25"/>
+            <p:cNvSpPr txBox="1"/>
+            <p:nvPr/>
+          </p:nvSpPr>
+          <p:spPr>
+            <a:xfrm>
+              <a:off x="679704" y="5962650"/>
+              <a:ext cx="7839211" cy="234696"/>
+            </a:xfrm>
+            <a:prstGeom prst="rect">
+              <a:avLst/>
+            </a:prstGeom>
+            <a:noFill/>
+            <a:ln>
+              <a:noFill/>
+            </a:ln>
+          </p:spPr>
+          <p:txBody>
+            <a:bodyPr wrap="none" lIns="0" tIns="0" rIns="0" bIns="0" anchor="t" anchorCtr="0">
+              <a:spAutoFit/>
+            </a:bodyPr>
+            <a:lstStyle/>
+            <a:p>
+              <a:pPr algn="l"/>
+              <a:r>
                 <a:rPr lang="en-AU" sz="1200" dirty="0">
                   <a:solidFill>
                     <a:schemeClr val="accent6"/>
@@ -3325,7 +3460,7 @@
       </p:grpSp>
       <p:sp>
         <p:nvSpPr>
-          <p:cNvPr id="23" name="Line 23"/>
+          <p:cNvPr id="27" name="Line 27"/>
           <p:cNvSpPr/>
           <p:nvPr/>
         </p:nvSpPr>
@@ -3361,7 +3496,7 @@
       </p:sp>
       <p:sp>
         <p:nvSpPr>
-          <p:cNvPr id="24" name="footer-label"/>
+          <p:cNvPr id="28" name="footer-label"/>
           <p:cNvSpPr txBox="1"/>
           <p:nvPr/>
         </p:nvSpPr>
@@ -3401,7 +3536,7 @@
       </p:sp>
       <p:sp>
         <p:nvSpPr>
-          <p:cNvPr id="25" name="page-number"/>
+          <p:cNvPr id="29" name="page-number"/>
           <p:cNvSpPr txBox="1"/>
           <p:nvPr/>
         </p:nvSpPr>
@@ -3575,9 +3710,9 @@
         <p:grpSpPr>
           <a:xfrm>
             <a:off x="677418" y="1584325"/>
-            <a:ext cx="10068710" cy="608457"/>
+            <a:ext cx="9591271" cy="608457"/>
             <a:chOff x="677418" y="1584325"/>
-            <a:chExt cx="10068710" cy="608457"/>
+            <a:chExt cx="9591271" cy="608457"/>
           </a:xfrm>
         </p:grpSpPr>
         <p:sp>
@@ -3589,7 +3724,7 @@
           <p:spPr>
             <a:xfrm>
               <a:off x="677418" y="1584325"/>
-              <a:ext cx="10068710" cy="608457"/>
+              <a:ext cx="9591271" cy="608457"/>
             </a:xfrm>
             <a:prstGeom prst="rect">
               <a:avLst/>
@@ -3619,7 +3754,7 @@
                   <a:ea typeface="+mn-ea"/>
                   <a:cs typeface="+mn-cs"/>
                 </a:rPr>
-                <a:t>Proposed: invite adult carers four weeks after a selected visit. Answer for one child; record no child identifier.</a:t>
+                <a:t>For adult carers. Proposed four-week follow-up, if feasible. Show the selected visit date; answer for one</a:t>
               </a:r>
               <a:br>
                 <a:rPr lang="en-AU" sz="1650" dirty="0">
@@ -3640,7 +3775,7 @@
                   <a:ea typeface="+mn-ea"/>
                   <a:cs typeface="+mn-cs"/>
                 </a:rPr>
-                <a:t>Participation is optional and does not affect support.</a:t>
+                <a:t>child. No child identifier. Participation is optional and does not affect support.</a:t>
               </a:r>
             </a:p>
           </p:txBody>
@@ -4511,9 +4646,9 @@
         <p:grpSpPr>
           <a:xfrm>
             <a:off x="679704" y="5962650"/>
-            <a:ext cx="8160748" cy="234696"/>
+            <a:ext cx="8200106" cy="234696"/>
             <a:chOff x="679704" y="5962650"/>
-            <a:chExt cx="8160748" cy="234696"/>
+            <a:chExt cx="8200106" cy="234696"/>
           </a:xfrm>
         </p:grpSpPr>
         <p:sp>
@@ -4525,7 +4660,7 @@
           <p:spPr>
             <a:xfrm>
               <a:off x="679704" y="5962650"/>
-              <a:ext cx="8160748" cy="234696"/>
+              <a:ext cx="8200106" cy="234696"/>
             </a:xfrm>
             <a:prstGeom prst="rect">
               <a:avLst/>
@@ -4551,7 +4686,7 @@
                   <a:ea typeface="+mn-ea"/>
                   <a:cs typeface="+mn-cs"/>
                 </a:rPr>
-                <a:t>Author-drafted items; not validated. Pilot wording, periods and options. Design guidance: ONS n.d.; GDS n.d.a–b.</a:t>
+                <a:t>Author-drafted items. Test wording, periods and options. Methods: ONS n.d., §§3–4; administration: GDS n.d.a–c.</a:t>
               </a:r>
             </a:p>
           </p:txBody>
@@ -4802,16 +4937,16 @@
       </p:sp>
       <p:grpSp>
         <p:nvGrpSpPr>
-          <p:cNvPr id="6" name="reporting-intro"/>
+          <p:cNvPr id="6" name="intro"/>
           <p:cNvGrpSpPr/>
           <p:nvPr/>
         </p:nvGrpSpPr>
         <p:grpSpPr>
           <a:xfrm>
             <a:off x="676656" y="1638300"/>
-            <a:ext cx="10451666" cy="352044"/>
+            <a:ext cx="9433508" cy="352044"/>
             <a:chOff x="676656" y="1638300"/>
-            <a:chExt cx="10451666" cy="352044"/>
+            <a:chExt cx="9433508" cy="352044"/>
           </a:xfrm>
         </p:grpSpPr>
         <p:sp>
@@ -4823,7 +4958,7 @@
           <p:spPr>
             <a:xfrm>
               <a:off x="676656" y="1638300"/>
-              <a:ext cx="10451666" cy="352044"/>
+              <a:ext cx="9433508" cy="352044"/>
             </a:xfrm>
             <a:prstGeom prst="rect">
               <a:avLst/>
@@ -4849,7 +4984,7 @@
                   <a:ea typeface="+mn-ea"/>
                   <a:cs typeface="+mn-cs"/>
                 </a:rPr>
-                <a:t>Item-specific denominators. Keep unknown and skipped answers separate. No total score.</a:t>
+                <a:t>Use item-specific valid n; show unsure/skipped counts separately. No total score.</a:t>
               </a:r>
             </a:p>
           </p:txBody>
@@ -4874,9 +5009,9 @@
                 <a:tableStyleId>{5C22544A-7EE6-4342-B048-85BDC9FD1C3A}</a:tableStyleId>
               </a:tblPr>
               <a:tblGrid>
-                <a:gridCol w="2190750"/>
-                <a:gridCol w="4381500"/>
-                <a:gridCol w="4248150"/>
+                <a:gridCol w="2619375"/>
+                <a:gridCol w="4143375"/>
+                <a:gridCol w="4057650"/>
               </a:tblGrid>
               <a:tr h="476250">
                 <a:tc>
@@ -4894,7 +5029,7 @@
                           <a:ea typeface="Microsoft YaHei"/>
                           <a:cs typeface="Arial"/>
                         </a:rPr>
-                        <a:t>Item</a:t>
+                        <a:t>Item / role</a:t>
                       </a:r>
                     </a:p>
                   </a:txBody>
@@ -4925,7 +5060,7 @@
                           <a:ea typeface="Microsoft YaHei"/>
                           <a:cs typeface="Arial"/>
                         </a:rPr>
-                        <a:t>Summary rule</a:t>
+                        <a:t>Reporting rule</a:t>
                       </a:r>
                     </a:p>
                   </a:txBody>
@@ -4989,7 +5124,7 @@
                           <a:ea typeface="Microsoft YaHei"/>
                           <a:cs typeface="Arial"/>
                         </a:rPr>
-                        <a:t>Access change</a:t>
+                        <a:t>Q1 | Primary change</a:t>
                       </a:r>
                     </a:p>
                   </a:txBody>
@@ -5020,7 +5155,7 @@
                           <a:ea typeface="Microsoft YaHei"/>
                           <a:cs typeface="Arial"/>
                         </a:rPr>
-                        <a:t>Report each response category and valid item count.</a:t>
+                        <a:t>Report each change category and valid item count.</a:t>
                       </a:r>
                     </a:p>
                   </a:txBody>
@@ -5051,7 +5186,8 @@
                           <a:ea typeface="Microsoft YaHei"/>
                           <a:cs typeface="Arial"/>
                         </a:rPr>
-                        <a:t>Recalled change, not programme effect.</a:t>
+                        <a:t>Reported change;
+causality not established.</a:t>
                       </a:r>
                     </a:p>
                   </a:txBody>
@@ -5084,7 +5220,7 @@
                           <a:ea typeface="Microsoft YaHei"/>
                           <a:cs typeface="Arial"/>
                         </a:rPr>
-                        <a:t>Cost barrier</a:t>
+                        <a:t>Q2 | Cost context</a:t>
                       </a:r>
                     </a:p>
                   </a:txBody>
@@ -5179,7 +5315,7 @@
                           <a:ea typeface="Microsoft YaHei"/>
                           <a:cs typeface="Arial"/>
                         </a:rPr>
-                        <a:t>Suitability</a:t>
+                        <a:t>Q3 | Fit context</a:t>
                       </a:r>
                     </a:p>
                   </a:txBody>
@@ -5210,7 +5346,7 @@
                           <a:ea typeface="Microsoft YaHei"/>
                           <a:cs typeface="Arial"/>
                         </a:rPr>
-                        <a:t>Report the distribution of fit ratings.</a:t>
+                        <a:t>Report the distribution of perceived-fit ratings.</a:t>
                       </a:r>
                     </a:p>
                   </a:txBody>
@@ -5241,7 +5377,7 @@
                           <a:ea typeface="Microsoft YaHei"/>
                           <a:cs typeface="Arial"/>
                         </a:rPr>
-                        <a:t>Perceived fit, not child development.</a:t>
+                        <a:t>Suitability, not child development.</a:t>
                       </a:r>
                     </a:p>
                   </a:txBody>
@@ -5274,7 +5410,7 @@
                           <a:ea typeface="Microsoft YaHei"/>
                           <a:cs typeface="Arial"/>
                         </a:rPr>
-                        <a:t>Recent use</a:t>
+                        <a:t>Q4 | Use context</a:t>
                       </a:r>
                     </a:p>
                   </a:txBody>
@@ -5336,7 +5472,7 @@
                           <a:ea typeface="Microsoft YaHei"/>
                           <a:cs typeface="Arial"/>
                         </a:rPr>
-                        <a:t>Use of received items, not access improvement.</a:t>
+                        <a:t>Recent use, not an access-change measure.</a:t>
                       </a:r>
                     </a:p>
                   </a:txBody>
@@ -5369,7 +5505,7 @@
                           <a:ea typeface="Microsoft YaHei"/>
                           <a:cs typeface="Arial"/>
                         </a:rPr>
-                        <a:t>Open explanation</a:t>
+                        <a:t>Q5 | Explanation</a:t>
                       </a:r>
                     </a:p>
                   </a:txBody>
@@ -5400,7 +5536,7 @@
                           <a:ea typeface="Microsoft YaHei"/>
                           <a:cs typeface="Arial"/>
                         </a:rPr>
-                        <a:t>Code themes; illustrate with anonymised examples.</a:t>
+                        <a:t>Code themes; use anonymised examples.</a:t>
                       </a:r>
                     </a:p>
                   </a:txBody>
@@ -5431,7 +5567,7 @@
                           <a:ea typeface="Microsoft YaHei"/>
                           <a:cs typeface="Arial"/>
                         </a:rPr>
-                        <a:t>Comments do not estimate population prevalence.</a:t>
+                        <a:t>Explains experiences, not prevalence.</a:t>
                       </a:r>
                     </a:p>
                   </a:txBody>
@@ -5461,9 +5597,9 @@
         <p:grpSpPr>
           <a:xfrm>
             <a:off x="679704" y="5962650"/>
-            <a:ext cx="8239976" cy="234696"/>
+            <a:ext cx="9213536" cy="234696"/>
             <a:chOff x="679704" y="5962650"/>
-            <a:chExt cx="8239976" cy="234696"/>
+            <a:chExt cx="9213536" cy="234696"/>
           </a:xfrm>
         </p:grpSpPr>
         <p:sp>
@@ -5475,7 +5611,7 @@
           <p:spPr>
             <a:xfrm>
               <a:off x="679704" y="5962650"/>
-              <a:ext cx="8239976" cy="234696"/>
+              <a:ext cx="9213536" cy="234696"/>
             </a:xfrm>
             <a:prstGeom prst="rect">
               <a:avLst/>
@@ -5501,7 +5637,7 @@
                   <a:ea typeface="+mn-ea"/>
                   <a:cs typeface="+mn-cs"/>
                 </a:rPr>
-                <a:t>Author’s proposed reporting protocol. Missing/review guidance: GDS n.d.b–c. Full source trail retained with project.</a:t>
+                <a:t>Author’s proposed reporting protocol. Unknown, skipped and no-change answers remain distinct. No composite scale is claimed.</a:t>
               </a:r>
             </a:p>
           </p:txBody>
@@ -5668,9 +5804,9 @@
         <p:grpSpPr>
           <a:xfrm>
             <a:off x="669036" y="527050"/>
-            <a:ext cx="8218827" cy="645414"/>
+            <a:ext cx="7775421" cy="645414"/>
             <a:chOff x="669036" y="527050"/>
-            <a:chExt cx="8218827" cy="645414"/>
+            <a:chExt cx="7775421" cy="645414"/>
           </a:xfrm>
         </p:grpSpPr>
         <p:sp>
@@ -5682,7 +5818,7 @@
           <p:spPr>
             <a:xfrm>
               <a:off x="669036" y="527050"/>
-              <a:ext cx="8218827" cy="645414"/>
+              <a:ext cx="7775421" cy="645414"/>
             </a:xfrm>
             <a:prstGeom prst="rect">
               <a:avLst/>
@@ -5708,7 +5844,7 @@
                   <a:ea typeface="+mn-ea"/>
                   <a:cs typeface="+mn-cs"/>
                 </a:rPr>
-                <a:t>An evidence-informed indicator review</a:t>
+                <a:t>Evidence roles and appraisal criteria</a:t>
               </a:r>
             </a:p>
           </p:txBody>
@@ -5752,16 +5888,16 @@
       </p:sp>
       <p:grpSp>
         <p:nvGrpSpPr>
-          <p:cNvPr id="7" name="method-status"/>
+          <p:cNvPr id="6" name="scope"/>
           <p:cNvGrpSpPr/>
           <p:nvPr/>
         </p:nvGrpSpPr>
         <p:grpSpPr>
           <a:xfrm>
-            <a:off x="672846" y="1682750"/>
-            <a:ext cx="9743430" cy="498729"/>
-            <a:chOff x="672846" y="1682750"/>
-            <a:chExt cx="9743430" cy="498729"/>
+            <a:off x="674370" y="1692275"/>
+            <a:ext cx="7170132" cy="440055"/>
+            <a:chOff x="674370" y="1692275"/>
+            <a:chExt cx="7170132" cy="440055"/>
           </a:xfrm>
         </p:grpSpPr>
         <p:sp>
@@ -5772,8 +5908,8 @@
           </p:nvSpPr>
           <p:spPr>
             <a:xfrm>
-              <a:off x="672846" y="1682750"/>
-              <a:ext cx="4768647" cy="498729"/>
+              <a:off x="674370" y="1692275"/>
+              <a:ext cx="7170132" cy="440055"/>
             </a:xfrm>
             <a:prstGeom prst="rect">
               <a:avLst/>
@@ -5791,7 +5927,7 @@
             <a:p>
               <a:pPr algn="l"/>
               <a:r>
-                <a:rPr lang="en-AU" sz="2550" b="1" dirty="0">
+                <a:rPr lang="en-AU" sz="2250" b="1" dirty="0">
                   <a:solidFill>
                     <a:schemeClr val="accent1"/>
                   </a:solidFill>
@@ -5799,21 +5935,36 @@
                   <a:ea typeface="+mn-ea"/>
                   <a:cs typeface="+mn-cs"/>
                 </a:rPr>
-                <a:t>Desk-based design appraisal</a:t>
+                <a:t>Desk-based design appraisal | no participant data</a:t>
               </a:r>
             </a:p>
           </p:txBody>
         </p:sp>
+      </p:grpSp>
+      <p:grpSp>
+        <p:nvGrpSpPr>
+          <p:cNvPr id="10" name="evidence-roles"/>
+          <p:cNvGrpSpPr/>
+          <p:nvPr/>
+        </p:nvGrpSpPr>
+        <p:grpSpPr>
+          <a:xfrm>
+            <a:off x="675132" y="2355850"/>
+            <a:ext cx="3933170" cy="3094482"/>
+            <a:chOff x="675132" y="2355850"/>
+            <a:chExt cx="3933170" cy="3094482"/>
+          </a:xfrm>
+        </p:grpSpPr>
         <p:sp>
           <p:nvSpPr>
-            <p:cNvPr id="6" name="TextBox 6"/>
+            <p:cNvPr id="7" name="TextBox 7"/>
             <p:cNvSpPr txBox="1"/>
             <p:nvPr/>
           </p:nvSpPr>
           <p:spPr>
             <a:xfrm>
-              <a:off x="7180707" y="1746250"/>
-              <a:ext cx="3235569" cy="410718"/>
+              <a:off x="675132" y="2355850"/>
+              <a:ext cx="2025675" cy="410718"/>
             </a:xfrm>
             <a:prstGeom prst="rect">
               <a:avLst/>
@@ -5833,32 +5984,17 @@
               <a:r>
                 <a:rPr lang="en-AU" sz="2100" b="1" dirty="0">
                   <a:solidFill>
-                    <a:schemeClr val="accent2"/>
-                  </a:solidFill>
-                  <a:latin typeface="+mn-lt"/>
-                  <a:ea typeface="+mn-ea"/>
-                  <a:cs typeface="+mn-cs"/>
-                </a:rPr>
-                <a:t>No survey administered</a:t>
+                    <a:schemeClr val="accent1"/>
+                  </a:solidFill>
+                  <a:latin typeface="+mn-lt"/>
+                  <a:ea typeface="+mn-ea"/>
+                  <a:cs typeface="+mn-cs"/>
+                </a:rPr>
+                <a:t>Evidence roles</a:t>
               </a:r>
             </a:p>
           </p:txBody>
         </p:sp>
-      </p:grpSp>
-      <p:grpSp>
-        <p:nvGrpSpPr>
-          <p:cNvPr id="11" name="sources"/>
-          <p:cNvGrpSpPr/>
-          <p:nvPr/>
-        </p:nvGrpSpPr>
-        <p:grpSpPr>
-          <a:xfrm>
-            <a:off x="675132" y="2470150"/>
-            <a:ext cx="3193039" cy="2996057"/>
-            <a:chOff x="675132" y="2470150"/>
-            <a:chExt cx="3193039" cy="2996057"/>
-          </a:xfrm>
-        </p:grpSpPr>
         <p:sp>
           <p:nvSpPr>
             <p:cNvPr id="8" name="TextBox 8"/>
@@ -5867,8 +6003,8 @@
           </p:nvSpPr>
           <p:spPr>
             <a:xfrm>
-              <a:off x="675132" y="2470150"/>
-              <a:ext cx="1712195" cy="410718"/>
+              <a:off x="676656" y="2755900"/>
+              <a:ext cx="3931646" cy="1637919"/>
             </a:xfrm>
             <a:prstGeom prst="rect">
               <a:avLst/>
@@ -5884,17 +6020,84 @@
             </a:bodyPr>
             <a:lstStyle/>
             <a:p>
-              <a:pPr algn="l"/>
-              <a:r>
-                <a:rPr lang="en-AU" sz="2100" b="1" dirty="0">
-                  <a:solidFill>
-                    <a:schemeClr val="accent1"/>
-                  </a:solidFill>
-                  <a:latin typeface="+mn-lt"/>
-                  <a:ea typeface="+mn-ea"/>
-                  <a:cs typeface="+mn-cs"/>
-                </a:rPr>
-                <a:t>Source base</a:t>
+              <a:pPr algn="l">
+                <a:lnSpc>
+                  <a:spcPts val="3375"/>
+                </a:lnSpc>
+              </a:pPr>
+              <a:r>
+                <a:rPr lang="en-AU" sz="1800" dirty="0">
+                  <a:solidFill>
+                    <a:schemeClr val="dk1"/>
+                  </a:solidFill>
+                  <a:latin typeface="+mn-lt"/>
+                  <a:ea typeface="+mn-ea"/>
+                  <a:cs typeface="+mn-cs"/>
+                </a:rPr>
+                <a:t>Domain: Toy Libraries Australia (2024)</a:t>
+              </a:r>
+              <a:br>
+                <a:rPr lang="en-AU" sz="1800" dirty="0">
+                  <a:solidFill>
+                    <a:schemeClr val="dk1"/>
+                  </a:solidFill>
+                  <a:latin typeface="+mn-lt"/>
+                  <a:ea typeface="+mn-ea"/>
+                  <a:cs typeface="+mn-cs"/>
+                </a:rPr>
+              </a:br>
+              <a:r>
+                <a:rPr lang="en-AU" sz="1800" dirty="0">
+                  <a:solidFill>
+                    <a:schemeClr val="dk1"/>
+                  </a:solidFill>
+                  <a:latin typeface="+mn-lt"/>
+                  <a:ea typeface="+mn-ea"/>
+                  <a:cs typeface="+mn-cs"/>
+                </a:rPr>
+                <a:t>Testing: ONS (n.d.), §§3–4</a:t>
+              </a:r>
+              <a:br>
+                <a:rPr lang="en-AU" sz="1800" dirty="0">
+                  <a:solidFill>
+                    <a:schemeClr val="dk1"/>
+                  </a:solidFill>
+                  <a:latin typeface="+mn-lt"/>
+                  <a:ea typeface="+mn-ea"/>
+                  <a:cs typeface="+mn-cs"/>
+                </a:rPr>
+              </a:br>
+              <a:r>
+                <a:rPr lang="en-AU" sz="1800" dirty="0">
+                  <a:solidFill>
+                    <a:schemeClr val="dk1"/>
+                  </a:solidFill>
+                  <a:latin typeface="+mn-lt"/>
+                  <a:ea typeface="+mn-ea"/>
+                  <a:cs typeface="+mn-cs"/>
+                </a:rPr>
+                <a:t>Measurement: World Bank (2021)</a:t>
+              </a:r>
+              <a:br>
+                <a:rPr lang="en-AU" sz="1800" dirty="0">
+                  <a:solidFill>
+                    <a:schemeClr val="dk1"/>
+                  </a:solidFill>
+                  <a:latin typeface="+mn-lt"/>
+                  <a:ea typeface="+mn-ea"/>
+                  <a:cs typeface="+mn-cs"/>
+                </a:rPr>
+              </a:br>
+              <a:r>
+                <a:rPr lang="en-AU" sz="1800" dirty="0">
+                  <a:solidFill>
+                    <a:schemeClr val="dk1"/>
+                  </a:solidFill>
+                  <a:latin typeface="+mn-lt"/>
+                  <a:ea typeface="+mn-ea"/>
+                  <a:cs typeface="+mn-cs"/>
+                </a:rPr>
+                <a:t>Administration: GDS (n.d.a–c)</a:t>
               </a:r>
             </a:p>
           </p:txBody>
@@ -5907,8 +6110,8 @@
           </p:nvSpPr>
           <p:spPr>
             <a:xfrm>
-              <a:off x="675132" y="2895600"/>
-              <a:ext cx="3193039" cy="1325118"/>
+              <a:off x="677418" y="4841875"/>
+              <a:ext cx="3709496" cy="608457"/>
             </a:xfrm>
             <a:prstGeom prst="rect">
               <a:avLst/>
@@ -5926,96 +6129,10 @@
             <a:p>
               <a:pPr algn="l">
                 <a:lnSpc>
-                  <a:spcPts val="3600"/>
+                  <a:spcPts val="2250"/>
                 </a:lnSpc>
               </a:pPr>
               <a:r>
-                <a:rPr lang="en-AU" sz="2100" dirty="0">
-                  <a:solidFill>
-                    <a:schemeClr val="dk1"/>
-                  </a:solidFill>
-                  <a:latin typeface="+mn-lt"/>
-                  <a:ea typeface="+mn-ea"/>
-                  <a:cs typeface="+mn-cs"/>
-                </a:rPr>
-                <a:t>5 official documents</a:t>
-              </a:r>
-              <a:br>
-                <a:rPr lang="en-AU" sz="2100" dirty="0">
-                  <a:solidFill>
-                    <a:schemeClr val="dk1"/>
-                  </a:solidFill>
-                  <a:latin typeface="+mn-lt"/>
-                  <a:ea typeface="+mn-ea"/>
-                  <a:cs typeface="+mn-cs"/>
-                </a:rPr>
-              </a:br>
-              <a:r>
-                <a:rPr lang="en-AU" sz="2100" dirty="0">
-                  <a:solidFill>
-                    <a:schemeClr val="dk1"/>
-                  </a:solidFill>
-                  <a:latin typeface="+mn-lt"/>
-                  <a:ea typeface="+mn-ea"/>
-                  <a:cs typeface="+mn-cs"/>
-                </a:rPr>
-                <a:t>3 institutions</a:t>
-              </a:r>
-              <a:br>
-                <a:rPr lang="en-AU" sz="2100" dirty="0">
-                  <a:solidFill>
-                    <a:schemeClr val="dk1"/>
-                  </a:solidFill>
-                  <a:latin typeface="+mn-lt"/>
-                  <a:ea typeface="+mn-ea"/>
-                  <a:cs typeface="+mn-cs"/>
-                </a:rPr>
-              </a:br>
-              <a:r>
-                <a:rPr lang="en-AU" sz="2100" dirty="0">
-                  <a:solidFill>
-                    <a:schemeClr val="dk1"/>
-                  </a:solidFill>
-                  <a:latin typeface="+mn-lt"/>
-                  <a:ea typeface="+mn-ea"/>
-                  <a:cs typeface="+mn-cs"/>
-                </a:rPr>
-                <a:t>Course impact frameworks</a:t>
-              </a:r>
-            </a:p>
-          </p:txBody>
-        </p:sp>
-        <p:sp>
-          <p:nvSpPr>
-            <p:cNvPr id="10" name="TextBox 10"/>
-            <p:cNvSpPr txBox="1"/>
-            <p:nvPr/>
-          </p:nvSpPr>
-          <p:spPr>
-            <a:xfrm>
-              <a:off x="677418" y="4838700"/>
-              <a:ext cx="3126989" cy="627507"/>
-            </a:xfrm>
-            <a:prstGeom prst="rect">
-              <a:avLst/>
-            </a:prstGeom>
-            <a:noFill/>
-            <a:ln>
-              <a:noFill/>
-            </a:ln>
-          </p:spPr>
-          <p:txBody>
-            <a:bodyPr wrap="none" lIns="0" tIns="0" rIns="0" bIns="0" anchor="t" anchorCtr="0">
-              <a:spAutoFit/>
-            </a:bodyPr>
-            <a:lstStyle/>
-            <a:p>
-              <a:pPr algn="l">
-                <a:lnSpc>
-                  <a:spcPts val="2400"/>
-                </a:lnSpc>
-              </a:pPr>
-              <a:r>
                 <a:rPr lang="en-AU" sz="1650" dirty="0">
                   <a:solidFill>
                     <a:schemeClr val="accent6"/>
@@ -6024,7 +6141,7 @@
                   <a:ea typeface="+mn-ea"/>
                   <a:cs typeface="+mn-cs"/>
                 </a:rPr>
-                <a:t>General guidance; no toy-specific</a:t>
+                <a:t>Sector, methods and interface evidence</a:t>
               </a:r>
               <a:br>
                 <a:rPr lang="en-AU" sz="1650" dirty="0">
@@ -6045,7 +6162,7 @@
                   <a:ea typeface="+mn-ea"/>
                   <a:cs typeface="+mn-cs"/>
                 </a:rPr>
-                <a:t>measure has been validated.</a:t>
+                <a:t>support different design decisions.</a:t>
               </a:r>
             </a:p>
           </p:txBody>
@@ -6053,27 +6170,27 @@
       </p:grpSp>
       <p:grpSp>
         <p:nvGrpSpPr>
-          <p:cNvPr id="21" name="criteria"/>
+          <p:cNvPr id="20" name="criteria"/>
           <p:cNvGrpSpPr/>
           <p:nvPr/>
         </p:nvGrpSpPr>
         <p:grpSpPr>
           <a:xfrm>
-            <a:off x="6180582" y="2470150"/>
-            <a:ext cx="3816634" cy="2992882"/>
-            <a:chOff x="6180582" y="2470150"/>
-            <a:chExt cx="3816634" cy="2992882"/>
+            <a:off x="6409182" y="2355850"/>
+            <a:ext cx="4021894" cy="2944241"/>
+            <a:chOff x="6409182" y="2355850"/>
+            <a:chExt cx="4021894" cy="2944241"/>
           </a:xfrm>
         </p:grpSpPr>
         <p:sp>
           <p:nvSpPr>
-            <p:cNvPr id="12" name="TextBox 12"/>
+            <p:cNvPr id="11" name="TextBox 11"/>
             <p:cNvSpPr txBox="1"/>
             <p:nvPr/>
           </p:nvSpPr>
           <p:spPr>
             <a:xfrm>
-              <a:off x="6180582" y="2470150"/>
+              <a:off x="6409182" y="2355850"/>
               <a:ext cx="2338872" cy="410718"/>
             </a:xfrm>
             <a:prstGeom prst="rect">
@@ -6101,6 +6218,46 @@
                   <a:cs typeface="+mn-cs"/>
                 </a:rPr>
                 <a:t>Appraisal criteria</a:t>
+              </a:r>
+            </a:p>
+          </p:txBody>
+        </p:sp>
+        <p:sp>
+          <p:nvSpPr>
+            <p:cNvPr id="12" name="TextBox 12"/>
+            <p:cNvSpPr txBox="1"/>
+            <p:nvPr/>
+          </p:nvSpPr>
+          <p:spPr>
+            <a:xfrm>
+              <a:off x="6410706" y="2876550"/>
+              <a:ext cx="1224808" cy="352044"/>
+            </a:xfrm>
+            <a:prstGeom prst="rect">
+              <a:avLst/>
+            </a:prstGeom>
+            <a:noFill/>
+            <a:ln>
+              <a:noFill/>
+            </a:ln>
+          </p:spPr>
+          <p:txBody>
+            <a:bodyPr wrap="none" lIns="0" tIns="0" rIns="0" bIns="0" anchor="t" anchorCtr="0">
+              <a:spAutoFit/>
+            </a:bodyPr>
+            <a:lstStyle/>
+            <a:p>
+              <a:pPr algn="l"/>
+              <a:r>
+                <a:rPr lang="en-AU" sz="1800" b="1" dirty="0">
+                  <a:solidFill>
+                    <a:schemeClr val="accent2"/>
+                  </a:solidFill>
+                  <a:latin typeface="+mn-lt"/>
+                  <a:ea typeface="+mn-ea"/>
+                  <a:cs typeface="+mn-cs"/>
+                </a:rPr>
+                <a:t>Relevance</a:t>
               </a:r>
             </a:p>
           </p:txBody>
@@ -6113,8 +6270,8 @@
           </p:nvSpPr>
           <p:spPr>
             <a:xfrm>
-              <a:off x="6182106" y="3028950"/>
-              <a:ext cx="1224808" cy="352044"/>
+              <a:off x="6411849" y="3190875"/>
+              <a:ext cx="4019227" cy="308991"/>
             </a:xfrm>
             <a:prstGeom prst="rect">
               <a:avLst/>
@@ -6132,15 +6289,15 @@
             <a:p>
               <a:pPr algn="l"/>
               <a:r>
-                <a:rPr lang="en-AU" sz="1800" b="1" dirty="0">
-                  <a:solidFill>
-                    <a:schemeClr val="accent2"/>
-                  </a:solidFill>
-                  <a:latin typeface="+mn-lt"/>
-                  <a:ea typeface="+mn-ea"/>
-                  <a:cs typeface="+mn-cs"/>
-                </a:rPr>
-                <a:t>Relevance</a:t>
+                <a:rPr lang="en-AU" sz="1580" dirty="0">
+                  <a:solidFill>
+                    <a:schemeClr val="dk1"/>
+                  </a:solidFill>
+                  <a:latin typeface="+mn-lt"/>
+                  <a:ea typeface="+mn-ea"/>
+                  <a:cs typeface="+mn-cs"/>
+                </a:rPr>
+                <a:t>Does it measure reported access change?</a:t>
               </a:r>
             </a:p>
           </p:txBody>
@@ -6153,8 +6310,8 @@
           </p:nvSpPr>
           <p:spPr>
             <a:xfrm>
-              <a:off x="6182868" y="3340100"/>
-              <a:ext cx="3814348" cy="322707"/>
+              <a:off x="6410706" y="3476625"/>
+              <a:ext cx="874395" cy="352044"/>
             </a:xfrm>
             <a:prstGeom prst="rect">
               <a:avLst/>
@@ -6172,15 +6329,15 @@
             <a:p>
               <a:pPr algn="l"/>
               <a:r>
-                <a:rPr lang="en-AU" sz="1650" dirty="0">
-                  <a:solidFill>
-                    <a:schemeClr val="dk1"/>
-                  </a:solidFill>
-                  <a:latin typeface="+mn-lt"/>
-                  <a:ea typeface="+mn-ea"/>
-                  <a:cs typeface="+mn-cs"/>
-                </a:rPr>
-                <a:t>Does it answer the research question?</a:t>
+                <a:rPr lang="en-AU" sz="1800" b="1" dirty="0">
+                  <a:solidFill>
+                    <a:schemeClr val="accent2"/>
+                  </a:solidFill>
+                  <a:latin typeface="+mn-lt"/>
+                  <a:ea typeface="+mn-ea"/>
+                  <a:cs typeface="+mn-cs"/>
+                </a:rPr>
+                <a:t>Burden</a:t>
               </a:r>
             </a:p>
           </p:txBody>
@@ -6193,8 +6350,8 @@
           </p:nvSpPr>
           <p:spPr>
             <a:xfrm>
-              <a:off x="6182106" y="3629025"/>
-              <a:ext cx="874395" cy="352044"/>
+              <a:off x="6411849" y="3790950"/>
+              <a:ext cx="3415522" cy="308991"/>
             </a:xfrm>
             <a:prstGeom prst="rect">
               <a:avLst/>
@@ -6212,15 +6369,15 @@
             <a:p>
               <a:pPr algn="l"/>
               <a:r>
-                <a:rPr lang="en-AU" sz="1800" b="1" dirty="0">
-                  <a:solidFill>
-                    <a:schemeClr val="accent2"/>
-                  </a:solidFill>
-                  <a:latin typeface="+mn-lt"/>
-                  <a:ea typeface="+mn-ea"/>
-                  <a:cs typeface="+mn-cs"/>
-                </a:rPr>
-                <a:t>Burden</a:t>
+                <a:rPr lang="en-AU" sz="1580" dirty="0">
+                  <a:solidFill>
+                    <a:schemeClr val="dk1"/>
+                  </a:solidFill>
+                  <a:latin typeface="+mn-lt"/>
+                  <a:ea typeface="+mn-ea"/>
+                  <a:cs typeface="+mn-cs"/>
+                </a:rPr>
+                <a:t>Recall, contacts and response effort</a:t>
               </a:r>
             </a:p>
           </p:txBody>
@@ -6233,8 +6390,8 @@
           </p:nvSpPr>
           <p:spPr>
             <a:xfrm>
-              <a:off x="6182868" y="3940175"/>
-              <a:ext cx="3579182" cy="322707"/>
+              <a:off x="6410706" y="4076700"/>
+              <a:ext cx="1209457" cy="352044"/>
             </a:xfrm>
             <a:prstGeom prst="rect">
               <a:avLst/>
@@ -6252,15 +6409,15 @@
             <a:p>
               <a:pPr algn="l"/>
               <a:r>
-                <a:rPr lang="en-AU" sz="1650" dirty="0">
-                  <a:solidFill>
-                    <a:schemeClr val="dk1"/>
-                  </a:solidFill>
-                  <a:latin typeface="+mn-lt"/>
-                  <a:ea typeface="+mn-ea"/>
-                  <a:cs typeface="+mn-cs"/>
-                </a:rPr>
-                <a:t>What must a carer recall or explain?</a:t>
+                <a:rPr lang="en-AU" sz="1800" b="1" dirty="0">
+                  <a:solidFill>
+                    <a:schemeClr val="accent2"/>
+                  </a:solidFill>
+                  <a:latin typeface="+mn-lt"/>
+                  <a:ea typeface="+mn-ea"/>
+                  <a:cs typeface="+mn-cs"/>
+                </a:rPr>
+                <a:t>Feasibility</a:t>
               </a:r>
             </a:p>
           </p:txBody>
@@ -6273,8 +6430,8 @@
           </p:nvSpPr>
           <p:spPr>
             <a:xfrm>
-              <a:off x="6182106" y="4229100"/>
-              <a:ext cx="1209457" cy="352044"/>
+              <a:off x="6411849" y="4391025"/>
+              <a:ext cx="3352187" cy="308991"/>
             </a:xfrm>
             <a:prstGeom prst="rect">
               <a:avLst/>
@@ -6292,15 +6449,15 @@
             <a:p>
               <a:pPr algn="l"/>
               <a:r>
-                <a:rPr lang="en-AU" sz="1800" b="1" dirty="0">
-                  <a:solidFill>
-                    <a:schemeClr val="accent2"/>
-                  </a:solidFill>
-                  <a:latin typeface="+mn-lt"/>
-                  <a:ea typeface="+mn-ea"/>
-                  <a:cs typeface="+mn-cs"/>
-                </a:rPr>
-                <a:t>Feasibility</a:t>
+                <a:rPr lang="en-AU" sz="1580" dirty="0">
+                  <a:solidFill>
+                    <a:schemeClr val="dk1"/>
+                  </a:solidFill>
+                  <a:latin typeface="+mn-lt"/>
+                  <a:ea typeface="+mn-ea"/>
+                  <a:cs typeface="+mn-cs"/>
+                </a:rPr>
+                <a:t>Available data, linkage and A3 time</a:t>
               </a:r>
             </a:p>
           </p:txBody>
@@ -6313,8 +6470,8 @@
           </p:nvSpPr>
           <p:spPr>
             <a:xfrm>
-              <a:off x="6182868" y="4540250"/>
-              <a:ext cx="3197331" cy="322707"/>
+              <a:off x="6410706" y="4676775"/>
+              <a:ext cx="1586280" cy="352044"/>
             </a:xfrm>
             <a:prstGeom prst="rect">
               <a:avLst/>
@@ -6332,15 +6489,15 @@
             <a:p>
               <a:pPr algn="l"/>
               <a:r>
-                <a:rPr lang="en-AU" sz="1650" dirty="0">
-                  <a:solidFill>
-                    <a:schemeClr val="dk1"/>
-                  </a:solidFill>
-                  <a:latin typeface="+mn-lt"/>
-                  <a:ea typeface="+mn-ea"/>
-                  <a:cs typeface="+mn-cs"/>
-                </a:rPr>
-                <a:t>Can the team collect and use it?</a:t>
+                <a:rPr lang="en-AU" sz="1800" b="1" dirty="0">
+                  <a:solidFill>
+                    <a:schemeClr val="accent2"/>
+                  </a:solidFill>
+                  <a:latin typeface="+mn-lt"/>
+                  <a:ea typeface="+mn-ea"/>
+                  <a:cs typeface="+mn-cs"/>
+                </a:rPr>
+                <a:t>Interpretation</a:t>
               </a:r>
             </a:p>
           </p:txBody>
@@ -6353,8 +6510,8 @@
           </p:nvSpPr>
           <p:spPr>
             <a:xfrm>
-              <a:off x="6182106" y="4829175"/>
-              <a:ext cx="1586280" cy="352044"/>
+              <a:off x="6411849" y="4991100"/>
+              <a:ext cx="3498809" cy="308991"/>
             </a:xfrm>
             <a:prstGeom prst="rect">
               <a:avLst/>
@@ -6372,29 +6529,44 @@
             <a:p>
               <a:pPr algn="l"/>
               <a:r>
-                <a:rPr lang="en-AU" sz="1800" b="1" dirty="0">
-                  <a:solidFill>
-                    <a:schemeClr val="accent2"/>
-                  </a:solidFill>
-                  <a:latin typeface="+mn-lt"/>
-                  <a:ea typeface="+mn-ea"/>
-                  <a:cs typeface="+mn-cs"/>
-                </a:rPr>
-                <a:t>Interpretation</a:t>
+                <a:rPr lang="en-AU" sz="1580" dirty="0">
+                  <a:solidFill>
+                    <a:schemeClr val="dk1"/>
+                  </a:solidFill>
+                  <a:latin typeface="+mn-lt"/>
+                  <a:ea typeface="+mn-ea"/>
+                  <a:cs typeface="+mn-cs"/>
+                </a:rPr>
+                <a:t>Which claim can the design support?</a:t>
               </a:r>
             </a:p>
           </p:txBody>
         </p:sp>
+      </p:grpSp>
+      <p:grpSp>
+        <p:nvGrpSpPr>
+          <p:cNvPr id="22" name="source-note"/>
+          <p:cNvGrpSpPr/>
+          <p:nvPr/>
+        </p:nvGrpSpPr>
+        <p:grpSpPr>
+          <a:xfrm>
+            <a:off x="679704" y="5962650"/>
+            <a:ext cx="9048332" cy="234696"/>
+            <a:chOff x="679704" y="5962650"/>
+            <a:chExt cx="9048332" cy="234696"/>
+          </a:xfrm>
+        </p:grpSpPr>
         <p:sp>
           <p:nvSpPr>
-            <p:cNvPr id="20" name="TextBox 20"/>
+            <p:cNvPr id="21" name="TextBox 21"/>
             <p:cNvSpPr txBox="1"/>
             <p:nvPr/>
           </p:nvSpPr>
           <p:spPr>
             <a:xfrm>
-              <a:off x="6182868" y="5140325"/>
-              <a:ext cx="2850770" cy="322707"/>
+              <a:off x="679704" y="5962650"/>
+              <a:ext cx="9048332" cy="234696"/>
             </a:xfrm>
             <a:prstGeom prst="rect">
               <a:avLst/>
@@ -6412,61 +6584,6 @@
             <a:p>
               <a:pPr algn="l"/>
               <a:r>
-                <a:rPr lang="en-AU" sz="1650" dirty="0">
-                  <a:solidFill>
-                    <a:schemeClr val="dk1"/>
-                  </a:solidFill>
-                  <a:latin typeface="+mn-lt"/>
-                  <a:ea typeface="+mn-ea"/>
-                  <a:cs typeface="+mn-cs"/>
-                </a:rPr>
-                <a:t>Which claims can it support?</a:t>
-              </a:r>
-            </a:p>
-          </p:txBody>
-        </p:sp>
-      </p:grpSp>
-      <p:grpSp>
-        <p:nvGrpSpPr>
-          <p:cNvPr id="23" name="source-note"/>
-          <p:cNvGrpSpPr/>
-          <p:nvPr/>
-        </p:nvGrpSpPr>
-        <p:grpSpPr>
-          <a:xfrm>
-            <a:off x="679704" y="5962650"/>
-            <a:ext cx="7095387" cy="234696"/>
-            <a:chOff x="679704" y="5962650"/>
-            <a:chExt cx="7095387" cy="234696"/>
-          </a:xfrm>
-        </p:grpSpPr>
-        <p:sp>
-          <p:nvSpPr>
-            <p:cNvPr id="22" name="TextBox 22"/>
-            <p:cNvSpPr txBox="1"/>
-            <p:nvPr/>
-          </p:nvSpPr>
-          <p:spPr>
-            <a:xfrm>
-              <a:off x="679704" y="5962650"/>
-              <a:ext cx="7095387" cy="234696"/>
-            </a:xfrm>
-            <a:prstGeom prst="rect">
-              <a:avLst/>
-            </a:prstGeom>
-            <a:noFill/>
-            <a:ln>
-              <a:noFill/>
-            </a:ln>
-          </p:spPr>
-          <p:txBody>
-            <a:bodyPr wrap="none" lIns="0" tIns="0" rIns="0" bIns="0" anchor="t" anchorCtr="0">
-              <a:spAutoFit/>
-            </a:bodyPr>
-            <a:lstStyle/>
-            <a:p>
-              <a:pPr algn="l"/>
-              <a:r>
                 <a:rPr lang="en-AU" sz="1200" dirty="0">
                   <a:solidFill>
                     <a:schemeClr val="accent6"/>
@@ -6475,7 +6592,7 @@
                   <a:ea typeface="+mn-ea"/>
                   <a:cs typeface="+mn-cs"/>
                 </a:rPr>
-                <a:t>Sources: Bjarkefur et al. 2021; ONS n.d.; GDS n.d.a–c. Five documents, not five empirical studies.</a:t>
+                <a:t>Scope: proposed items have not been validated in Joy of Giving. Source roles are distinguished in the review and comparison.</a:t>
               </a:r>
             </a:p>
           </p:txBody>
@@ -6483,7 +6600,7 @@
       </p:grpSp>
       <p:sp>
         <p:nvSpPr>
-          <p:cNvPr id="24" name="Line 24"/>
+          <p:cNvPr id="23" name="Line 23"/>
           <p:cNvSpPr/>
           <p:nvPr/>
         </p:nvSpPr>
@@ -6519,7 +6636,7 @@
       </p:sp>
       <p:sp>
         <p:nvSpPr>
-          <p:cNvPr id="25" name="footer-label"/>
+          <p:cNvPr id="24" name="footer-label"/>
           <p:cNvSpPr txBox="1"/>
           <p:nvPr/>
         </p:nvSpPr>
@@ -6559,7 +6676,7 @@
       </p:sp>
       <p:sp>
         <p:nvSpPr>
-          <p:cNvPr id="26" name="page-number"/>
+          <p:cNvPr id="25" name="page-number"/>
           <p:cNvSpPr txBox="1"/>
           <p:nvPr/>
         </p:nvSpPr>
@@ -6642,9 +6759,9 @@
         <p:grpSpPr>
           <a:xfrm>
             <a:off x="669036" y="527050"/>
-            <a:ext cx="8145223" cy="645414"/>
+            <a:ext cx="8466608" cy="645414"/>
             <a:chOff x="669036" y="527050"/>
-            <a:chExt cx="8145223" cy="645414"/>
+            <a:chExt cx="8466608" cy="645414"/>
           </a:xfrm>
         </p:grpSpPr>
         <p:sp>
@@ -6656,7 +6773,7 @@
           <p:spPr>
             <a:xfrm>
               <a:off x="669036" y="527050"/>
-              <a:ext cx="8145223" cy="645414"/>
+              <a:ext cx="8466608" cy="645414"/>
             </a:xfrm>
             <a:prstGeom prst="rect">
               <a:avLst/>
@@ -6682,7 +6799,7 @@
                   <a:ea typeface="+mn-ea"/>
                   <a:cs typeface="+mn-cs"/>
                 </a:rPr>
-                <a:t>Measure access beyond redistribution</a:t>
+                <a:t>Separate the outcome from its evidence</a:t>
               </a:r>
             </a:p>
           </p:txBody>
@@ -6726,16 +6843,16 @@
       </p:sp>
       <p:grpSp>
         <p:nvGrpSpPr>
-          <p:cNvPr id="6" name="logic-intro"/>
+          <p:cNvPr id="6" name="intro"/>
           <p:cNvGrpSpPr/>
           <p:nvPr/>
         </p:nvGrpSpPr>
         <p:grpSpPr>
           <a:xfrm>
-            <a:off x="675132" y="1651000"/>
-            <a:ext cx="6897228" cy="410718"/>
-            <a:chOff x="675132" y="1651000"/>
-            <a:chExt cx="6897228" cy="410718"/>
+            <a:off x="675132" y="1631950"/>
+            <a:ext cx="7164875" cy="410718"/>
+            <a:chOff x="675132" y="1631950"/>
+            <a:chExt cx="7164875" cy="410718"/>
           </a:xfrm>
         </p:grpSpPr>
         <p:sp>
@@ -6746,8 +6863,8 @@
           </p:nvSpPr>
           <p:spPr>
             <a:xfrm>
-              <a:off x="675132" y="1651000"/>
-              <a:ext cx="6897228" cy="410718"/>
+              <a:off x="675132" y="1631950"/>
+              <a:ext cx="7164875" cy="410718"/>
             </a:xfrm>
             <a:prstGeom prst="rect">
               <a:avLst/>
@@ -6773,7 +6890,7 @@
                   <a:ea typeface="+mn-ea"/>
                   <a:cs typeface="+mn-cs"/>
                 </a:rPr>
-                <a:t>A proposed pathway for one short-term social outcome</a:t>
+                <a:t>Desired change and measurement evidence are different</a:t>
               </a:r>
             </a:p>
           </p:txBody>
@@ -6781,16 +6898,16 @@
       </p:grpSp>
       <p:grpSp>
         <p:nvGrpSpPr>
-          <p:cNvPr id="19" name="logic-pathway"/>
+          <p:cNvPr id="15" name="outcome-pathway"/>
           <p:cNvGrpSpPr/>
           <p:nvPr/>
         </p:nvGrpSpPr>
         <p:grpSpPr>
           <a:xfrm>
-            <a:off x="673608" y="2301875"/>
-            <a:ext cx="10773208" cy="2246757"/>
-            <a:chOff x="673608" y="2301875"/>
-            <a:chExt cx="10773208" cy="2246757"/>
+            <a:off x="674370" y="2292350"/>
+            <a:ext cx="10133571" cy="1198880"/>
+            <a:chOff x="674370" y="2292350"/>
+            <a:chExt cx="10133571" cy="1198880"/>
           </a:xfrm>
         </p:grpSpPr>
         <p:sp>
@@ -6801,7 +6918,7 @@
           </p:nvSpPr>
           <p:spPr>
             <a:xfrm>
-              <a:off x="677418" y="2301875"/>
+              <a:off x="677418" y="2292350"/>
               <a:ext cx="1085945" cy="322707"/>
             </a:xfrm>
             <a:prstGeom prst="rect">
@@ -6841,8 +6958,8 @@
           </p:nvSpPr>
           <p:spPr>
             <a:xfrm>
-              <a:off x="673608" y="2784475"/>
-              <a:ext cx="2779711" cy="469392"/>
+              <a:off x="674370" y="2682875"/>
+              <a:ext cx="2605979" cy="440055"/>
             </a:xfrm>
             <a:prstGeom prst="rect">
               <a:avLst/>
@@ -6860,7 +6977,7 @@
             <a:p>
               <a:pPr algn="l"/>
               <a:r>
-                <a:rPr lang="en-AU" sz="2400" b="1" dirty="0">
+                <a:rPr lang="en-AU" sz="2250" b="1" dirty="0">
                   <a:solidFill>
                     <a:schemeClr val="accent1"/>
                   </a:solidFill>
@@ -6881,8 +6998,8 @@
           </p:nvSpPr>
           <p:spPr>
             <a:xfrm>
-              <a:off x="676656" y="3562350"/>
-              <a:ext cx="2895235" cy="352044"/>
+              <a:off x="4087368" y="2292350"/>
+              <a:ext cx="981552" cy="322707"/>
             </a:xfrm>
             <a:prstGeom prst="rect">
               <a:avLst/>
@@ -6900,15 +7017,15 @@
             <a:p>
               <a:pPr algn="l"/>
               <a:r>
-                <a:rPr lang="en-AU" sz="1800" dirty="0">
-                  <a:solidFill>
-                    <a:schemeClr val="dk1"/>
-                  </a:solidFill>
-                  <a:latin typeface="+mn-lt"/>
-                  <a:ea typeface="+mn-ea"/>
-                  <a:cs typeface="+mn-cs"/>
-                </a:rPr>
-                <a:t>What the programme does</a:t>
+                <a:rPr lang="en-AU" sz="1650" b="1" dirty="0">
+                  <a:solidFill>
+                    <a:schemeClr val="accent2"/>
+                  </a:solidFill>
+                  <a:latin typeface="+mn-lt"/>
+                  <a:ea typeface="+mn-ea"/>
+                  <a:cs typeface="+mn-cs"/>
+                </a:rPr>
+                <a:t>OUTPUT</a:t>
               </a:r>
             </a:p>
           </p:txBody>
@@ -6921,8 +7038,8 @@
           </p:nvSpPr>
           <p:spPr>
             <a:xfrm>
-              <a:off x="4601718" y="2301875"/>
-              <a:ext cx="981552" cy="322707"/>
+              <a:off x="4084320" y="2682875"/>
+              <a:ext cx="2136842" cy="440055"/>
             </a:xfrm>
             <a:prstGeom prst="rect">
               <a:avLst/>
@@ -6940,15 +7057,15 @@
             <a:p>
               <a:pPr algn="l"/>
               <a:r>
-                <a:rPr lang="en-AU" sz="1650" b="1" dirty="0">
-                  <a:solidFill>
-                    <a:schemeClr val="accent2"/>
-                  </a:solidFill>
-                  <a:latin typeface="+mn-lt"/>
-                  <a:ea typeface="+mn-ea"/>
-                  <a:cs typeface="+mn-cs"/>
-                </a:rPr>
-                <a:t>OUTPUT</a:t>
+                <a:rPr lang="en-AU" sz="2250" b="1" dirty="0">
+                  <a:solidFill>
+                    <a:schemeClr val="accent1"/>
+                  </a:solidFill>
+                  <a:latin typeface="+mn-lt"/>
+                  <a:ea typeface="+mn-ea"/>
+                  <a:cs typeface="+mn-cs"/>
+                </a:rPr>
+                <a:t>Items received</a:t>
               </a:r>
             </a:p>
           </p:txBody>
@@ -6961,8 +7078,8 @@
           </p:nvSpPr>
           <p:spPr>
             <a:xfrm>
-              <a:off x="4597908" y="2784475"/>
-              <a:ext cx="2279298" cy="469392"/>
+              <a:off x="7611618" y="2292350"/>
+              <a:ext cx="2481072" cy="322707"/>
             </a:xfrm>
             <a:prstGeom prst="rect">
               <a:avLst/>
@@ -6980,15 +7097,15 @@
             <a:p>
               <a:pPr algn="l"/>
               <a:r>
-                <a:rPr lang="en-AU" sz="2400" b="1" dirty="0">
-                  <a:solidFill>
-                    <a:schemeClr val="accent1"/>
-                  </a:solidFill>
-                  <a:latin typeface="+mn-lt"/>
-                  <a:ea typeface="+mn-ea"/>
-                  <a:cs typeface="+mn-cs"/>
-                </a:rPr>
-                <a:t>Items received</a:t>
+                <a:rPr lang="en-AU" sz="1650" b="1" dirty="0">
+                  <a:solidFill>
+                    <a:schemeClr val="accent2"/>
+                  </a:solidFill>
+                  <a:latin typeface="+mn-lt"/>
+                  <a:ea typeface="+mn-ea"/>
+                  <a:cs typeface="+mn-cs"/>
+                </a:rPr>
+                <a:t>INTENDED OUTCOME</a:t>
               </a:r>
             </a:p>
           </p:txBody>
@@ -7001,8 +7118,8 @@
           </p:nvSpPr>
           <p:spPr>
             <a:xfrm>
-              <a:off x="4600956" y="3562350"/>
-              <a:ext cx="1681360" cy="352044"/>
+              <a:off x="7608570" y="2670175"/>
+              <a:ext cx="3199371" cy="821055"/>
             </a:xfrm>
             <a:prstGeom prst="rect">
               <a:avLst/>
@@ -7018,151 +7135,56 @@
             </a:bodyPr>
             <a:lstStyle/>
             <a:p>
-              <a:pPr algn="l"/>
-              <a:r>
-                <a:rPr lang="en-AU" sz="1800" dirty="0">
-                  <a:solidFill>
-                    <a:schemeClr val="dk1"/>
-                  </a:solidFill>
-                  <a:latin typeface="+mn-lt"/>
-                  <a:ea typeface="+mn-ea"/>
-                  <a:cs typeface="+mn-cs"/>
-                </a:rPr>
-                <a:t>What it delivers</a:t>
+              <a:pPr algn="l">
+                <a:lnSpc>
+                  <a:spcPts val="3000"/>
+                </a:lnSpc>
+              </a:pPr>
+              <a:r>
+                <a:rPr lang="en-AU" sz="2250" b="1" dirty="0">
+                  <a:solidFill>
+                    <a:schemeClr val="accent1"/>
+                  </a:solidFill>
+                  <a:latin typeface="+mn-lt"/>
+                  <a:ea typeface="+mn-ea"/>
+                  <a:cs typeface="+mn-cs"/>
+                </a:rPr>
+                <a:t>Improved access to</a:t>
+              </a:r>
+              <a:br>
+                <a:rPr lang="en-AU" sz="2250" b="1" dirty="0">
+                  <a:solidFill>
+                    <a:schemeClr val="accent1"/>
+                  </a:solidFill>
+                  <a:latin typeface="+mn-lt"/>
+                  <a:ea typeface="+mn-ea"/>
+                  <a:cs typeface="+mn-cs"/>
+                </a:rPr>
+              </a:br>
+              <a:r>
+                <a:rPr lang="en-AU" sz="2250" b="1" dirty="0">
+                  <a:solidFill>
+                    <a:schemeClr val="accent1"/>
+                  </a:solidFill>
+                  <a:latin typeface="+mn-lt"/>
+                  <a:ea typeface="+mn-ea"/>
+                  <a:cs typeface="+mn-cs"/>
+                </a:rPr>
+                <a:t>suitable play resources</a:t>
               </a:r>
             </a:p>
           </p:txBody>
         </p:sp>
         <p:sp>
           <p:nvSpPr>
-            <p:cNvPr id="13" name="TextBox 13"/>
-            <p:cNvSpPr txBox="1"/>
-            <p:nvPr/>
-          </p:nvSpPr>
-          <p:spPr>
-            <a:xfrm>
-              <a:off x="8526018" y="2301875"/>
-              <a:ext cx="2481072" cy="322707"/>
-            </a:xfrm>
-            <a:prstGeom prst="rect">
-              <a:avLst/>
-            </a:prstGeom>
-            <a:noFill/>
-            <a:ln>
-              <a:noFill/>
-            </a:ln>
-          </p:spPr>
-          <p:txBody>
-            <a:bodyPr wrap="none" lIns="0" tIns="0" rIns="0" bIns="0" anchor="t" anchorCtr="0">
-              <a:spAutoFit/>
-            </a:bodyPr>
-            <a:lstStyle/>
-            <a:p>
-              <a:pPr algn="l"/>
-              <a:r>
-                <a:rPr lang="en-AU" sz="1650" b="1" dirty="0">
-                  <a:solidFill>
-                    <a:schemeClr val="accent2"/>
-                  </a:solidFill>
-                  <a:latin typeface="+mn-lt"/>
-                  <a:ea typeface="+mn-ea"/>
-                  <a:cs typeface="+mn-cs"/>
-                </a:rPr>
-                <a:t>INTENDED OUTCOME</a:t>
-              </a:r>
-            </a:p>
-          </p:txBody>
-        </p:sp>
-        <p:sp>
-          <p:nvSpPr>
-            <p:cNvPr id="14" name="TextBox 14"/>
-            <p:cNvSpPr txBox="1"/>
-            <p:nvPr/>
-          </p:nvSpPr>
-          <p:spPr>
-            <a:xfrm>
-              <a:off x="8522208" y="2784475"/>
-              <a:ext cx="2620901" cy="469392"/>
-            </a:xfrm>
-            <a:prstGeom prst="rect">
-              <a:avLst/>
-            </a:prstGeom>
-            <a:noFill/>
-            <a:ln>
-              <a:noFill/>
-            </a:ln>
-          </p:spPr>
-          <p:txBody>
-            <a:bodyPr wrap="none" lIns="0" tIns="0" rIns="0" bIns="0" anchor="t" anchorCtr="0">
-              <a:spAutoFit/>
-            </a:bodyPr>
-            <a:lstStyle/>
-            <a:p>
-              <a:pPr algn="l"/>
-              <a:r>
-                <a:rPr lang="en-AU" sz="2400" b="1" dirty="0">
-                  <a:solidFill>
-                    <a:schemeClr val="accent1"/>
-                  </a:solidFill>
-                  <a:latin typeface="+mn-lt"/>
-                  <a:ea typeface="+mn-ea"/>
-                  <a:cs typeface="+mn-cs"/>
-                </a:rPr>
-                <a:t>Reported access</a:t>
-              </a:r>
-            </a:p>
-          </p:txBody>
-        </p:sp>
-        <p:sp>
-          <p:nvSpPr>
-            <p:cNvPr id="15" name="TextBox 15"/>
-            <p:cNvSpPr txBox="1"/>
-            <p:nvPr/>
-          </p:nvSpPr>
-          <p:spPr>
-            <a:xfrm>
-              <a:off x="8525256" y="3562350"/>
-              <a:ext cx="2921560" cy="352044"/>
-            </a:xfrm>
-            <a:prstGeom prst="rect">
-              <a:avLst/>
-            </a:prstGeom>
-            <a:noFill/>
-            <a:ln>
-              <a:noFill/>
-            </a:ln>
-          </p:spPr>
-          <p:txBody>
-            <a:bodyPr wrap="none" lIns="0" tIns="0" rIns="0" bIns="0" anchor="t" anchorCtr="0">
-              <a:spAutoFit/>
-            </a:bodyPr>
-            <a:lstStyle/>
-            <a:p>
-              <a:pPr algn="l"/>
-              <a:r>
-                <a:rPr lang="en-AU" sz="1800" dirty="0">
-                  <a:solidFill>
-                    <a:schemeClr val="dk1"/>
-                  </a:solidFill>
-                  <a:latin typeface="+mn-lt"/>
-                  <a:ea typeface="+mn-ea"/>
-                  <a:cs typeface="+mn-cs"/>
-                </a:rPr>
-                <a:t>What families say changed</a:t>
-              </a:r>
-            </a:p>
-          </p:txBody>
-        </p:sp>
-        <p:sp>
-          <p:nvSpPr>
-            <p:cNvPr id="16" name="Line 16"/>
+            <p:cNvPr id="13" name="Line 13"/>
             <p:cNvSpPr/>
             <p:nvPr/>
           </p:nvSpPr>
           <p:spPr>
             <a:xfrm>
-              <a:off x="3781425" y="3000375"/>
-              <a:ext cx="552450" cy="1"/>
+              <a:off x="3514725" y="2914650"/>
+              <a:ext cx="390525" cy="1"/>
             </a:xfrm>
             <a:prstGeom prst="line">
               <a:avLst/>
@@ -7178,14 +7200,14 @@
         </p:sp>
         <p:sp>
           <p:nvSpPr>
-            <p:cNvPr id="17" name="Line 17"/>
+            <p:cNvPr id="14" name="Line 14"/>
             <p:cNvSpPr/>
             <p:nvPr/>
           </p:nvSpPr>
           <p:spPr>
             <a:xfrm>
-              <a:off x="7715250" y="3000375"/>
-              <a:ext cx="552450" cy="1"/>
+              <a:off x="6981825" y="2914650"/>
+              <a:ext cx="447675" cy="1"/>
             </a:xfrm>
             <a:prstGeom prst="line">
               <a:avLst/>
@@ -7198,6 +7220,83 @@
               <a:tailEnd type="arrow" w="lg" len="lg"/>
             </a:ln>
           </p:spPr>
+        </p:sp>
+      </p:grpSp>
+      <p:grpSp>
+        <p:nvGrpSpPr>
+          <p:cNvPr id="19" name="measurement-evidence"/>
+          <p:cNvGrpSpPr/>
+          <p:nvPr/>
+        </p:nvGrpSpPr>
+        <p:grpSpPr>
+          <a:xfrm>
+            <a:off x="685800" y="3895725"/>
+            <a:ext cx="10820400" cy="1047750"/>
+            <a:chOff x="685800" y="3895725"/>
+            <a:chExt cx="10820400" cy="1047750"/>
+          </a:xfrm>
+        </p:grpSpPr>
+        <p:sp>
+          <p:nvSpPr>
+            <p:cNvPr id="16" name="Rectangle 16"/>
+            <p:cNvSpPr/>
+            <p:nvPr/>
+          </p:nvSpPr>
+          <p:spPr>
+            <a:xfrm>
+              <a:off x="685800" y="3895725"/>
+              <a:ext cx="10820400" cy="1047750"/>
+            </a:xfrm>
+            <a:prstGeom prst="rect">
+              <a:avLst/>
+            </a:prstGeom>
+            <a:solidFill>
+              <a:schemeClr val="accent5"/>
+            </a:solidFill>
+            <a:ln>
+              <a:noFill/>
+            </a:ln>
+          </p:spPr>
+        </p:sp>
+        <p:sp>
+          <p:nvSpPr>
+            <p:cNvPr id="17" name="TextBox 17"/>
+            <p:cNvSpPr txBox="1"/>
+            <p:nvPr/>
+          </p:nvSpPr>
+          <p:spPr>
+            <a:xfrm>
+              <a:off x="886968" y="4006850"/>
+              <a:ext cx="3120337" cy="322707"/>
+            </a:xfrm>
+            <a:prstGeom prst="rect">
+              <a:avLst/>
+            </a:prstGeom>
+            <a:noFill/>
+            <a:ln>
+              <a:noFill/>
+            </a:ln>
+          </p:spPr>
+          <p:txBody>
+            <a:bodyPr wrap="none" lIns="0" tIns="0" rIns="0" bIns="0" anchor="t" anchorCtr="0">
+              <a:spAutoFit/>
+            </a:bodyPr>
+            <a:lstStyle/>
+            <a:p>
+              <a:pPr algn="l"/>
+              <a:r>
+                <a:rPr lang="en-AU" sz="1650" b="1" dirty="0">
+                  <a:solidFill>
+                    <a:schemeClr val="accent2"/>
+                  </a:solidFill>
+                  <a:latin typeface="+mn-lt"/>
+                  <a:ea typeface="+mn-ea"/>
+                  <a:cs typeface="+mn-cs"/>
+                </a:rPr>
+                <a:t>MEASUREMENT EVIDENCE</a:t>
+              </a:r>
+            </a:p>
+          </p:txBody>
         </p:sp>
         <p:sp>
           <p:nvSpPr>
@@ -7207,8 +7306,8 @@
           </p:nvSpPr>
           <p:spPr>
             <a:xfrm>
-              <a:off x="677418" y="4225925"/>
-              <a:ext cx="4542588" cy="322707"/>
+              <a:off x="883920" y="4359275"/>
+              <a:ext cx="5263258" cy="440055"/>
             </a:xfrm>
             <a:prstGeom prst="rect">
               <a:avLst/>
@@ -7226,15 +7325,15 @@
             <a:p>
               <a:pPr algn="l"/>
               <a:r>
-                <a:rPr lang="en-AU" sz="1650" dirty="0">
-                  <a:solidFill>
-                    <a:schemeClr val="accent6"/>
-                  </a:solidFill>
-                  <a:latin typeface="+mn-lt"/>
-                  <a:ea typeface="+mn-ea"/>
-                  <a:cs typeface="+mn-cs"/>
-                </a:rPr>
-                <a:t>The output-to-outcome link requires evidence.</a:t>
+                <a:rPr lang="en-AU" sz="2250" b="1" dirty="0">
+                  <a:solidFill>
+                    <a:schemeClr val="accent1"/>
+                  </a:solidFill>
+                  <a:latin typeface="+mn-lt"/>
+                  <a:ea typeface="+mn-ea"/>
+                  <a:cs typeface="+mn-cs"/>
+                </a:rPr>
+                <a:t>Family-reported access change (Q1)</a:t>
               </a:r>
             </a:p>
           </p:txBody>
@@ -7242,16 +7341,16 @@
       </p:grpSp>
       <p:grpSp>
         <p:nvGrpSpPr>
-          <p:cNvPr id="22" name="satisfaction-distinction"/>
+          <p:cNvPr id="21" name="service-boundary"/>
           <p:cNvGrpSpPr/>
           <p:nvPr/>
         </p:nvGrpSpPr>
         <p:grpSpPr>
           <a:xfrm>
-            <a:off x="675132" y="5003800"/>
-            <a:ext cx="6263847" cy="777494"/>
-            <a:chOff x="675132" y="5003800"/>
-            <a:chExt cx="6263847" cy="777494"/>
+            <a:off x="676656" y="5410200"/>
+            <a:ext cx="7635364" cy="352044"/>
+            <a:chOff x="676656" y="5410200"/>
+            <a:chExt cx="7635364" cy="352044"/>
           </a:xfrm>
         </p:grpSpPr>
         <p:sp>
@@ -7262,8 +7361,8 @@
           </p:nvSpPr>
           <p:spPr>
             <a:xfrm>
-              <a:off x="675132" y="5003800"/>
-              <a:ext cx="6221170" cy="410718"/>
+              <a:off x="676656" y="5410200"/>
+              <a:ext cx="7635364" cy="352044"/>
             </a:xfrm>
             <a:prstGeom prst="rect">
               <a:avLst/>
@@ -7281,29 +7380,44 @@
             <a:p>
               <a:pPr algn="l"/>
               <a:r>
-                <a:rPr lang="en-AU" sz="2100" b="1" dirty="0">
-                  <a:solidFill>
-                    <a:schemeClr val="accent1"/>
-                  </a:solidFill>
-                  <a:latin typeface="+mn-lt"/>
-                  <a:ea typeface="+mn-ea"/>
-                  <a:cs typeface="+mn-cs"/>
-                </a:rPr>
-                <a:t>Satisfaction describes the service experience.</a:t>
+                <a:rPr lang="en-AU" sz="1800" dirty="0">
+                  <a:solidFill>
+                    <a:schemeClr val="dk1"/>
+                  </a:solidFill>
+                  <a:latin typeface="+mn-lt"/>
+                  <a:ea typeface="+mn-ea"/>
+                  <a:cs typeface="+mn-cs"/>
+                </a:rPr>
+                <a:t>Satisfaction describes service experience; item counts describe output.</a:t>
               </a:r>
             </a:p>
           </p:txBody>
         </p:sp>
+      </p:grpSp>
+      <p:grpSp>
+        <p:nvGrpSpPr>
+          <p:cNvPr id="23" name="source-note"/>
+          <p:cNvGrpSpPr/>
+          <p:nvPr/>
+        </p:nvGrpSpPr>
+        <p:grpSpPr>
+          <a:xfrm>
+            <a:off x="679704" y="5962650"/>
+            <a:ext cx="8037059" cy="234696"/>
+            <a:chOff x="679704" y="5962650"/>
+            <a:chExt cx="8037059" cy="234696"/>
+          </a:xfrm>
+        </p:grpSpPr>
         <p:sp>
           <p:nvSpPr>
-            <p:cNvPr id="21" name="TextBox 21"/>
+            <p:cNvPr id="22" name="TextBox 22"/>
             <p:cNvSpPr txBox="1"/>
             <p:nvPr/>
           </p:nvSpPr>
           <p:spPr>
             <a:xfrm>
-              <a:off x="676656" y="5429250"/>
-              <a:ext cx="6262323" cy="352044"/>
+              <a:off x="679704" y="5962650"/>
+              <a:ext cx="8037059" cy="234696"/>
             </a:xfrm>
             <a:prstGeom prst="rect">
               <a:avLst/>
@@ -7321,7 +7435,7 @@
             <a:p>
               <a:pPr algn="l"/>
               <a:r>
-                <a:rPr lang="en-AU" sz="1800" dirty="0">
+                <a:rPr lang="en-AU" sz="1200" dirty="0">
                   <a:solidFill>
                     <a:schemeClr val="accent6"/>
                   </a:solidFill>
@@ -7329,62 +7443,7 @@
                   <a:ea typeface="+mn-ea"/>
                   <a:cs typeface="+mn-cs"/>
                 </a:rPr>
-                <a:t>A positive experience can coexist with unchanged access.</a:t>
-              </a:r>
-            </a:p>
-          </p:txBody>
-        </p:sp>
-      </p:grpSp>
-      <p:grpSp>
-        <p:nvGrpSpPr>
-          <p:cNvPr id="24" name="source-note"/>
-          <p:cNvGrpSpPr/>
-          <p:nvPr/>
-        </p:nvGrpSpPr>
-        <p:grpSpPr>
-          <a:xfrm>
-            <a:off x="679704" y="5962650"/>
-            <a:ext cx="7966302" cy="234696"/>
-            <a:chOff x="679704" y="5962650"/>
-            <a:chExt cx="7966302" cy="234696"/>
-          </a:xfrm>
-        </p:grpSpPr>
-        <p:sp>
-          <p:nvSpPr>
-            <p:cNvPr id="23" name="TextBox 23"/>
-            <p:cNvSpPr txBox="1"/>
-            <p:nvPr/>
-          </p:nvSpPr>
-          <p:spPr>
-            <a:xfrm>
-              <a:off x="679704" y="5962650"/>
-              <a:ext cx="7966302" cy="234696"/>
-            </a:xfrm>
-            <a:prstGeom prst="rect">
-              <a:avLst/>
-            </a:prstGeom>
-            <a:noFill/>
-            <a:ln>
-              <a:noFill/>
-            </a:ln>
-          </p:spPr>
-          <p:txBody>
-            <a:bodyPr wrap="none" lIns="0" tIns="0" rIns="0" bIns="0" anchor="t" anchorCtr="0">
-              <a:spAutoFit/>
-            </a:bodyPr>
-            <a:lstStyle/>
-            <a:p>
-              <a:pPr algn="l"/>
-              <a:r>
-                <a:rPr lang="en-AU" sz="1200" dirty="0">
-                  <a:solidFill>
-                    <a:schemeClr val="accent6"/>
-                  </a:solidFill>
-                  <a:latin typeface="+mn-lt"/>
-                  <a:ea typeface="+mn-ea"/>
-                  <a:cs typeface="+mn-cs"/>
-                </a:rPr>
-                <a:t>Course framework: Nguyen 2026b, Week 3, pp.25–31. Proposed pathway; child development is outside scope.</a:t>
+                <a:t>Proposed logic model. Course framework: Nguyen 2026b, pp.25–31. Child development remains outside scope.</a:t>
               </a:r>
             </a:p>
           </p:txBody>
@@ -7392,7 +7451,7 @@
       </p:grpSp>
       <p:sp>
         <p:nvSpPr>
-          <p:cNvPr id="25" name="Line 25"/>
+          <p:cNvPr id="24" name="Line 24"/>
           <p:cNvSpPr/>
           <p:nvPr/>
         </p:nvSpPr>
@@ -7428,7 +7487,7 @@
       </p:sp>
       <p:sp>
         <p:nvSpPr>
-          <p:cNvPr id="26" name="footer-label"/>
+          <p:cNvPr id="25" name="footer-label"/>
           <p:cNvSpPr txBox="1"/>
           <p:nvPr/>
         </p:nvSpPr>
@@ -7468,7 +7527,7 @@
       </p:sp>
       <p:sp>
         <p:nvSpPr>
-          <p:cNvPr id="27" name="page-number"/>
+          <p:cNvPr id="26" name="page-number"/>
           <p:cNvSpPr txBox="1"/>
           <p:nvPr/>
         </p:nvSpPr>
@@ -7551,9 +7610,9 @@
         <p:grpSpPr>
           <a:xfrm>
             <a:off x="669036" y="527050"/>
-            <a:ext cx="8292728" cy="645414"/>
+            <a:ext cx="7798562" cy="645414"/>
             <a:chOff x="669036" y="527050"/>
-            <a:chExt cx="8292728" cy="645414"/>
+            <a:chExt cx="7798562" cy="645414"/>
           </a:xfrm>
         </p:grpSpPr>
         <p:sp>
@@ -7565,7 +7624,7 @@
           <p:spPr>
             <a:xfrm>
               <a:off x="669036" y="527050"/>
-              <a:ext cx="8292728" cy="645414"/>
+              <a:ext cx="7798562" cy="645414"/>
             </a:xfrm>
             <a:prstGeom prst="rect">
               <a:avLst/>
@@ -7591,7 +7650,7 @@
                   <a:ea typeface="+mn-ea"/>
                   <a:cs typeface="+mn-cs"/>
                 </a:rPr>
-                <a:t>Define access before writing questions</a:t>
+                <a:t>Evidence informs indicator selection</a:t>
               </a:r>
             </a:p>
           </p:txBody>
@@ -7635,16 +7694,16 @@
       </p:sp>
       <p:grpSp>
         <p:nvGrpSpPr>
-          <p:cNvPr id="6" name="construct-status"/>
+          <p:cNvPr id="6" name="intro"/>
           <p:cNvGrpSpPr/>
           <p:nvPr/>
         </p:nvGrpSpPr>
         <p:grpSpPr>
           <a:xfrm>
-            <a:off x="675132" y="1641475"/>
-            <a:ext cx="6046649" cy="410718"/>
-            <a:chOff x="675132" y="1641475"/>
-            <a:chExt cx="6046649" cy="410718"/>
+            <a:off x="675513" y="1603375"/>
+            <a:ext cx="6619891" cy="396050"/>
+            <a:chOff x="675513" y="1603375"/>
+            <a:chExt cx="6619891" cy="396050"/>
           </a:xfrm>
         </p:grpSpPr>
         <p:sp>
@@ -7655,8 +7714,8 @@
           </p:nvSpPr>
           <p:spPr>
             <a:xfrm>
-              <a:off x="675132" y="1641475"/>
-              <a:ext cx="6046649" cy="410718"/>
+              <a:off x="675513" y="1603375"/>
+              <a:ext cx="6619891" cy="396050"/>
             </a:xfrm>
             <a:prstGeom prst="rect">
               <a:avLst/>
@@ -7674,191 +7733,546 @@
             <a:p>
               <a:pPr algn="l"/>
               <a:r>
-                <a:rPr lang="en-AU" sz="2100" b="1" dirty="0">
-                  <a:solidFill>
-                    <a:schemeClr val="accent2"/>
-                  </a:solidFill>
-                  <a:latin typeface="+mn-lt"/>
-                  <a:ea typeface="+mn-ea"/>
-                  <a:cs typeface="+mn-cs"/>
-                </a:rPr>
-                <a:t>Candidate dimensions for review and testing</a:t>
+                <a:rPr lang="en-AU" sz="2020" dirty="0">
+                  <a:solidFill>
+                    <a:schemeClr val="accent6"/>
+                  </a:solidFill>
+                  <a:latin typeface="+mn-lt"/>
+                  <a:ea typeface="+mn-ea"/>
+                  <a:cs typeface="+mn-cs"/>
+                </a:rPr>
+                <a:t>Sector evidence changes which questions are retained</a:t>
               </a:r>
             </a:p>
           </p:txBody>
         </p:sp>
       </p:grpSp>
+      <p:graphicFrame>
+        <p:nvGraphicFramePr>
+          <p:cNvPr id="7" name="concept-map"/>
+          <p:cNvGraphicFramePr>
+            <a:graphicFrameLocks noGrp="1"/>
+          </p:cNvGraphicFramePr>
+          <p:nvPr/>
+        </p:nvGraphicFramePr>
+        <p:xfrm>
+          <a:off x="685800" y="2085975"/>
+          <a:ext cx="10820400" cy="3124200"/>
+        </p:xfrm>
+        <a:graphic>
+          <a:graphicData uri="http://schemas.openxmlformats.org/drawingml/2006/table">
+            <a:tbl>
+              <a:tblPr firstRow="1" bandRow="0">
+                <a:tableStyleId>{5C22544A-7EE6-4342-B048-85BDC9FD1C3A}</a:tableStyleId>
+              </a:tblPr>
+              <a:tblGrid>
+                <a:gridCol w="2124075"/>
+                <a:gridCol w="3952875"/>
+                <a:gridCol w="4743450"/>
+              </a:tblGrid>
+              <a:tr h="457200">
+                <a:tc>
+                  <a:txBody>
+                    <a:bodyPr/>
+                    <a:lstStyle/>
+                    <a:p>
+                      <a:pPr/>
+                      <a:r>
+                        <a:rPr lang="en-AU" sz="1580" b="1">
+                          <a:solidFill>
+                            <a:schemeClr val="accent1"/>
+                          </a:solidFill>
+                          <a:latin typeface="Arial"/>
+                          <a:ea typeface="Microsoft YaHei"/>
+                          <a:cs typeface="Arial"/>
+                        </a:rPr>
+                        <a:t>Concept</a:t>
+                      </a:r>
+                    </a:p>
+                  </a:txBody>
+                  <a:tcPr anchor="ctr" marL="133350" marR="133350" marT="76200" marB="76200">
+                    <a:lnB w="9525">
+                      <a:solidFill>
+                        <a:srgbClr val="D6E0E7"/>
+                      </a:solidFill>
+                      <a:prstDash val="solid"/>
+                    </a:lnB>
+                    <a:solidFill>
+                      <a:schemeClr val="accent5"/>
+                    </a:solidFill>
+                  </a:tcPr>
+                </a:tc>
+                <a:tc>
+                  <a:txBody>
+                    <a:bodyPr/>
+                    <a:lstStyle/>
+                    <a:p>
+                      <a:pPr/>
+                      <a:r>
+                        <a:rPr lang="en-AU" sz="1580" b="1">
+                          <a:solidFill>
+                            <a:schemeClr val="accent1"/>
+                          </a:solidFill>
+                          <a:latin typeface="Arial"/>
+                          <a:ea typeface="Microsoft YaHei"/>
+                          <a:cs typeface="Arial"/>
+                        </a:rPr>
+                        <a:t>Evidence / rationale</a:t>
+                      </a:r>
+                    </a:p>
+                  </a:txBody>
+                  <a:tcPr anchor="ctr" marL="133350" marR="133350" marT="76200" marB="76200">
+                    <a:lnB w="9525">
+                      <a:solidFill>
+                        <a:srgbClr val="D6E0E7"/>
+                      </a:solidFill>
+                      <a:prstDash val="solid"/>
+                    </a:lnB>
+                    <a:solidFill>
+                      <a:schemeClr val="accent5"/>
+                    </a:solidFill>
+                  </a:tcPr>
+                </a:tc>
+                <a:tc>
+                  <a:txBody>
+                    <a:bodyPr/>
+                    <a:lstStyle/>
+                    <a:p>
+                      <a:pPr/>
+                      <a:r>
+                        <a:rPr lang="en-AU" sz="1580" b="1">
+                          <a:solidFill>
+                            <a:schemeClr val="accent1"/>
+                          </a:solidFill>
+                          <a:latin typeface="Arial"/>
+                          <a:ea typeface="Microsoft YaHei"/>
+                          <a:cs typeface="Arial"/>
+                        </a:rPr>
+                        <a:t>Design choice / boundary</a:t>
+                      </a:r>
+                    </a:p>
+                  </a:txBody>
+                  <a:tcPr anchor="ctr" marL="133350" marR="133350" marT="76200" marB="76200">
+                    <a:lnB w="9525">
+                      <a:solidFill>
+                        <a:srgbClr val="D6E0E7"/>
+                      </a:solidFill>
+                      <a:prstDash val="solid"/>
+                    </a:lnB>
+                    <a:solidFill>
+                      <a:schemeClr val="accent5"/>
+                    </a:solidFill>
+                  </a:tcPr>
+                </a:tc>
+              </a:tr>
+              <a:tr h="666750">
+                <a:tc>
+                  <a:txBody>
+                    <a:bodyPr/>
+                    <a:lstStyle/>
+                    <a:p>
+                      <a:pPr/>
+                      <a:r>
+                        <a:rPr lang="en-AU" sz="1580" b="1">
+                          <a:solidFill>
+                            <a:schemeClr val="dk1"/>
+                          </a:solidFill>
+                          <a:latin typeface="Arial"/>
+                          <a:ea typeface="Microsoft YaHei"/>
+                          <a:cs typeface="Arial"/>
+                        </a:rPr>
+                        <a:t>Availability</a:t>
+                      </a:r>
+                    </a:p>
+                  </a:txBody>
+                  <a:tcPr anchor="ctr" marL="133350" marR="133350" marT="76200" marB="76200">
+                    <a:lnB w="9525">
+                      <a:solidFill>
+                        <a:srgbClr val="D6E0E7"/>
+                      </a:solidFill>
+                      <a:prstDash val="solid"/>
+                    </a:lnB>
+                    <a:solidFill>
+                      <a:schemeClr val="lt1"/>
+                    </a:solidFill>
+                  </a:tcPr>
+                </a:tc>
+                <a:tc>
+                  <a:txBody>
+                    <a:bodyPr/>
+                    <a:lstStyle/>
+                    <a:p>
+                      <a:pPr/>
+                      <a:r>
+                        <a:rPr lang="en-AU" sz="1580" b="0">
+                          <a:solidFill>
+                            <a:schemeClr val="dk1"/>
+                          </a:solidFill>
+                          <a:latin typeface="Arial"/>
+                          <a:ea typeface="Microsoft YaHei"/>
+                          <a:cs typeface="Arial"/>
+                        </a:rPr>
+                        <a:t>TLA: wider choice; uneven service access</a:t>
+                      </a:r>
+                    </a:p>
+                  </a:txBody>
+                  <a:tcPr anchor="ctr" marL="133350" marR="133350" marT="76200" marB="76200">
+                    <a:lnB w="9525">
+                      <a:solidFill>
+                        <a:srgbClr val="D6E0E7"/>
+                      </a:solidFill>
+                      <a:prstDash val="solid"/>
+                    </a:lnB>
+                    <a:solidFill>
+                      <a:schemeClr val="lt1"/>
+                    </a:solidFill>
+                  </a:tcPr>
+                </a:tc>
+                <a:tc>
+                  <a:txBody>
+                    <a:bodyPr/>
+                    <a:lstStyle/>
+                    <a:p>
+                      <a:pPr/>
+                      <a:r>
+                        <a:rPr lang="en-AU" sz="1580" b="0">
+                          <a:solidFill>
+                            <a:schemeClr val="dk1"/>
+                          </a:solidFill>
+                          <a:latin typeface="Arial"/>
+                          <a:ea typeface="Microsoft YaHei"/>
+                          <a:cs typeface="Arial"/>
+                        </a:rPr>
+                        <a:t>Q1 overall change; no separate availability item</a:t>
+                      </a:r>
+                    </a:p>
+                  </a:txBody>
+                  <a:tcPr anchor="ctr" marL="133350" marR="133350" marT="76200" marB="76200">
+                    <a:lnB w="9525">
+                      <a:solidFill>
+                        <a:srgbClr val="D6E0E7"/>
+                      </a:solidFill>
+                      <a:prstDash val="solid"/>
+                    </a:lnB>
+                    <a:solidFill>
+                      <a:schemeClr val="lt1"/>
+                    </a:solidFill>
+                  </a:tcPr>
+                </a:tc>
+              </a:tr>
+              <a:tr h="666750">
+                <a:tc>
+                  <a:txBody>
+                    <a:bodyPr/>
+                    <a:lstStyle/>
+                    <a:p>
+                      <a:pPr/>
+                      <a:r>
+                        <a:rPr lang="en-AU" sz="1580" b="1">
+                          <a:solidFill>
+                            <a:schemeClr val="dk1"/>
+                          </a:solidFill>
+                          <a:latin typeface="Arial"/>
+                          <a:ea typeface="Microsoft YaHei"/>
+                          <a:cs typeface="Arial"/>
+                        </a:rPr>
+                        <a:t>Affordability</a:t>
+                      </a:r>
+                    </a:p>
+                  </a:txBody>
+                  <a:tcPr anchor="ctr" marL="133350" marR="133350" marT="76200" marB="76200">
+                    <a:lnB w="9525">
+                      <a:solidFill>
+                        <a:srgbClr val="D6E0E7"/>
+                      </a:solidFill>
+                      <a:prstDash val="solid"/>
+                    </a:lnB>
+                    <a:solidFill>
+                      <a:schemeClr val="lt1"/>
+                    </a:solidFill>
+                  </a:tcPr>
+                </a:tc>
+                <a:tc>
+                  <a:txBody>
+                    <a:bodyPr/>
+                    <a:lstStyle/>
+                    <a:p>
+                      <a:pPr/>
+                      <a:r>
+                        <a:rPr lang="en-AU" sz="1580" b="0">
+                          <a:solidFill>
+                            <a:schemeClr val="dk1"/>
+                          </a:solidFill>
+                          <a:latin typeface="Arial"/>
+                          <a:ea typeface="Microsoft YaHei"/>
+                          <a:cs typeface="Arial"/>
+                        </a:rPr>
+                        <a:t>TLA: saving money is a joining motive</a:t>
+                      </a:r>
+                    </a:p>
+                  </a:txBody>
+                  <a:tcPr anchor="ctr" marL="133350" marR="133350" marT="76200" marB="76200">
+                    <a:lnB w="9525">
+                      <a:solidFill>
+                        <a:srgbClr val="D6E0E7"/>
+                      </a:solidFill>
+                      <a:prstDash val="solid"/>
+                    </a:lnB>
+                    <a:solidFill>
+                      <a:schemeClr val="lt1"/>
+                    </a:solidFill>
+                  </a:tcPr>
+                </a:tc>
+                <a:tc>
+                  <a:txBody>
+                    <a:bodyPr/>
+                    <a:lstStyle/>
+                    <a:p>
+                      <a:pPr/>
+                      <a:r>
+                        <a:rPr lang="en-AU" sz="1580" b="0">
+                          <a:solidFill>
+                            <a:schemeClr val="dk1"/>
+                          </a:solidFill>
+                          <a:latin typeface="Arial"/>
+                          <a:ea typeface="Microsoft YaHei"/>
+                          <a:cs typeface="Arial"/>
+                        </a:rPr>
+                        <a:t>Retain Q2 cost context; no cost-change estimate</a:t>
+                      </a:r>
+                    </a:p>
+                  </a:txBody>
+                  <a:tcPr anchor="ctr" marL="133350" marR="133350" marT="76200" marB="76200">
+                    <a:lnB w="9525">
+                      <a:solidFill>
+                        <a:srgbClr val="D6E0E7"/>
+                      </a:solidFill>
+                      <a:prstDash val="solid"/>
+                    </a:lnB>
+                    <a:solidFill>
+                      <a:schemeClr val="lt1"/>
+                    </a:solidFill>
+                  </a:tcPr>
+                </a:tc>
+              </a:tr>
+              <a:tr h="666750">
+                <a:tc>
+                  <a:txBody>
+                    <a:bodyPr/>
+                    <a:lstStyle/>
+                    <a:p>
+                      <a:pPr/>
+                      <a:r>
+                        <a:rPr lang="en-AU" sz="1580" b="1">
+                          <a:solidFill>
+                            <a:schemeClr val="dk1"/>
+                          </a:solidFill>
+                          <a:latin typeface="Arial"/>
+                          <a:ea typeface="Microsoft YaHei"/>
+                          <a:cs typeface="Arial"/>
+                        </a:rPr>
+                        <a:t>Suitability</a:t>
+                      </a:r>
+                    </a:p>
+                  </a:txBody>
+                  <a:tcPr anchor="ctr" marL="133350" marR="133350" marT="76200" marB="76200">
+                    <a:lnB w="9525">
+                      <a:solidFill>
+                        <a:srgbClr val="D6E0E7"/>
+                      </a:solidFill>
+                      <a:prstDash val="solid"/>
+                    </a:lnB>
+                    <a:solidFill>
+                      <a:schemeClr val="lt1"/>
+                    </a:solidFill>
+                  </a:tcPr>
+                </a:tc>
+                <a:tc>
+                  <a:txBody>
+                    <a:bodyPr/>
+                    <a:lstStyle/>
+                    <a:p>
+                      <a:pPr/>
+                      <a:r>
+                        <a:rPr lang="en-AU" sz="1580" b="0">
+                          <a:solidFill>
+                            <a:schemeClr val="dk1"/>
+                          </a:solidFill>
+                          <a:latin typeface="Arial"/>
+                          <a:ea typeface="Microsoft YaHei"/>
+                          <a:cs typeface="Arial"/>
+                        </a:rPr>
+                        <a:t>TLA names developmentally appropriate toys</a:t>
+                      </a:r>
+                    </a:p>
+                  </a:txBody>
+                  <a:tcPr anchor="ctr" marL="133350" marR="133350" marT="76200" marB="76200">
+                    <a:lnB w="9525">
+                      <a:solidFill>
+                        <a:srgbClr val="D6E0E7"/>
+                      </a:solidFill>
+                      <a:prstDash val="solid"/>
+                    </a:lnB>
+                    <a:solidFill>
+                      <a:schemeClr val="lt1"/>
+                    </a:solidFill>
+                  </a:tcPr>
+                </a:tc>
+                <a:tc>
+                  <a:txBody>
+                    <a:bodyPr/>
+                    <a:lstStyle/>
+                    <a:p>
+                      <a:pPr/>
+                      <a:r>
+                        <a:rPr lang="en-AU" sz="1580" b="0">
+                          <a:solidFill>
+                            <a:schemeClr val="dk1"/>
+                          </a:solidFill>
+                          <a:latin typeface="Arial"/>
+                          <a:ea typeface="Microsoft YaHei"/>
+                          <a:cs typeface="Arial"/>
+                        </a:rPr>
+                        <a:t>Retain Q3 perceived fit with this child’s needs</a:t>
+                      </a:r>
+                    </a:p>
+                  </a:txBody>
+                  <a:tcPr anchor="ctr" marL="133350" marR="133350" marT="76200" marB="76200">
+                    <a:lnB w="9525">
+                      <a:solidFill>
+                        <a:srgbClr val="D6E0E7"/>
+                      </a:solidFill>
+                      <a:prstDash val="solid"/>
+                    </a:lnB>
+                    <a:solidFill>
+                      <a:schemeClr val="lt1"/>
+                    </a:solidFill>
+                  </a:tcPr>
+                </a:tc>
+              </a:tr>
+              <a:tr h="666750">
+                <a:tc>
+                  <a:txBody>
+                    <a:bodyPr/>
+                    <a:lstStyle/>
+                    <a:p>
+                      <a:pPr/>
+                      <a:r>
+                        <a:rPr lang="en-AU" sz="1580" b="1">
+                          <a:solidFill>
+                            <a:schemeClr val="dk1"/>
+                          </a:solidFill>
+                          <a:latin typeface="Arial"/>
+                          <a:ea typeface="Microsoft YaHei"/>
+                          <a:cs typeface="Arial"/>
+                        </a:rPr>
+                        <a:t>Use / constraints</a:t>
+                      </a:r>
+                    </a:p>
+                  </a:txBody>
+                  <a:tcPr anchor="ctr" marL="133350" marR="133350" marT="76200" marB="76200">
+                    <a:lnB w="9525">
+                      <a:solidFill>
+                        <a:srgbClr val="D6E0E7"/>
+                      </a:solidFill>
+                      <a:prstDash val="solid"/>
+                    </a:lnB>
+                    <a:solidFill>
+                      <a:schemeClr val="lt1"/>
+                    </a:solidFill>
+                  </a:tcPr>
+                </a:tc>
+                <a:tc>
+                  <a:txBody>
+                    <a:bodyPr/>
+                    <a:lstStyle/>
+                    <a:p>
+                      <a:pPr/>
+                      <a:r>
+                        <a:rPr lang="en-AU" sz="1580" b="0">
+                          <a:solidFill>
+                            <a:schemeClr val="dk1"/>
+                          </a:solidFill>
+                          <a:latin typeface="Arial"/>
+                          <a:ea typeface="Microsoft YaHei"/>
+                          <a:cs typeface="Arial"/>
+                        </a:rPr>
+                        <a:t>Systems lens: receipt may not mean use</a:t>
+                      </a:r>
+                    </a:p>
+                  </a:txBody>
+                  <a:tcPr anchor="ctr" marL="133350" marR="133350" marT="76200" marB="76200">
+                    <a:lnB w="9525">
+                      <a:solidFill>
+                        <a:srgbClr val="D6E0E7"/>
+                      </a:solidFill>
+                      <a:prstDash val="solid"/>
+                    </a:lnB>
+                    <a:solidFill>
+                      <a:schemeClr val="lt1"/>
+                    </a:solidFill>
+                  </a:tcPr>
+                </a:tc>
+                <a:tc>
+                  <a:txBody>
+                    <a:bodyPr/>
+                    <a:lstStyle/>
+                    <a:p>
+                      <a:pPr/>
+                      <a:r>
+                        <a:rPr lang="en-AU" sz="1580" b="0">
+                          <a:solidFill>
+                            <a:schemeClr val="dk1"/>
+                          </a:solidFill>
+                          <a:latin typeface="Arial"/>
+                          <a:ea typeface="Microsoft YaHei"/>
+                          <a:cs typeface="Arial"/>
+                        </a:rPr>
+                        <a:t>Q4 use; Q5 changes and barriers</a:t>
+                      </a:r>
+                    </a:p>
+                  </a:txBody>
+                  <a:tcPr anchor="ctr" marL="133350" marR="133350" marT="76200" marB="76200">
+                    <a:lnB w="9525">
+                      <a:solidFill>
+                        <a:srgbClr val="D6E0E7"/>
+                      </a:solidFill>
+                      <a:prstDash val="solid"/>
+                    </a:lnB>
+                    <a:solidFill>
+                      <a:schemeClr val="lt1"/>
+                    </a:solidFill>
+                  </a:tcPr>
+                </a:tc>
+              </a:tr>
+            </a:tbl>
+          </a:graphicData>
+        </a:graphic>
+      </p:graphicFrame>
       <p:grpSp>
         <p:nvGrpSpPr>
-          <p:cNvPr id="14" name="dimension-1"/>
+          <p:cNvPr id="10" name="transfer-boundary"/>
           <p:cNvGrpSpPr/>
           <p:nvPr/>
         </p:nvGrpSpPr>
         <p:grpSpPr>
           <a:xfrm>
-            <a:off x="685800" y="2413000"/>
-            <a:ext cx="10820400" cy="682625"/>
-            <a:chOff x="685800" y="2413000"/>
-            <a:chExt cx="10820400" cy="682625"/>
+            <a:off x="677418" y="5349875"/>
+            <a:ext cx="8488686" cy="588391"/>
+            <a:chOff x="677418" y="5349875"/>
+            <a:chExt cx="8488686" cy="588391"/>
           </a:xfrm>
         </p:grpSpPr>
-        <p:grpSp>
-          <p:nvGrpSpPr>
-            <p:cNvPr id="10" name="Group 10"/>
-            <p:cNvGrpSpPr/>
-            <p:nvPr/>
-          </p:nvGrpSpPr>
-          <p:grpSpPr>
-            <a:xfrm>
-              <a:off x="853281" y="2454275"/>
-              <a:ext cx="255588" cy="292101"/>
-              <a:chOff x="853281" y="2454275"/>
-              <a:chExt cx="255588" cy="292101"/>
-            </a:xfrm>
-          </p:grpSpPr>
-          <p:sp>
-            <p:nvSpPr>
-              <p:cNvPr id="7" name="Freeform 7"/>
-              <p:cNvSpPr/>
-              <p:nvPr/>
-            </p:nvSpPr>
-            <p:spPr>
-              <a:xfrm>
-                <a:off x="853281" y="2454275"/>
-                <a:ext cx="255588" cy="292101"/>
-              </a:xfrm>
-              <a:custGeom>
-                <a:avLst/>
-                <a:gdLst/>
-                <a:ahLst/>
-                <a:cxnLst/>
-                <a:rect l="l" t="t" r="r" b="b"/>
-                <a:pathLst>
-                  <a:path w="255588" h="292101">
-                    <a:moveTo>
-                      <a:pt x="255588" y="0"/>
-                    </a:moveTo>
-                    <a:lnTo>
-                      <a:pt x="255588" y="292101"/>
-                    </a:lnTo>
-                    <a:lnTo>
-                      <a:pt x="36513" y="292101"/>
-                    </a:lnTo>
-                    <a:cubicBezTo>
-                      <a:pt x="16347" y="292101"/>
-                      <a:pt x="0" y="275753"/>
-                      <a:pt x="0" y="255588"/>
-                    </a:cubicBezTo>
-                    <a:lnTo>
-                      <a:pt x="0" y="36513"/>
-                    </a:lnTo>
-                    <a:cubicBezTo>
-                      <a:pt x="0" y="16347"/>
-                      <a:pt x="16347" y="0"/>
-                      <a:pt x="36513" y="0"/>
-                    </a:cubicBezTo>
-                    <a:lnTo>
-                      <a:pt x="255588" y="0"/>
-                    </a:lnTo>
-                  </a:path>
-                </a:pathLst>
-              </a:custGeom>
-              <a:noFill/>
-              <a:ln w="36513">
-                <a:solidFill>
-                  <a:schemeClr val="accent2"/>
-                </a:solidFill>
-              </a:ln>
-            </p:spPr>
-          </p:sp>
-          <p:sp>
-            <p:nvSpPr>
-              <p:cNvPr id="8" name="Freeform 8"/>
-              <p:cNvSpPr/>
-              <p:nvPr/>
-            </p:nvSpPr>
-            <p:spPr>
-              <a:xfrm>
-                <a:off x="853281" y="2673351"/>
-                <a:ext cx="255588" cy="36513"/>
-              </a:xfrm>
-              <a:custGeom>
-                <a:avLst/>
-                <a:gdLst/>
-                <a:ahLst/>
-                <a:cxnLst/>
-                <a:rect l="l" t="t" r="r" b="b"/>
-                <a:pathLst>
-                  <a:path w="255588" h="36513">
-                    <a:moveTo>
-                      <a:pt x="255588" y="0"/>
-                    </a:moveTo>
-                    <a:lnTo>
-                      <a:pt x="36513" y="0"/>
-                    </a:lnTo>
-                    <a:cubicBezTo>
-                      <a:pt x="16347" y="0"/>
-                      <a:pt x="0" y="16347"/>
-                      <a:pt x="0" y="36513"/>
-                    </a:cubicBezTo>
-                  </a:path>
-                </a:pathLst>
-              </a:custGeom>
-              <a:noFill/>
-              <a:ln w="36513">
-                <a:solidFill>
-                  <a:schemeClr val="accent2"/>
-                </a:solidFill>
-              </a:ln>
-            </p:spPr>
-          </p:sp>
-          <p:sp>
-            <p:nvSpPr>
-              <p:cNvPr id="9" name="Freeform 9"/>
-              <p:cNvSpPr/>
-              <p:nvPr/>
-            </p:nvSpPr>
-            <p:spPr>
-              <a:xfrm>
-                <a:off x="926307" y="2527300"/>
-                <a:ext cx="109538" cy="9525"/>
-              </a:xfrm>
-              <a:custGeom>
-                <a:avLst/>
-                <a:gdLst/>
-                <a:ahLst/>
-                <a:cxnLst/>
-                <a:rect l="l" t="t" r="r" b="b"/>
-                <a:pathLst>
-                  <a:path w="109538" h="9525">
-                    <a:moveTo>
-                      <a:pt x="0" y="0"/>
-                    </a:moveTo>
-                    <a:lnTo>
-                      <a:pt x="109538" y="0"/>
-                    </a:lnTo>
-                  </a:path>
-                </a:pathLst>
-              </a:custGeom>
-              <a:noFill/>
-              <a:ln w="36513">
-                <a:solidFill>
-                  <a:schemeClr val="accent2"/>
-                </a:solidFill>
-              </a:ln>
-            </p:spPr>
-          </p:sp>
-        </p:grpSp>
         <p:sp>
           <p:nvSpPr>
-            <p:cNvPr id="11" name="TextBox 11"/>
+            <p:cNvPr id="8" name="TextBox 8"/>
             <p:cNvSpPr txBox="1"/>
             <p:nvPr/>
           </p:nvSpPr>
           <p:spPr>
             <a:xfrm>
-              <a:off x="1397508" y="2413000"/>
-              <a:ext cx="1738270" cy="469392"/>
+              <a:off x="677418" y="5349875"/>
+              <a:ext cx="8133987" cy="322707"/>
             </a:xfrm>
             <a:prstGeom prst="rect">
               <a:avLst/>
@@ -7876,29 +8290,29 @@
             <a:p>
               <a:pPr algn="l"/>
               <a:r>
-                <a:rPr lang="en-AU" sz="2400" b="1" dirty="0">
-                  <a:solidFill>
-                    <a:schemeClr val="accent1"/>
-                  </a:solidFill>
-                  <a:latin typeface="+mn-lt"/>
-                  <a:ea typeface="+mn-ea"/>
-                  <a:cs typeface="+mn-cs"/>
-                </a:rPr>
-                <a:t>Availability</a:t>
+                <a:rPr lang="en-AU" sz="1650" b="1" dirty="0">
+                  <a:solidFill>
+                    <a:schemeClr val="accent2"/>
+                  </a:solidFill>
+                  <a:latin typeface="+mn-lt"/>
+                  <a:ea typeface="+mn-ea"/>
+                  <a:cs typeface="+mn-cs"/>
+                </a:rPr>
+                <a:t>TLA is a sector submission about lending; redistribution needs local testing.</a:t>
               </a:r>
             </a:p>
           </p:txBody>
         </p:sp>
         <p:sp>
           <p:nvSpPr>
-            <p:cNvPr id="12" name="TextBox 12"/>
+            <p:cNvPr id="9" name="TextBox 9"/>
             <p:cNvSpPr txBox="1"/>
             <p:nvPr/>
           </p:nvSpPr>
           <p:spPr>
             <a:xfrm>
-              <a:off x="4904232" y="2432050"/>
-              <a:ext cx="5939640" cy="410718"/>
+              <a:off x="677799" y="5629275"/>
+              <a:ext cx="8488305" cy="308991"/>
             </a:xfrm>
             <a:prstGeom prst="rect">
               <a:avLst/>
@@ -7916,7 +8330,7 @@
             <a:p>
               <a:pPr algn="l"/>
               <a:r>
-                <a:rPr lang="en-AU" sz="2100" dirty="0">
+                <a:rPr lang="en-AU" sz="1580" dirty="0">
                   <a:solidFill>
                     <a:schemeClr val="dk1"/>
                   </a:solidFill>
@@ -7924,331 +8338,36 @@
                   <a:ea typeface="+mn-ea"/>
                   <a:cs typeface="+mn-cs"/>
                 </a:rPr>
-                <a:t>Can the family obtain resources when needed?</a:t>
+                <a:t>These candidate concepts and item roles do not form a validated three-dimensional scale.</a:t>
               </a:r>
             </a:p>
           </p:txBody>
-        </p:sp>
-        <p:sp>
-          <p:nvSpPr>
-            <p:cNvPr id="13" name="Line 13"/>
-            <p:cNvSpPr/>
-            <p:nvPr/>
-          </p:nvSpPr>
-          <p:spPr>
-            <a:xfrm>
-              <a:off x="685800" y="3086100"/>
-              <a:ext cx="10820400" cy="9525"/>
-            </a:xfrm>
-            <a:custGeom>
-              <a:avLst/>
-              <a:gdLst/>
-              <a:ahLst/>
-              <a:cxnLst/>
-              <a:rect l="l" t="t" r="r" b="b"/>
-              <a:pathLst>
-                <a:path w="10820400" h="9525">
-                  <a:moveTo>
-                    <a:pt x="0" y="0"/>
-                  </a:moveTo>
-                  <a:lnTo>
-                    <a:pt x="10820400" y="0"/>
-                  </a:lnTo>
-                </a:path>
-              </a:pathLst>
-            </a:custGeom>
-            <a:noFill/>
-            <a:ln w="9525">
-              <a:solidFill>
-                <a:srgbClr val="D6E0E7"/>
-              </a:solidFill>
-            </a:ln>
-          </p:spPr>
         </p:sp>
       </p:grpSp>
       <p:grpSp>
         <p:nvGrpSpPr>
-          <p:cNvPr id="24" name="dimension-2"/>
+          <p:cNvPr id="12" name="source-note"/>
           <p:cNvGrpSpPr/>
           <p:nvPr/>
         </p:nvGrpSpPr>
         <p:grpSpPr>
           <a:xfrm>
-            <a:off x="685800" y="3422650"/>
-            <a:ext cx="10820400" cy="682625"/>
-            <a:chOff x="685800" y="3422650"/>
-            <a:chExt cx="10820400" cy="682625"/>
+            <a:off x="679704" y="5962650"/>
+            <a:ext cx="7770163" cy="234696"/>
+            <a:chOff x="679704" y="5962650"/>
+            <a:chExt cx="7770163" cy="234696"/>
           </a:xfrm>
         </p:grpSpPr>
-        <p:grpSp>
-          <p:nvGrpSpPr>
-            <p:cNvPr id="20" name="Group 20"/>
-            <p:cNvGrpSpPr/>
-            <p:nvPr/>
-          </p:nvGrpSpPr>
-          <p:grpSpPr>
-            <a:xfrm>
-              <a:off x="816769" y="3443223"/>
-              <a:ext cx="328613" cy="331059"/>
-              <a:chOff x="816769" y="3443223"/>
-              <a:chExt cx="328613" cy="331059"/>
-            </a:xfrm>
-          </p:grpSpPr>
-          <p:sp>
-            <p:nvSpPr>
-              <p:cNvPr id="15" name="Freeform 15"/>
-              <p:cNvSpPr/>
-              <p:nvPr/>
-            </p:nvSpPr>
-            <p:spPr>
-              <a:xfrm>
-                <a:off x="926307" y="3591719"/>
-                <a:ext cx="219075" cy="109538"/>
-              </a:xfrm>
-              <a:custGeom>
-                <a:avLst/>
-                <a:gdLst/>
-                <a:ahLst/>
-                <a:cxnLst/>
-                <a:rect l="l" t="t" r="r" b="b"/>
-                <a:pathLst>
-                  <a:path w="219075" h="109538">
-                    <a:moveTo>
-                      <a:pt x="0" y="54769"/>
-                    </a:moveTo>
-                    <a:cubicBezTo>
-                      <a:pt x="0" y="85020"/>
-                      <a:pt x="49036" y="109538"/>
-                      <a:pt x="109538" y="109538"/>
-                    </a:cubicBezTo>
-                    <a:cubicBezTo>
-                      <a:pt x="170039" y="109538"/>
-                      <a:pt x="219075" y="85020"/>
-                      <a:pt x="219075" y="54769"/>
-                    </a:cubicBezTo>
-                    <a:cubicBezTo>
-                      <a:pt x="219075" y="24518"/>
-                      <a:pt x="170039" y="0"/>
-                      <a:pt x="109538" y="0"/>
-                    </a:cubicBezTo>
-                    <a:cubicBezTo>
-                      <a:pt x="49036" y="0"/>
-                      <a:pt x="0" y="24518"/>
-                      <a:pt x="0" y="54769"/>
-                    </a:cubicBezTo>
-                  </a:path>
-                </a:pathLst>
-              </a:custGeom>
-              <a:noFill/>
-              <a:ln w="36513">
-                <a:solidFill>
-                  <a:schemeClr val="accent2"/>
-                </a:solidFill>
-              </a:ln>
-            </p:spPr>
-          </p:sp>
-          <p:sp>
-            <p:nvSpPr>
-              <p:cNvPr id="16" name="Freeform 16"/>
-              <p:cNvSpPr/>
-              <p:nvPr/>
-            </p:nvSpPr>
-            <p:spPr>
-              <a:xfrm>
-                <a:off x="926307" y="3646488"/>
-                <a:ext cx="219075" cy="127794"/>
-              </a:xfrm>
-              <a:custGeom>
-                <a:avLst/>
-                <a:gdLst/>
-                <a:ahLst/>
-                <a:cxnLst/>
-                <a:rect l="l" t="t" r="r" b="b"/>
-                <a:pathLst>
-                  <a:path w="219075" h="127794">
-                    <a:moveTo>
-                      <a:pt x="0" y="0"/>
-                    </a:moveTo>
-                    <a:lnTo>
-                      <a:pt x="0" y="73025"/>
-                    </a:lnTo>
-                    <a:cubicBezTo>
-                      <a:pt x="0" y="103258"/>
-                      <a:pt x="49036" y="127794"/>
-                      <a:pt x="109538" y="127794"/>
-                    </a:cubicBezTo>
-                    <a:cubicBezTo>
-                      <a:pt x="170039" y="127794"/>
-                      <a:pt x="219075" y="103258"/>
-                      <a:pt x="219075" y="73025"/>
-                    </a:cubicBezTo>
-                    <a:lnTo>
-                      <a:pt x="219075" y="0"/>
-                    </a:lnTo>
-                  </a:path>
-                </a:pathLst>
-              </a:custGeom>
-              <a:noFill/>
-              <a:ln w="36513">
-                <a:solidFill>
-                  <a:schemeClr val="accent2"/>
-                </a:solidFill>
-              </a:ln>
-            </p:spPr>
-          </p:sp>
-          <p:sp>
-            <p:nvSpPr>
-              <p:cNvPr id="17" name="Freeform 17"/>
-              <p:cNvSpPr/>
-              <p:nvPr/>
-            </p:nvSpPr>
-            <p:spPr>
-              <a:xfrm>
-                <a:off x="816769" y="3443223"/>
-                <a:ext cx="219075" cy="114430"/>
-              </a:xfrm>
-              <a:custGeom>
-                <a:avLst/>
-                <a:gdLst/>
-                <a:ahLst/>
-                <a:cxnLst/>
-                <a:rect l="l" t="t" r="r" b="b"/>
-                <a:pathLst>
-                  <a:path w="219075" h="114430">
-                    <a:moveTo>
-                      <a:pt x="0" y="57215"/>
-                    </a:moveTo>
-                    <a:cubicBezTo>
-                      <a:pt x="0" y="76786"/>
-                      <a:pt x="20885" y="94860"/>
-                      <a:pt x="54769" y="104645"/>
-                    </a:cubicBezTo>
-                    <a:cubicBezTo>
-                      <a:pt x="88653" y="114430"/>
-                      <a:pt x="130423" y="114430"/>
-                      <a:pt x="164307" y="104645"/>
-                    </a:cubicBezTo>
-                    <a:cubicBezTo>
-                      <a:pt x="198190" y="94860"/>
-                      <a:pt x="219075" y="76786"/>
-                      <a:pt x="219075" y="57215"/>
-                    </a:cubicBezTo>
-                    <a:cubicBezTo>
-                      <a:pt x="219075" y="37644"/>
-                      <a:pt x="198190" y="19571"/>
-                      <a:pt x="164307" y="9785"/>
-                    </a:cubicBezTo>
-                    <a:cubicBezTo>
-                      <a:pt x="130423" y="0"/>
-                      <a:pt x="88653" y="0"/>
-                      <a:pt x="54769" y="9785"/>
-                    </a:cubicBezTo>
-                    <a:cubicBezTo>
-                      <a:pt x="20885" y="19571"/>
-                      <a:pt x="0" y="37644"/>
-                      <a:pt x="0" y="57215"/>
-                    </a:cubicBezTo>
-                  </a:path>
-                </a:pathLst>
-              </a:custGeom>
-              <a:noFill/>
-              <a:ln w="36513">
-                <a:solidFill>
-                  <a:schemeClr val="accent2"/>
-                </a:solidFill>
-              </a:ln>
-            </p:spPr>
-          </p:sp>
-          <p:sp>
-            <p:nvSpPr>
-              <p:cNvPr id="18" name="Freeform 18"/>
-              <p:cNvSpPr/>
-              <p:nvPr/>
-            </p:nvSpPr>
-            <p:spPr>
-              <a:xfrm>
-                <a:off x="816769" y="3500438"/>
-                <a:ext cx="36513" cy="219075"/>
-              </a:xfrm>
-              <a:custGeom>
-                <a:avLst/>
-                <a:gdLst/>
-                <a:ahLst/>
-                <a:cxnLst/>
-                <a:rect l="l" t="t" r="r" b="b"/>
-                <a:pathLst>
-                  <a:path w="36513" h="219075">
-                    <a:moveTo>
-                      <a:pt x="0" y="0"/>
-                    </a:moveTo>
-                    <a:lnTo>
-                      <a:pt x="0" y="182563"/>
-                    </a:lnTo>
-                    <a:cubicBezTo>
-                      <a:pt x="0" y="198774"/>
-                      <a:pt x="14094" y="209034"/>
-                      <a:pt x="36513" y="219075"/>
-                    </a:cubicBezTo>
-                  </a:path>
-                </a:pathLst>
-              </a:custGeom>
-              <a:noFill/>
-              <a:ln w="36513">
-                <a:solidFill>
-                  <a:schemeClr val="accent2"/>
-                </a:solidFill>
-              </a:ln>
-            </p:spPr>
-          </p:sp>
-          <p:sp>
-            <p:nvSpPr>
-              <p:cNvPr id="19" name="Freeform 19"/>
-              <p:cNvSpPr/>
-              <p:nvPr/>
-            </p:nvSpPr>
-            <p:spPr>
-              <a:xfrm>
-                <a:off x="816769" y="3591719"/>
-                <a:ext cx="36513" cy="36513"/>
-              </a:xfrm>
-              <a:custGeom>
-                <a:avLst/>
-                <a:gdLst/>
-                <a:ahLst/>
-                <a:cxnLst/>
-                <a:rect l="l" t="t" r="r" b="b"/>
-                <a:pathLst>
-                  <a:path w="36513" h="36513">
-                    <a:moveTo>
-                      <a:pt x="0" y="0"/>
-                    </a:moveTo>
-                    <a:cubicBezTo>
-                      <a:pt x="0" y="16212"/>
-                      <a:pt x="14094" y="26472"/>
-                      <a:pt x="36513" y="36513"/>
-                    </a:cubicBezTo>
-                  </a:path>
-                </a:pathLst>
-              </a:custGeom>
-              <a:noFill/>
-              <a:ln w="36513">
-                <a:solidFill>
-                  <a:schemeClr val="accent2"/>
-                </a:solidFill>
-              </a:ln>
-            </p:spPr>
-          </p:sp>
-        </p:grpSp>
         <p:sp>
           <p:nvSpPr>
-            <p:cNvPr id="21" name="TextBox 21"/>
+            <p:cNvPr id="11" name="TextBox 11"/>
             <p:cNvSpPr txBox="1"/>
             <p:nvPr/>
           </p:nvSpPr>
           <p:spPr>
             <a:xfrm>
-              <a:off x="1397508" y="3422650"/>
-              <a:ext cx="1935204" cy="469392"/>
+              <a:off x="679704" y="5962650"/>
+              <a:ext cx="7770163" cy="234696"/>
             </a:xfrm>
             <a:prstGeom prst="rect">
               <a:avLst/>
@@ -8266,504 +8385,6 @@
             <a:p>
               <a:pPr algn="l"/>
               <a:r>
-                <a:rPr lang="en-AU" sz="2400" b="1" dirty="0">
-                  <a:solidFill>
-                    <a:schemeClr val="accent1"/>
-                  </a:solidFill>
-                  <a:latin typeface="+mn-lt"/>
-                  <a:ea typeface="+mn-ea"/>
-                  <a:cs typeface="+mn-cs"/>
-                </a:rPr>
-                <a:t>Affordability</a:t>
-              </a:r>
-            </a:p>
-          </p:txBody>
-        </p:sp>
-        <p:sp>
-          <p:nvSpPr>
-            <p:cNvPr id="22" name="TextBox 22"/>
-            <p:cNvSpPr txBox="1"/>
-            <p:nvPr/>
-          </p:nvSpPr>
-          <p:spPr>
-            <a:xfrm>
-              <a:off x="4904232" y="3441700"/>
-              <a:ext cx="6080623" cy="410718"/>
-            </a:xfrm>
-            <a:prstGeom prst="rect">
-              <a:avLst/>
-            </a:prstGeom>
-            <a:noFill/>
-            <a:ln>
-              <a:noFill/>
-            </a:ln>
-          </p:spPr>
-          <p:txBody>
-            <a:bodyPr wrap="none" lIns="0" tIns="0" rIns="0" bIns="0" anchor="t" anchorCtr="0">
-              <a:spAutoFit/>
-            </a:bodyPr>
-            <a:lstStyle/>
-            <a:p>
-              <a:pPr algn="l"/>
-              <a:r>
-                <a:rPr lang="en-AU" sz="2100" dirty="0">
-                  <a:solidFill>
-                    <a:schemeClr val="dk1"/>
-                  </a:solidFill>
-                  <a:latin typeface="+mn-lt"/>
-                  <a:ea typeface="+mn-ea"/>
-                  <a:cs typeface="+mn-cs"/>
-                </a:rPr>
-                <a:t>Does cost prevent access to needed resources?</a:t>
-              </a:r>
-            </a:p>
-          </p:txBody>
-        </p:sp>
-        <p:sp>
-          <p:nvSpPr>
-            <p:cNvPr id="23" name="Line 23"/>
-            <p:cNvSpPr/>
-            <p:nvPr/>
-          </p:nvSpPr>
-          <p:spPr>
-            <a:xfrm>
-              <a:off x="685800" y="4095750"/>
-              <a:ext cx="10820400" cy="9525"/>
-            </a:xfrm>
-            <a:custGeom>
-              <a:avLst/>
-              <a:gdLst/>
-              <a:ahLst/>
-              <a:cxnLst/>
-              <a:rect l="l" t="t" r="r" b="b"/>
-              <a:pathLst>
-                <a:path w="10820400" h="9525">
-                  <a:moveTo>
-                    <a:pt x="0" y="0"/>
-                  </a:moveTo>
-                  <a:lnTo>
-                    <a:pt x="10820400" y="0"/>
-                  </a:lnTo>
-                </a:path>
-              </a:pathLst>
-            </a:custGeom>
-            <a:noFill/>
-            <a:ln w="9525">
-              <a:solidFill>
-                <a:srgbClr val="D6E0E7"/>
-              </a:solidFill>
-            </a:ln>
-          </p:spPr>
-        </p:sp>
-      </p:grpSp>
-      <p:grpSp>
-        <p:nvGrpSpPr>
-          <p:cNvPr id="29" name="dimension-3"/>
-          <p:cNvGrpSpPr/>
-          <p:nvPr/>
-        </p:nvGrpSpPr>
-        <p:grpSpPr>
-          <a:xfrm>
-            <a:off x="685800" y="4432300"/>
-            <a:ext cx="10820400" cy="682625"/>
-            <a:chOff x="685800" y="4432300"/>
-            <a:chExt cx="10820400" cy="682625"/>
-          </a:xfrm>
-        </p:grpSpPr>
-        <p:sp>
-          <p:nvSpPr>
-            <p:cNvPr id="25" name="Freeform 25"/>
-            <p:cNvSpPr/>
-            <p:nvPr/>
-          </p:nvSpPr>
-          <p:spPr>
-            <a:xfrm>
-              <a:off x="816769" y="4455319"/>
-              <a:ext cx="328613" cy="328613"/>
-            </a:xfrm>
-            <a:custGeom>
-              <a:avLst/>
-              <a:gdLst/>
-              <a:ahLst/>
-              <a:cxnLst/>
-              <a:rect l="l" t="t" r="r" b="b"/>
-              <a:pathLst>
-                <a:path w="328613" h="328613">
-                  <a:moveTo>
-                    <a:pt x="18256" y="73025"/>
-                  </a:moveTo>
-                  <a:lnTo>
-                    <a:pt x="73025" y="73025"/>
-                  </a:lnTo>
-                  <a:cubicBezTo>
-                    <a:pt x="83108" y="73025"/>
-                    <a:pt x="91281" y="64852"/>
-                    <a:pt x="91281" y="54769"/>
-                  </a:cubicBezTo>
-                  <a:lnTo>
-                    <a:pt x="91281" y="36513"/>
-                  </a:lnTo>
-                  <a:cubicBezTo>
-                    <a:pt x="91281" y="16347"/>
-                    <a:pt x="107629" y="0"/>
-                    <a:pt x="127794" y="0"/>
-                  </a:cubicBezTo>
-                  <a:cubicBezTo>
-                    <a:pt x="147959" y="0"/>
-                    <a:pt x="164307" y="16347"/>
-                    <a:pt x="164307" y="36513"/>
-                  </a:cubicBezTo>
-                  <a:lnTo>
-                    <a:pt x="164307" y="54769"/>
-                  </a:lnTo>
-                  <a:cubicBezTo>
-                    <a:pt x="164307" y="64852"/>
-                    <a:pt x="172480" y="73025"/>
-                    <a:pt x="182563" y="73025"/>
-                  </a:cubicBezTo>
-                  <a:lnTo>
-                    <a:pt x="237332" y="73025"/>
-                  </a:lnTo>
-                  <a:cubicBezTo>
-                    <a:pt x="247414" y="73025"/>
-                    <a:pt x="255588" y="81199"/>
-                    <a:pt x="255588" y="91281"/>
-                  </a:cubicBezTo>
-                  <a:lnTo>
-                    <a:pt x="255588" y="146050"/>
-                  </a:lnTo>
-                  <a:cubicBezTo>
-                    <a:pt x="255588" y="156133"/>
-                    <a:pt x="263762" y="164307"/>
-                    <a:pt x="273844" y="164307"/>
-                  </a:cubicBezTo>
-                  <a:lnTo>
-                    <a:pt x="292101" y="164307"/>
-                  </a:lnTo>
-                  <a:cubicBezTo>
-                    <a:pt x="312266" y="164307"/>
-                    <a:pt x="328613" y="180654"/>
-                    <a:pt x="328613" y="200819"/>
-                  </a:cubicBezTo>
-                  <a:cubicBezTo>
-                    <a:pt x="328613" y="220984"/>
-                    <a:pt x="312266" y="237332"/>
-                    <a:pt x="292101" y="237332"/>
-                  </a:cubicBezTo>
-                  <a:lnTo>
-                    <a:pt x="273844" y="237332"/>
-                  </a:lnTo>
-                  <a:cubicBezTo>
-                    <a:pt x="263762" y="237332"/>
-                    <a:pt x="255588" y="245505"/>
-                    <a:pt x="255588" y="255588"/>
-                  </a:cubicBezTo>
-                  <a:lnTo>
-                    <a:pt x="255588" y="310357"/>
-                  </a:lnTo>
-                  <a:cubicBezTo>
-                    <a:pt x="255588" y="320439"/>
-                    <a:pt x="247414" y="328613"/>
-                    <a:pt x="237332" y="328613"/>
-                  </a:cubicBezTo>
-                  <a:lnTo>
-                    <a:pt x="182563" y="328613"/>
-                  </a:lnTo>
-                  <a:cubicBezTo>
-                    <a:pt x="172480" y="328613"/>
-                    <a:pt x="164307" y="320439"/>
-                    <a:pt x="164307" y="310357"/>
-                  </a:cubicBezTo>
-                  <a:lnTo>
-                    <a:pt x="164307" y="292101"/>
-                  </a:lnTo>
-                  <a:cubicBezTo>
-                    <a:pt x="164307" y="271935"/>
-                    <a:pt x="147959" y="255588"/>
-                    <a:pt x="127794" y="255588"/>
-                  </a:cubicBezTo>
-                  <a:cubicBezTo>
-                    <a:pt x="107629" y="255588"/>
-                    <a:pt x="91281" y="271935"/>
-                    <a:pt x="91281" y="292101"/>
-                  </a:cubicBezTo>
-                  <a:lnTo>
-                    <a:pt x="91281" y="310357"/>
-                  </a:lnTo>
-                  <a:cubicBezTo>
-                    <a:pt x="91281" y="320439"/>
-                    <a:pt x="83108" y="328613"/>
-                    <a:pt x="73025" y="328613"/>
-                  </a:cubicBezTo>
-                  <a:lnTo>
-                    <a:pt x="18256" y="328613"/>
-                  </a:lnTo>
-                  <a:cubicBezTo>
-                    <a:pt x="8174" y="328613"/>
-                    <a:pt x="0" y="320439"/>
-                    <a:pt x="0" y="310357"/>
-                  </a:cubicBezTo>
-                  <a:lnTo>
-                    <a:pt x="0" y="255588"/>
-                  </a:lnTo>
-                  <a:cubicBezTo>
-                    <a:pt x="0" y="245505"/>
-                    <a:pt x="8174" y="237332"/>
-                    <a:pt x="18256" y="237332"/>
-                  </a:cubicBezTo>
-                  <a:lnTo>
-                    <a:pt x="36513" y="237332"/>
-                  </a:lnTo>
-                  <a:cubicBezTo>
-                    <a:pt x="56678" y="237332"/>
-                    <a:pt x="73025" y="220984"/>
-                    <a:pt x="73025" y="200819"/>
-                  </a:cubicBezTo>
-                  <a:cubicBezTo>
-                    <a:pt x="73025" y="180654"/>
-                    <a:pt x="56678" y="164307"/>
-                    <a:pt x="36513" y="164307"/>
-                  </a:cubicBezTo>
-                  <a:lnTo>
-                    <a:pt x="18256" y="164307"/>
-                  </a:lnTo>
-                  <a:cubicBezTo>
-                    <a:pt x="8174" y="164307"/>
-                    <a:pt x="0" y="156133"/>
-                    <a:pt x="0" y="146050"/>
-                  </a:cubicBezTo>
-                  <a:lnTo>
-                    <a:pt x="0" y="91281"/>
-                  </a:lnTo>
-                  <a:cubicBezTo>
-                    <a:pt x="0" y="81199"/>
-                    <a:pt x="8174" y="73025"/>
-                    <a:pt x="18256" y="73025"/>
-                  </a:cubicBezTo>
-                </a:path>
-              </a:pathLst>
-            </a:custGeom>
-            <a:noFill/>
-            <a:ln w="36513">
-              <a:solidFill>
-                <a:schemeClr val="accent2"/>
-              </a:solidFill>
-            </a:ln>
-          </p:spPr>
-        </p:sp>
-        <p:sp>
-          <p:nvSpPr>
-            <p:cNvPr id="26" name="TextBox 26"/>
-            <p:cNvSpPr txBox="1"/>
-            <p:nvPr/>
-          </p:nvSpPr>
-          <p:spPr>
-            <a:xfrm>
-              <a:off x="1397508" y="4432300"/>
-              <a:ext cx="1576107" cy="469392"/>
-            </a:xfrm>
-            <a:prstGeom prst="rect">
-              <a:avLst/>
-            </a:prstGeom>
-            <a:noFill/>
-            <a:ln>
-              <a:noFill/>
-            </a:ln>
-          </p:spPr>
-          <p:txBody>
-            <a:bodyPr wrap="none" lIns="0" tIns="0" rIns="0" bIns="0" anchor="t" anchorCtr="0">
-              <a:spAutoFit/>
-            </a:bodyPr>
-            <a:lstStyle/>
-            <a:p>
-              <a:pPr algn="l"/>
-              <a:r>
-                <a:rPr lang="en-AU" sz="2400" b="1" dirty="0">
-                  <a:solidFill>
-                    <a:schemeClr val="accent1"/>
-                  </a:solidFill>
-                  <a:latin typeface="+mn-lt"/>
-                  <a:ea typeface="+mn-ea"/>
-                  <a:cs typeface="+mn-cs"/>
-                </a:rPr>
-                <a:t>Suitability</a:t>
-              </a:r>
-            </a:p>
-          </p:txBody>
-        </p:sp>
-        <p:sp>
-          <p:nvSpPr>
-            <p:cNvPr id="27" name="TextBox 27"/>
-            <p:cNvSpPr txBox="1"/>
-            <p:nvPr/>
-          </p:nvSpPr>
-          <p:spPr>
-            <a:xfrm>
-              <a:off x="4904232" y="4451350"/>
-              <a:ext cx="4854454" cy="410718"/>
-            </a:xfrm>
-            <a:prstGeom prst="rect">
-              <a:avLst/>
-            </a:prstGeom>
-            <a:noFill/>
-            <a:ln>
-              <a:noFill/>
-            </a:ln>
-          </p:spPr>
-          <p:txBody>
-            <a:bodyPr wrap="none" lIns="0" tIns="0" rIns="0" bIns="0" anchor="t" anchorCtr="0">
-              <a:spAutoFit/>
-            </a:bodyPr>
-            <a:lstStyle/>
-            <a:p>
-              <a:pPr algn="l"/>
-              <a:r>
-                <a:rPr lang="en-AU" sz="2100" dirty="0">
-                  <a:solidFill>
-                    <a:schemeClr val="dk1"/>
-                  </a:solidFill>
-                  <a:latin typeface="+mn-lt"/>
-                  <a:ea typeface="+mn-ea"/>
-                  <a:cs typeface="+mn-cs"/>
-                </a:rPr>
-                <a:t>Do the items fit the child’s play needs?</a:t>
-              </a:r>
-            </a:p>
-          </p:txBody>
-        </p:sp>
-        <p:sp>
-          <p:nvSpPr>
-            <p:cNvPr id="28" name="Line 28"/>
-            <p:cNvSpPr/>
-            <p:nvPr/>
-          </p:nvSpPr>
-          <p:spPr>
-            <a:xfrm>
-              <a:off x="685800" y="5105400"/>
-              <a:ext cx="10820400" cy="9525"/>
-            </a:xfrm>
-            <a:custGeom>
-              <a:avLst/>
-              <a:gdLst/>
-              <a:ahLst/>
-              <a:cxnLst/>
-              <a:rect l="l" t="t" r="r" b="b"/>
-              <a:pathLst>
-                <a:path w="10820400" h="9525">
-                  <a:moveTo>
-                    <a:pt x="0" y="0"/>
-                  </a:moveTo>
-                  <a:lnTo>
-                    <a:pt x="10820400" y="0"/>
-                  </a:lnTo>
-                </a:path>
-              </a:pathLst>
-            </a:custGeom>
-            <a:noFill/>
-            <a:ln w="9525">
-              <a:solidFill>
-                <a:srgbClr val="D6E0E7"/>
-              </a:solidFill>
-            </a:ln>
-          </p:spPr>
-        </p:sp>
-      </p:grpSp>
-      <p:grpSp>
-        <p:nvGrpSpPr>
-          <p:cNvPr id="31" name="use-context"/>
-          <p:cNvGrpSpPr/>
-          <p:nvPr/>
-        </p:nvGrpSpPr>
-        <p:grpSpPr>
-          <a:xfrm>
-            <a:off x="676656" y="5448300"/>
-            <a:ext cx="6794752" cy="352044"/>
-            <a:chOff x="676656" y="5448300"/>
-            <a:chExt cx="6794752" cy="352044"/>
-          </a:xfrm>
-        </p:grpSpPr>
-        <p:sp>
-          <p:nvSpPr>
-            <p:cNvPr id="30" name="TextBox 30"/>
-            <p:cNvSpPr txBox="1"/>
-            <p:nvPr/>
-          </p:nvSpPr>
-          <p:spPr>
-            <a:xfrm>
-              <a:off x="676656" y="5448300"/>
-              <a:ext cx="6794752" cy="352044"/>
-            </a:xfrm>
-            <a:prstGeom prst="rect">
-              <a:avLst/>
-            </a:prstGeom>
-            <a:noFill/>
-            <a:ln>
-              <a:noFill/>
-            </a:ln>
-          </p:spPr>
-          <p:txBody>
-            <a:bodyPr wrap="none" lIns="0" tIns="0" rIns="0" bIns="0" anchor="t" anchorCtr="0">
-              <a:spAutoFit/>
-            </a:bodyPr>
-            <a:lstStyle/>
-            <a:p>
-              <a:pPr algn="l"/>
-              <a:r>
-                <a:rPr lang="en-AU" sz="1800" b="1" dirty="0">
-                  <a:solidFill>
-                    <a:schemeClr val="accent2"/>
-                  </a:solidFill>
-                  <a:latin typeface="+mn-lt"/>
-                  <a:ea typeface="+mn-ea"/>
-                  <a:cs typeface="+mn-cs"/>
-                </a:rPr>
-                <a:t>Actual use adds context. It is not a validated access score.</a:t>
-              </a:r>
-            </a:p>
-          </p:txBody>
-        </p:sp>
-      </p:grpSp>
-      <p:grpSp>
-        <p:nvGrpSpPr>
-          <p:cNvPr id="33" name="source-note"/>
-          <p:cNvGrpSpPr/>
-          <p:nvPr/>
-        </p:nvGrpSpPr>
-        <p:grpSpPr>
-          <a:xfrm>
-            <a:off x="679704" y="5962650"/>
-            <a:ext cx="7650254" cy="234696"/>
-            <a:chOff x="679704" y="5962650"/>
-            <a:chExt cx="7650254" cy="234696"/>
-          </a:xfrm>
-        </p:grpSpPr>
-        <p:sp>
-          <p:nvSpPr>
-            <p:cNvPr id="32" name="TextBox 32"/>
-            <p:cNvSpPr txBox="1"/>
-            <p:nvPr/>
-          </p:nvSpPr>
-          <p:spPr>
-            <a:xfrm>
-              <a:off x="679704" y="5962650"/>
-              <a:ext cx="7650254" cy="234696"/>
-            </a:xfrm>
-            <a:prstGeom prst="rect">
-              <a:avLst/>
-            </a:prstGeom>
-            <a:noFill/>
-            <a:ln>
-              <a:noFill/>
-            </a:ln>
-          </p:spPr>
-          <p:txBody>
-            <a:bodyPr wrap="none" lIns="0" tIns="0" rIns="0" bIns="0" anchor="t" anchorCtr="0">
-              <a:spAutoFit/>
-            </a:bodyPr>
-            <a:lstStyle/>
-            <a:p>
-              <a:pPr algn="l"/>
-              <a:r>
                 <a:rPr lang="en-AU" sz="1200" dirty="0">
                   <a:solidFill>
                     <a:schemeClr val="accent6"/>
@@ -8772,7 +8393,7 @@
                   <a:ea typeface="+mn-ea"/>
                   <a:cs typeface="+mn-cs"/>
                 </a:rPr>
-                <a:t>Author’s proposed operationalisation. Definition/context guidance: ONS n.d.; systems lens: Nguyen 2026c.</a:t>
+                <a:t>Sources: Toy Libraries Australia 2024, pp.2–3; Nguyen 2026c. Question selection is the author’s judgement.</a:t>
               </a:r>
             </a:p>
           </p:txBody>
@@ -8780,7 +8401,7 @@
       </p:grpSp>
       <p:sp>
         <p:nvSpPr>
-          <p:cNvPr id="34" name="Line 34"/>
+          <p:cNvPr id="13" name="Line 13"/>
           <p:cNvSpPr/>
           <p:nvPr/>
         </p:nvSpPr>
@@ -8816,7 +8437,7 @@
       </p:sp>
       <p:sp>
         <p:nvSpPr>
-          <p:cNvPr id="35" name="footer-label"/>
+          <p:cNvPr id="14" name="footer-label"/>
           <p:cNvSpPr txBox="1"/>
           <p:nvPr/>
         </p:nvSpPr>
@@ -8856,7 +8477,7 @@
       </p:sp>
       <p:sp>
         <p:nvSpPr>
-          <p:cNvPr id="36" name="page-number"/>
+          <p:cNvPr id="15" name="page-number"/>
           <p:cNvSpPr txBox="1"/>
           <p:nvPr/>
         </p:nvSpPr>
@@ -8939,9 +8560,9 @@
         <p:grpSpPr>
           <a:xfrm>
             <a:off x="669036" y="527050"/>
-            <a:ext cx="7132682" cy="645414"/>
+            <a:ext cx="8638559" cy="645414"/>
             <a:chOff x="669036" y="527050"/>
-            <a:chExt cx="7132682" cy="645414"/>
+            <a:chExt cx="8638559" cy="645414"/>
           </a:xfrm>
         </p:grpSpPr>
         <p:sp>
@@ -8953,7 +8574,7 @@
           <p:spPr>
             <a:xfrm>
               <a:off x="669036" y="527050"/>
-              <a:ext cx="7132682" cy="645414"/>
+              <a:ext cx="8638559" cy="645414"/>
             </a:xfrm>
             <a:prstGeom prst="rect">
               <a:avLst/>
@@ -8979,7 +8600,7 @@
                   <a:ea typeface="+mn-ea"/>
                   <a:cs typeface="+mn-cs"/>
                 </a:rPr>
-                <a:t>Comparing measurement options</a:t>
+                <a:t>Measurement options and design choice</a:t>
               </a:r>
             </a:p>
           </p:txBody>
@@ -9021,71 +8642,16 @@
           </a:ln>
         </p:spPr>
       </p:sp>
-      <p:grpSp>
-        <p:nvGrpSpPr>
-          <p:cNvPr id="6" name="comparison-intro"/>
-          <p:cNvGrpSpPr/>
-          <p:nvPr/>
-        </p:nvGrpSpPr>
-        <p:grpSpPr>
-          <a:xfrm>
-            <a:off x="675132" y="1622425"/>
-            <a:ext cx="6378353" cy="410718"/>
-            <a:chOff x="675132" y="1622425"/>
-            <a:chExt cx="6378353" cy="410718"/>
-          </a:xfrm>
-        </p:grpSpPr>
-        <p:sp>
-          <p:nvSpPr>
-            <p:cNvPr id="5" name="TextBox 5"/>
-            <p:cNvSpPr txBox="1"/>
-            <p:nvPr/>
-          </p:nvSpPr>
-          <p:spPr>
-            <a:xfrm>
-              <a:off x="675132" y="1622425"/>
-              <a:ext cx="6378353" cy="410718"/>
-            </a:xfrm>
-            <a:prstGeom prst="rect">
-              <a:avLst/>
-            </a:prstGeom>
-            <a:noFill/>
-            <a:ln>
-              <a:noFill/>
-            </a:ln>
-          </p:spPr>
-          <p:txBody>
-            <a:bodyPr wrap="none" lIns="0" tIns="0" rIns="0" bIns="0" anchor="t" anchorCtr="0">
-              <a:spAutoFit/>
-            </a:bodyPr>
-            <a:lstStyle/>
-            <a:p>
-              <a:pPr algn="l"/>
-              <a:r>
-                <a:rPr lang="en-AU" sz="2100" dirty="0">
-                  <a:solidFill>
-                    <a:schemeClr val="accent6"/>
-                  </a:solidFill>
-                  <a:latin typeface="+mn-lt"/>
-                  <a:ea typeface="+mn-ea"/>
-                  <a:cs typeface="+mn-cs"/>
-                </a:rPr>
-                <a:t>Qualitative appraisal against the research question</a:t>
-              </a:r>
-            </a:p>
-          </p:txBody>
-        </p:sp>
-      </p:grpSp>
       <p:graphicFrame>
         <p:nvGraphicFramePr>
-          <p:cNvPr id="7" name="options-comparison"/>
+          <p:cNvPr id="5" name="options-comparison"/>
           <p:cNvGraphicFramePr>
             <a:graphicFrameLocks noGrp="1"/>
           </p:cNvGraphicFramePr>
           <p:nvPr/>
         </p:nvGraphicFramePr>
         <p:xfrm>
-          <a:off x="685800" y="2190750"/>
+          <a:off x="685800" y="1943100"/>
           <a:ext cx="10820400" cy="3276600"/>
         </p:xfrm>
         <a:graphic>
@@ -9095,9 +8661,11 @@
                 <a:tableStyleId>{5C22544A-7EE6-4342-B048-85BDC9FD1C3A}</a:tableStyleId>
               </a:tblPr>
               <a:tblGrid>
-                <a:gridCol w="2857500"/>
-                <a:gridCol w="3714750"/>
-                <a:gridCol w="4248150"/>
+                <a:gridCol w="1962150"/>
+                <a:gridCol w="2076450"/>
+                <a:gridCol w="1809750"/>
+                <a:gridCol w="2209800"/>
+                <a:gridCol w="2762250"/>
               </a:tblGrid>
               <a:tr h="495300">
                 <a:tc>
@@ -9107,7 +8675,7 @@
                     <a:p>
                       <a:pPr/>
                       <a:r>
-                        <a:rPr lang="en-AU" sz="1800" b="1">
+                        <a:rPr lang="en-AU" sz="1580" b="1">
                           <a:solidFill>
                             <a:schemeClr val="accent1"/>
                           </a:solidFill>
@@ -9138,7 +8706,7 @@
                     <a:p>
                       <a:pPr/>
                       <a:r>
-                        <a:rPr lang="en-AU" sz="1800" b="1">
+                        <a:rPr lang="en-AU" sz="1580" b="1">
                           <a:solidFill>
                             <a:schemeClr val="accent1"/>
                           </a:solidFill>
@@ -9146,7 +8714,7 @@
                           <a:ea typeface="Microsoft YaHei"/>
                           <a:cs typeface="Arial"/>
                         </a:rPr>
-                        <a:t>What it contributes</a:t>
+                        <a:t>Relevance</a:t>
                       </a:r>
                     </a:p>
                   </a:txBody>
@@ -9169,7 +8737,7 @@
                     <a:p>
                       <a:pPr/>
                       <a:r>
-                        <a:rPr lang="en-AU" sz="1800" b="1">
+                        <a:rPr lang="en-AU" sz="1580" b="1">
                           <a:solidFill>
                             <a:schemeClr val="accent1"/>
                           </a:solidFill>
@@ -9177,7 +8745,69 @@
                           <a:ea typeface="Microsoft YaHei"/>
                           <a:cs typeface="Arial"/>
                         </a:rPr>
-                        <a:t>Trade-off</a:t>
+                        <a:t>Burden</a:t>
+                      </a:r>
+                    </a:p>
+                  </a:txBody>
+                  <a:tcPr anchor="ctr" marL="133350" marR="133350" marT="76200" marB="76200">
+                    <a:lnB w="9525">
+                      <a:solidFill>
+                        <a:srgbClr val="D6E0E7"/>
+                      </a:solidFill>
+                      <a:prstDash val="solid"/>
+                    </a:lnB>
+                    <a:solidFill>
+                      <a:schemeClr val="accent5"/>
+                    </a:solidFill>
+                  </a:tcPr>
+                </a:tc>
+                <a:tc>
+                  <a:txBody>
+                    <a:bodyPr/>
+                    <a:lstStyle/>
+                    <a:p>
+                      <a:pPr/>
+                      <a:r>
+                        <a:rPr lang="en-AU" sz="1580" b="1">
+                          <a:solidFill>
+                            <a:schemeClr val="accent1"/>
+                          </a:solidFill>
+                          <a:latin typeface="Arial"/>
+                          <a:ea typeface="Microsoft YaHei"/>
+                          <a:cs typeface="Arial"/>
+                        </a:rPr>
+                        <a:t>Feasibility</a:t>
+                      </a:r>
+                    </a:p>
+                  </a:txBody>
+                  <a:tcPr anchor="ctr" marL="133350" marR="133350" marT="76200" marB="76200">
+                    <a:lnB w="9525">
+                      <a:solidFill>
+                        <a:srgbClr val="D6E0E7"/>
+                      </a:solidFill>
+                      <a:prstDash val="solid"/>
+                    </a:lnB>
+                    <a:solidFill>
+                      <a:schemeClr val="accent5"/>
+                    </a:solidFill>
+                  </a:tcPr>
+                </a:tc>
+                <a:tc>
+                  <a:txBody>
+                    <a:bodyPr/>
+                    <a:lstStyle/>
+                    <a:p>
+                      <a:pPr/>
+                      <a:r>
+                        <a:rPr lang="en-AU" sz="1580" b="1">
+                          <a:solidFill>
+                            <a:schemeClr val="accent1"/>
+                          </a:solidFill>
+                          <a:latin typeface="Arial"/>
+                          <a:ea typeface="Microsoft YaHei"/>
+                          <a:cs typeface="Arial"/>
+                        </a:rPr>
+                        <a:t>Interpretation</a:t>
                       </a:r>
                     </a:p>
                   </a:txBody>
@@ -9194,7 +8824,7 @@
                   </a:tcPr>
                 </a:tc>
               </a:tr>
-              <a:tr h="666750">
+              <a:tr h="628650">
                 <a:tc>
                   <a:txBody>
                     <a:bodyPr/>
@@ -9202,7 +8832,7 @@
                     <a:p>
                       <a:pPr/>
                       <a:r>
-                        <a:rPr lang="en-AU" sz="1800" b="1">
+                        <a:rPr lang="en-AU" sz="1580" b="1">
                           <a:solidFill>
                             <a:schemeClr val="dk1"/>
                           </a:solidFill>
@@ -9210,7 +8840,7 @@
                           <a:ea typeface="Microsoft YaHei"/>
                           <a:cs typeface="Arial"/>
                         </a:rPr>
-                        <a:t>Distribution records</a:t>
+                        <a:t>Records</a:t>
                       </a:r>
                     </a:p>
                   </a:txBody>
@@ -9233,7 +8863,7 @@
                     <a:p>
                       <a:pPr/>
                       <a:r>
-                        <a:rPr lang="en-AU" sz="1800" b="0">
+                        <a:rPr lang="en-AU" sz="1580" b="0">
                           <a:solidFill>
                             <a:schemeClr val="dk1"/>
                           </a:solidFill>
@@ -9241,7 +8871,7 @@
                           <a:ea typeface="Microsoft YaHei"/>
                           <a:cs typeface="Arial"/>
                         </a:rPr>
-                        <a:t>Describe reach and activity</a:t>
+                        <a:t>Indirect: activity</a:t>
                       </a:r>
                     </a:p>
                   </a:txBody>
@@ -9264,7 +8894,7 @@
                     <a:p>
                       <a:pPr/>
                       <a:r>
-                        <a:rPr lang="en-AU" sz="1800" b="0">
+                        <a:rPr lang="en-AU" sz="1580" b="0">
                           <a:solidFill>
                             <a:schemeClr val="dk1"/>
                           </a:solidFill>
@@ -9272,40 +8902,7 @@
                           <a:ea typeface="Microsoft YaHei"/>
                           <a:cs typeface="Arial"/>
                         </a:rPr>
-                        <a:t>Indirect relevance to access</a:t>
-                      </a:r>
-                    </a:p>
-                  </a:txBody>
-                  <a:tcPr anchor="ctr" marL="133350" marR="133350" marT="76200" marB="76200">
-                    <a:lnB w="9525">
-                      <a:solidFill>
-                        <a:srgbClr val="D6E0E7"/>
-                      </a:solidFill>
-                      <a:prstDash val="solid"/>
-                    </a:lnB>
-                    <a:solidFill>
-                      <a:schemeClr val="lt1"/>
-                    </a:solidFill>
-                  </a:tcPr>
-                </a:tc>
-              </a:tr>
-              <a:tr h="666750">
-                <a:tc>
-                  <a:txBody>
-                    <a:bodyPr/>
-                    <a:lstStyle/>
-                    <a:p>
-                      <a:pPr/>
-                      <a:r>
-                        <a:rPr lang="en-AU" sz="1800" b="1">
-                          <a:solidFill>
-                            <a:schemeClr val="dk1"/>
-                          </a:solidFill>
-                          <a:latin typeface="Arial"/>
-                          <a:ea typeface="Microsoft YaHei"/>
-                          <a:cs typeface="Arial"/>
-                        </a:rPr>
-                        <a:t>Satisfaction item</a:t>
+                        <a:t>Low if existing</a:t>
                       </a:r>
                     </a:p>
                   </a:txBody>
@@ -9328,7 +8925,7 @@
                     <a:p>
                       <a:pPr/>
                       <a:r>
-                        <a:rPr lang="en-AU" sz="1800" b="0">
+                        <a:rPr lang="en-AU" sz="1580" b="0">
                           <a:solidFill>
                             <a:schemeClr val="dk1"/>
                           </a:solidFill>
@@ -9336,7 +8933,7 @@
                           <a:ea typeface="Microsoft YaHei"/>
                           <a:cs typeface="Arial"/>
                         </a:rPr>
-                        <a:t>Describe service experience</a:t>
+                        <a:t>If usable records</a:t>
                       </a:r>
                     </a:p>
                   </a:txBody>
@@ -9359,7 +8956,7 @@
                     <a:p>
                       <a:pPr/>
                       <a:r>
-                        <a:rPr lang="en-AU" sz="1800" b="0">
+                        <a:rPr lang="en-AU" sz="1580" b="0">
                           <a:solidFill>
                             <a:schemeClr val="dk1"/>
                           </a:solidFill>
@@ -9367,7 +8964,7 @@
                           <a:ea typeface="Microsoft YaHei"/>
                           <a:cs typeface="Arial"/>
                         </a:rPr>
-                        <a:t>Does not ask about change</a:t>
+                        <a:t>Reach and output</a:t>
                       </a:r>
                     </a:p>
                   </a:txBody>
@@ -9384,7 +8981,7 @@
                   </a:tcPr>
                 </a:tc>
               </a:tr>
-              <a:tr h="666750">
+              <a:tr h="628650">
                 <a:tc>
                   <a:txBody>
                     <a:bodyPr/>
@@ -9392,7 +8989,7 @@
                     <a:p>
                       <a:pPr/>
                       <a:r>
-                        <a:rPr lang="en-AU" sz="1800" b="1">
+                        <a:rPr lang="en-AU" sz="1580" b="1">
                           <a:solidFill>
                             <a:schemeClr val="dk1"/>
                           </a:solidFill>
@@ -9400,7 +8997,7 @@
                           <a:ea typeface="Microsoft YaHei"/>
                           <a:cs typeface="Arial"/>
                         </a:rPr>
-                        <a:t>Access-change item</a:t>
+                        <a:t>Satisfaction</a:t>
                       </a:r>
                     </a:p>
                   </a:txBody>
@@ -9423,7 +9020,7 @@
                     <a:p>
                       <a:pPr/>
                       <a:r>
-                        <a:rPr lang="en-AU" sz="1800" b="0">
+                        <a:rPr lang="en-AU" sz="1580" b="0">
                           <a:solidFill>
                             <a:schemeClr val="dk1"/>
                           </a:solidFill>
@@ -9431,7 +9028,7 @@
                           <a:ea typeface="Microsoft YaHei"/>
                           <a:cs typeface="Arial"/>
                         </a:rPr>
-                        <a:t>Ask about perceived change</a:t>
+                        <a:t>Service experience</a:t>
                       </a:r>
                     </a:p>
                   </a:txBody>
@@ -9454,7 +9051,7 @@
                     <a:p>
                       <a:pPr/>
                       <a:r>
-                        <a:rPr lang="en-AU" sz="1800" b="0">
+                        <a:rPr lang="en-AU" sz="1580" b="0">
                           <a:solidFill>
                             <a:schemeClr val="dk1"/>
                           </a:solidFill>
@@ -9462,7 +9059,69 @@
                           <a:ea typeface="Microsoft YaHei"/>
                           <a:cs typeface="Arial"/>
                         </a:rPr>
-                        <a:t>Requires recall of an earlier period</a:t>
+                        <a:t>Low</a:t>
+                      </a:r>
+                    </a:p>
+                  </a:txBody>
+                  <a:tcPr anchor="ctr" marL="133350" marR="133350" marT="76200" marB="76200">
+                    <a:lnB w="9525">
+                      <a:solidFill>
+                        <a:srgbClr val="D6E0E7"/>
+                      </a:solidFill>
+                      <a:prstDash val="solid"/>
+                    </a:lnB>
+                    <a:solidFill>
+                      <a:schemeClr val="lt1"/>
+                    </a:solidFill>
+                  </a:tcPr>
+                </a:tc>
+                <a:tc>
+                  <a:txBody>
+                    <a:bodyPr/>
+                    <a:lstStyle/>
+                    <a:p>
+                      <a:pPr/>
+                      <a:r>
+                        <a:rPr lang="en-AU" sz="1580" b="0">
+                          <a:solidFill>
+                            <a:schemeClr val="dk1"/>
+                          </a:solidFill>
+                          <a:latin typeface="Arial"/>
+                          <a:ea typeface="Microsoft YaHei"/>
+                          <a:cs typeface="Arial"/>
+                        </a:rPr>
+                        <a:t>One contact</a:t>
+                      </a:r>
+                    </a:p>
+                  </a:txBody>
+                  <a:tcPr anchor="ctr" marL="133350" marR="133350" marT="76200" marB="76200">
+                    <a:lnB w="9525">
+                      <a:solidFill>
+                        <a:srgbClr val="D6E0E7"/>
+                      </a:solidFill>
+                      <a:prstDash val="solid"/>
+                    </a:lnB>
+                    <a:solidFill>
+                      <a:schemeClr val="lt1"/>
+                    </a:solidFill>
+                  </a:tcPr>
+                </a:tc>
+                <a:tc>
+                  <a:txBody>
+                    <a:bodyPr/>
+                    <a:lstStyle/>
+                    <a:p>
+                      <a:pPr/>
+                      <a:r>
+                        <a:rPr lang="en-AU" sz="1580" b="0">
+                          <a:solidFill>
+                            <a:schemeClr val="dk1"/>
+                          </a:solidFill>
+                          <a:latin typeface="Arial"/>
+                          <a:ea typeface="Microsoft YaHei"/>
+                          <a:cs typeface="Arial"/>
+                        </a:rPr>
+                        <a:t>Positive ≠ access change</a:t>
                       </a:r>
                     </a:p>
                   </a:txBody>
@@ -9479,7 +9138,7 @@
                   </a:tcPr>
                 </a:tc>
               </a:tr>
-              <a:tr h="781050">
+              <a:tr h="762000">
                 <a:tc>
                   <a:txBody>
                     <a:bodyPr/>
@@ -9487,7 +9146,7 @@
                     <a:p>
                       <a:pPr/>
                       <a:r>
-                        <a:rPr lang="en-AU" sz="1800" b="1">
+                        <a:rPr lang="en-AU" sz="1580" b="1">
                           <a:solidFill>
                             <a:schemeClr val="accent2"/>
                           </a:solidFill>
@@ -9495,7 +9154,8 @@
                           <a:ea typeface="Microsoft YaHei"/>
                           <a:cs typeface="Arial"/>
                         </a:rPr>
-                        <a:t>Short set + comment</a:t>
+                        <a:t>Retrospective
+Q1 + context</a:t>
                       </a:r>
                     </a:p>
                   </a:txBody>
@@ -9518,7 +9178,7 @@
                     <a:p>
                       <a:pPr/>
                       <a:r>
-                        <a:rPr lang="en-AU" sz="1800" b="0">
+                        <a:rPr lang="en-AU" sz="1580" b="0">
                           <a:solidFill>
                             <a:schemeClr val="accent2"/>
                           </a:solidFill>
@@ -9526,7 +9186,7 @@
                           <a:ea typeface="Microsoft YaHei"/>
                           <a:cs typeface="Arial"/>
                         </a:rPr>
-                        <a:t>Add barriers, fit and explanation</a:t>
+                        <a:t>Closer to outcome</a:t>
                       </a:r>
                     </a:p>
                   </a:txBody>
@@ -9549,7 +9209,7 @@
                     <a:p>
                       <a:pPr/>
                       <a:r>
-                        <a:rPr lang="en-AU" sz="1800" b="0">
+                        <a:rPr lang="en-AU" sz="1580" b="0">
                           <a:solidFill>
                             <a:schemeClr val="accent2"/>
                           </a:solidFill>
@@ -9557,7 +9217,69 @@
                           <a:ea typeface="Microsoft YaHei"/>
                           <a:cs typeface="Arial"/>
                         </a:rPr>
-                        <a:t>More time and coding; pilot first</a:t>
+                        <a:t>Recall + five items</a:t>
+                      </a:r>
+                    </a:p>
+                  </a:txBody>
+                  <a:tcPr anchor="ctr" marL="133350" marR="133350" marT="76200" marB="76200">
+                    <a:lnB w="9525">
+                      <a:solidFill>
+                        <a:srgbClr val="D6E0E7"/>
+                      </a:solidFill>
+                      <a:prstDash val="solid"/>
+                    </a:lnB>
+                    <a:solidFill>
+                      <a:srgbClr val="EDF5F5"/>
+                    </a:solidFill>
+                  </a:tcPr>
+                </a:tc>
+                <a:tc>
+                  <a:txBody>
+                    <a:bodyPr/>
+                    <a:lstStyle/>
+                    <a:p>
+                      <a:pPr/>
+                      <a:r>
+                        <a:rPr lang="en-AU" sz="1580" b="0">
+                          <a:solidFill>
+                            <a:schemeClr val="accent2"/>
+                          </a:solidFill>
+                          <a:latin typeface="Arial"/>
+                          <a:ea typeface="Microsoft YaHei"/>
+                          <a:cs typeface="Arial"/>
+                        </a:rPr>
+                        <a:t>If eligible 4-week contact</a:t>
+                      </a:r>
+                    </a:p>
+                  </a:txBody>
+                  <a:tcPr anchor="ctr" marL="133350" marR="133350" marT="76200" marB="76200">
+                    <a:lnB w="9525">
+                      <a:solidFill>
+                        <a:srgbClr val="D6E0E7"/>
+                      </a:solidFill>
+                      <a:prstDash val="solid"/>
+                    </a:lnB>
+                    <a:solidFill>
+                      <a:srgbClr val="EDF5F5"/>
+                    </a:solidFill>
+                  </a:tcPr>
+                </a:tc>
+                <a:tc>
+                  <a:txBody>
+                    <a:bodyPr/>
+                    <a:lstStyle/>
+                    <a:p>
+                      <a:pPr/>
+                      <a:r>
+                        <a:rPr lang="en-AU" sz="1580" b="0">
+                          <a:solidFill>
+                            <a:schemeClr val="accent2"/>
+                          </a:solidFill>
+                          <a:latin typeface="Arial"/>
+                          <a:ea typeface="Microsoft YaHei"/>
+                          <a:cs typeface="Arial"/>
+                        </a:rPr>
+                        <a:t>Perceived change; recall risk</a:t>
                       </a:r>
                     </a:p>
                   </a:txBody>
@@ -9574,34 +9296,192 @@
                   </a:tcPr>
                 </a:tc>
               </a:tr>
+              <a:tr h="762000">
+                <a:tc>
+                  <a:txBody>
+                    <a:bodyPr/>
+                    <a:lstStyle/>
+                    <a:p>
+                      <a:pPr/>
+                      <a:r>
+                        <a:rPr lang="en-AU" sz="1580" b="1">
+                          <a:solidFill>
+                            <a:schemeClr val="dk1"/>
+                          </a:solidFill>
+                          <a:latin typeface="Arial"/>
+                          <a:ea typeface="Microsoft YaHei"/>
+                          <a:cs typeface="Arial"/>
+                        </a:rPr>
+                        <a:t>Baseline +
+follow-up</a:t>
+                      </a:r>
+                    </a:p>
+                  </a:txBody>
+                  <a:tcPr anchor="ctr" marL="133350" marR="133350" marT="76200" marB="76200">
+                    <a:lnB w="9525">
+                      <a:solidFill>
+                        <a:srgbClr val="D6E0E7"/>
+                      </a:solidFill>
+                      <a:prstDash val="solid"/>
+                    </a:lnB>
+                    <a:solidFill>
+                      <a:schemeClr val="lt1"/>
+                    </a:solidFill>
+                  </a:tcPr>
+                </a:tc>
+                <a:tc>
+                  <a:txBody>
+                    <a:bodyPr/>
+                    <a:lstStyle/>
+                    <a:p>
+                      <a:pPr/>
+                      <a:r>
+                        <a:rPr lang="en-AU" sz="1580" b="0">
+                          <a:solidFill>
+                            <a:schemeClr val="dk1"/>
+                          </a:solidFill>
+                          <a:latin typeface="Arial"/>
+                          <a:ea typeface="Microsoft YaHei"/>
+                          <a:cs typeface="Arial"/>
+                        </a:rPr>
+                        <a:t>Prospective change</a:t>
+                      </a:r>
+                    </a:p>
+                  </a:txBody>
+                  <a:tcPr anchor="ctr" marL="133350" marR="133350" marT="76200" marB="76200">
+                    <a:lnB w="9525">
+                      <a:solidFill>
+                        <a:srgbClr val="D6E0E7"/>
+                      </a:solidFill>
+                      <a:prstDash val="solid"/>
+                    </a:lnB>
+                    <a:solidFill>
+                      <a:schemeClr val="lt1"/>
+                    </a:solidFill>
+                  </a:tcPr>
+                </a:tc>
+                <a:tc>
+                  <a:txBody>
+                    <a:bodyPr/>
+                    <a:lstStyle/>
+                    <a:p>
+                      <a:pPr/>
+                      <a:r>
+                        <a:rPr lang="en-AU" sz="1580" b="0">
+                          <a:solidFill>
+                            <a:schemeClr val="dk1"/>
+                          </a:solidFill>
+                          <a:latin typeface="Arial"/>
+                          <a:ea typeface="Microsoft YaHei"/>
+                          <a:cs typeface="Arial"/>
+                        </a:rPr>
+                        <a:t>Two waves; linkage</a:t>
+                      </a:r>
+                    </a:p>
+                  </a:txBody>
+                  <a:tcPr anchor="ctr" marL="133350" marR="133350" marT="76200" marB="76200">
+                    <a:lnB w="9525">
+                      <a:solidFill>
+                        <a:srgbClr val="D6E0E7"/>
+                      </a:solidFill>
+                      <a:prstDash val="solid"/>
+                    </a:lnB>
+                    <a:solidFill>
+                      <a:schemeClr val="lt1"/>
+                    </a:solidFill>
+                  </a:tcPr>
+                </a:tc>
+                <a:tc>
+                  <a:txBody>
+                    <a:bodyPr/>
+                    <a:lstStyle/>
+                    <a:p>
+                      <a:pPr/>
+                      <a:r>
+                        <a:rPr lang="en-AU" sz="1580" b="0">
+                          <a:solidFill>
+                            <a:schemeClr val="dk1"/>
+                          </a:solidFill>
+                          <a:latin typeface="Arial"/>
+                          <a:ea typeface="Microsoft YaHei"/>
+                          <a:cs typeface="Arial"/>
+                        </a:rPr>
+                        <a:t>If data and timing fit</a:t>
+                      </a:r>
+                    </a:p>
+                  </a:txBody>
+                  <a:tcPr anchor="ctr" marL="133350" marR="133350" marT="76200" marB="76200">
+                    <a:lnB w="9525">
+                      <a:solidFill>
+                        <a:srgbClr val="D6E0E7"/>
+                      </a:solidFill>
+                      <a:prstDash val="solid"/>
+                    </a:lnB>
+                    <a:solidFill>
+                      <a:schemeClr val="lt1"/>
+                    </a:solidFill>
+                  </a:tcPr>
+                </a:tc>
+                <a:tc>
+                  <a:txBody>
+                    <a:bodyPr/>
+                    <a:lstStyle/>
+                    <a:p>
+                      <a:pPr/>
+                      <a:r>
+                        <a:rPr lang="en-AU" sz="1580" b="0">
+                          <a:solidFill>
+                            <a:schemeClr val="dk1"/>
+                          </a:solidFill>
+                          <a:latin typeface="Arial"/>
+                          <a:ea typeface="Microsoft YaHei"/>
+                          <a:cs typeface="Arial"/>
+                        </a:rPr>
+                        <a:t>Less recall of change; attrition remains</a:t>
+                      </a:r>
+                    </a:p>
+                  </a:txBody>
+                  <a:tcPr anchor="ctr" marL="133350" marR="133350" marT="76200" marB="76200">
+                    <a:lnB w="9525">
+                      <a:solidFill>
+                        <a:srgbClr val="D6E0E7"/>
+                      </a:solidFill>
+                      <a:prstDash val="solid"/>
+                    </a:lnB>
+                    <a:solidFill>
+                      <a:schemeClr val="lt1"/>
+                    </a:solidFill>
+                  </a:tcPr>
+                </a:tc>
+              </a:tr>
             </a:tbl>
           </a:graphicData>
         </a:graphic>
       </p:graphicFrame>
       <p:grpSp>
         <p:nvGrpSpPr>
-          <p:cNvPr id="9" name="comparison-judgement"/>
+          <p:cNvPr id="8" name="conditional-choice"/>
           <p:cNvGrpSpPr/>
           <p:nvPr/>
         </p:nvGrpSpPr>
         <p:grpSpPr>
           <a:xfrm>
-            <a:off x="676656" y="5591175"/>
-            <a:ext cx="7014253" cy="352044"/>
-            <a:chOff x="676656" y="5591175"/>
-            <a:chExt cx="7014253" cy="352044"/>
+            <a:off x="677037" y="5327650"/>
+            <a:ext cx="7660674" cy="621157"/>
+            <a:chOff x="677037" y="5327650"/>
+            <a:chExt cx="7660674" cy="621157"/>
           </a:xfrm>
         </p:grpSpPr>
         <p:sp>
           <p:nvSpPr>
-            <p:cNvPr id="8" name="TextBox 8"/>
+            <p:cNvPr id="6" name="TextBox 6"/>
             <p:cNvSpPr txBox="1"/>
             <p:nvPr/>
           </p:nvSpPr>
           <p:spPr>
             <a:xfrm>
-              <a:off x="676656" y="5591175"/>
-              <a:ext cx="7014253" cy="352044"/>
+              <a:off x="677037" y="5327650"/>
+              <a:ext cx="7316425" cy="337376"/>
             </a:xfrm>
             <a:prstGeom prst="rect">
               <a:avLst/>
@@ -9619,7 +9499,7 @@
             <a:p>
               <a:pPr algn="l"/>
               <a:r>
-                <a:rPr lang="en-AU" sz="1800" b="1" dirty="0">
+                <a:rPr lang="en-AU" sz="1720" b="1" dirty="0">
                   <a:solidFill>
                     <a:schemeClr val="accent2"/>
                   </a:solidFill>
@@ -9627,36 +9507,21 @@
                   <a:ea typeface="+mn-ea"/>
                   <a:cs typeface="+mn-cs"/>
                 </a:rPr>
-                <a:t>Keep only questions that inform a decision or a report claim.</a:t>
+                <a:t>Choose Q1 + context if one eligible follow-up fits the A3 timetable.</a:t>
               </a:r>
             </a:p>
           </p:txBody>
         </p:sp>
-      </p:grpSp>
-      <p:grpSp>
-        <p:nvGrpSpPr>
-          <p:cNvPr id="11" name="source-note"/>
-          <p:cNvGrpSpPr/>
-          <p:nvPr/>
-        </p:nvGrpSpPr>
-        <p:grpSpPr>
-          <a:xfrm>
-            <a:off x="679704" y="5962650"/>
-            <a:ext cx="6573016" cy="234696"/>
-            <a:chOff x="679704" y="5962650"/>
-            <a:chExt cx="6573016" cy="234696"/>
-          </a:xfrm>
-        </p:grpSpPr>
         <p:sp>
           <p:nvSpPr>
-            <p:cNvPr id="10" name="TextBox 10"/>
+            <p:cNvPr id="7" name="TextBox 7"/>
             <p:cNvSpPr txBox="1"/>
             <p:nvPr/>
           </p:nvSpPr>
           <p:spPr>
             <a:xfrm>
-              <a:off x="679704" y="5962650"/>
-              <a:ext cx="6573016" cy="234696"/>
+              <a:off x="677418" y="5626100"/>
+              <a:ext cx="7660293" cy="322707"/>
             </a:xfrm>
             <a:prstGeom prst="rect">
               <a:avLst/>
@@ -9674,6 +9539,61 @@
             <a:p>
               <a:pPr algn="l"/>
               <a:r>
+                <a:rPr lang="en-AU" sz="1650" dirty="0">
+                  <a:solidFill>
+                    <a:schemeClr val="dk1"/>
+                  </a:solidFill>
+                  <a:latin typeface="+mn-lt"/>
+                  <a:ea typeface="+mn-ea"/>
+                  <a:cs typeface="+mn-cs"/>
+                </a:rPr>
+                <a:t>Prefer baseline + follow-up if feasible; otherwise audit existing questions/data.</a:t>
+              </a:r>
+            </a:p>
+          </p:txBody>
+        </p:sp>
+      </p:grpSp>
+      <p:grpSp>
+        <p:nvGrpSpPr>
+          <p:cNvPr id="10" name="source-note"/>
+          <p:cNvGrpSpPr/>
+          <p:nvPr/>
+        </p:nvGrpSpPr>
+        <p:grpSpPr>
+          <a:xfrm>
+            <a:off x="679704" y="5962650"/>
+            <a:ext cx="8188458" cy="234696"/>
+            <a:chOff x="679704" y="5962650"/>
+            <a:chExt cx="8188458" cy="234696"/>
+          </a:xfrm>
+        </p:grpSpPr>
+        <p:sp>
+          <p:nvSpPr>
+            <p:cNvPr id="9" name="TextBox 9"/>
+            <p:cNvSpPr txBox="1"/>
+            <p:nvPr/>
+          </p:nvSpPr>
+          <p:spPr>
+            <a:xfrm>
+              <a:off x="679704" y="5962650"/>
+              <a:ext cx="8188458" cy="234696"/>
+            </a:xfrm>
+            <a:prstGeom prst="rect">
+              <a:avLst/>
+            </a:prstGeom>
+            <a:noFill/>
+            <a:ln>
+              <a:noFill/>
+            </a:ln>
+          </p:spPr>
+          <p:txBody>
+            <a:bodyPr wrap="none" lIns="0" tIns="0" rIns="0" bIns="0" anchor="t" anchorCtr="0">
+              <a:spAutoFit/>
+            </a:bodyPr>
+            <a:lstStyle/>
+            <a:p>
+              <a:pPr algn="l"/>
+              <a:r>
                 <a:rPr lang="en-AU" sz="1200" dirty="0">
                   <a:solidFill>
                     <a:schemeClr val="accent6"/>
@@ -9682,7 +9602,7 @@
                   <a:ea typeface="+mn-ea"/>
                   <a:cs typeface="+mn-cs"/>
                 </a:rPr>
-                <a:t>Author appraisal, not measured ratings. Design principles: Bjarkefur et al. 2021; GDS n.d.a.</a:t>
+                <a:t>Qualitative author appraisal; no measured ratings. Method basis: Bjarkefur et al. 2021; ONS n.d., §7 and Annex 2.</a:t>
               </a:r>
             </a:p>
           </p:txBody>
@@ -9690,7 +9610,7 @@
       </p:grpSp>
       <p:sp>
         <p:nvSpPr>
-          <p:cNvPr id="12" name="Line 12"/>
+          <p:cNvPr id="11" name="Line 11"/>
           <p:cNvSpPr/>
           <p:nvPr/>
         </p:nvSpPr>
@@ -9726,7 +9646,7 @@
       </p:sp>
       <p:sp>
         <p:nvSpPr>
-          <p:cNvPr id="13" name="footer-label"/>
+          <p:cNvPr id="12" name="footer-label"/>
           <p:cNvSpPr txBox="1"/>
           <p:nvPr/>
         </p:nvSpPr>
@@ -9766,7 +9686,7 @@
       </p:sp>
       <p:sp>
         <p:nvSpPr>
-          <p:cNvPr id="14" name="page-number"/>
+          <p:cNvPr id="13" name="page-number"/>
           <p:cNvSpPr txBox="1"/>
           <p:nvPr/>
         </p:nvSpPr>
@@ -9849,9 +9769,9 @@
         <p:grpSpPr>
           <a:xfrm>
             <a:off x="669036" y="527050"/>
-            <a:ext cx="8836945" cy="645414"/>
+            <a:ext cx="8933084" cy="645414"/>
             <a:chOff x="669036" y="527050"/>
-            <a:chExt cx="8836945" cy="645414"/>
+            <a:chExt cx="8933084" cy="645414"/>
           </a:xfrm>
         </p:grpSpPr>
         <p:sp>
@@ -9863,7 +9783,7 @@
           <p:spPr>
             <a:xfrm>
               <a:off x="669036" y="527050"/>
-              <a:ext cx="8836945" cy="645414"/>
+              <a:ext cx="8933084" cy="645414"/>
             </a:xfrm>
             <a:prstGeom prst="rect">
               <a:avLst/>
@@ -9889,7 +9809,7 @@
                   <a:ea typeface="+mn-ea"/>
                   <a:cs typeface="+mn-cs"/>
                 </a:rPr>
-                <a:t>Five questions, each with a clear purpose</a:t>
+                <a:t>One main indicator; four supporting items</a:t>
               </a:r>
             </a:p>
           </p:txBody>
@@ -9933,16 +9853,16 @@
       </p:sp>
       <p:grpSp>
         <p:nvGrpSpPr>
-          <p:cNvPr id="20" name="question-purposes"/>
+          <p:cNvPr id="20" name="item-roles"/>
           <p:cNvGrpSpPr/>
           <p:nvPr/>
         </p:nvGrpSpPr>
         <p:grpSpPr>
           <a:xfrm>
-            <a:off x="676656" y="1955800"/>
-            <a:ext cx="5501895" cy="3606419"/>
-            <a:chOff x="676656" y="1955800"/>
-            <a:chExt cx="5501895" cy="3606419"/>
+            <a:off x="676656" y="1965325"/>
+            <a:ext cx="5144480" cy="3606419"/>
+            <a:chOff x="676656" y="1965325"/>
+            <a:chExt cx="5144480" cy="3606419"/>
           </a:xfrm>
         </p:grpSpPr>
         <p:sp>
@@ -9954,7 +9874,7 @@
           <p:spPr>
             <a:xfrm>
               <a:off x="676656" y="2000250"/>
-              <a:ext cx="287840" cy="352044"/>
+              <a:ext cx="359835" cy="352044"/>
             </a:xfrm>
             <a:prstGeom prst="rect">
               <a:avLst/>
@@ -9980,7 +9900,7 @@
                   <a:ea typeface="+mn-ea"/>
                   <a:cs typeface="+mn-cs"/>
                 </a:rPr>
-                <a:t>01</a:t>
+                <a:t>Q1</a:t>
               </a:r>
             </a:p>
           </p:txBody>
@@ -9993,8 +9913,8 @@
           </p:nvSpPr>
           <p:spPr>
             <a:xfrm>
-              <a:off x="1246632" y="1955800"/>
-              <a:ext cx="2089683" cy="410718"/>
+              <a:off x="1360932" y="1965325"/>
+              <a:ext cx="3361841" cy="410718"/>
             </a:xfrm>
             <a:prstGeom prst="rect">
               <a:avLst/>
@@ -10020,7 +9940,7 @@
                   <a:ea typeface="+mn-ea"/>
                   <a:cs typeface="+mn-cs"/>
                 </a:rPr>
-                <a:t>Access change</a:t>
+                <a:t>Reported access change</a:t>
               </a:r>
             </a:p>
           </p:txBody>
@@ -10033,8 +9953,8 @@
           </p:nvSpPr>
           <p:spPr>
             <a:xfrm>
-              <a:off x="1248156" y="2276475"/>
-              <a:ext cx="3232407" cy="352044"/>
+              <a:off x="1362456" y="2286000"/>
+              <a:ext cx="2839861" cy="352044"/>
             </a:xfrm>
             <a:prstGeom prst="rect">
               <a:avLst/>
@@ -10060,7 +9980,7 @@
                   <a:ea typeface="+mn-ea"/>
                   <a:cs typeface="+mn-cs"/>
                 </a:rPr>
-                <a:t>Easier, harder or unchanged?</a:t>
+                <a:t>Primary outcome indicator</a:t>
               </a:r>
             </a:p>
           </p:txBody>
@@ -10074,7 +9994,7 @@
           <p:spPr>
             <a:xfrm>
               <a:off x="676656" y="2733675"/>
-              <a:ext cx="287840" cy="352044"/>
+              <a:ext cx="359835" cy="352044"/>
             </a:xfrm>
             <a:prstGeom prst="rect">
               <a:avLst/>
@@ -10100,7 +10020,7 @@
                   <a:ea typeface="+mn-ea"/>
                   <a:cs typeface="+mn-cs"/>
                 </a:rPr>
-                <a:t>02</a:t>
+                <a:t>Q2</a:t>
               </a:r>
             </a:p>
           </p:txBody>
@@ -10113,8 +10033,8 @@
           </p:nvSpPr>
           <p:spPr>
             <a:xfrm>
-              <a:off x="1246632" y="2689225"/>
-              <a:ext cx="1632107" cy="410718"/>
+              <a:off x="1360932" y="2698750"/>
+              <a:ext cx="1789400" cy="410718"/>
             </a:xfrm>
             <a:prstGeom prst="rect">
               <a:avLst/>
@@ -10140,7 +10060,7 @@
                   <a:ea typeface="+mn-ea"/>
                   <a:cs typeface="+mn-cs"/>
                 </a:rPr>
-                <a:t>Cost barrier</a:t>
+                <a:t>Cost barriers</a:t>
               </a:r>
             </a:p>
           </p:txBody>
@@ -10153,8 +10073,8 @@
           </p:nvSpPr>
           <p:spPr>
             <a:xfrm>
-              <a:off x="1248156" y="3009900"/>
-              <a:ext cx="3851367" cy="352044"/>
+              <a:off x="1362456" y="3019425"/>
+              <a:ext cx="3635734" cy="352044"/>
             </a:xfrm>
             <a:prstGeom prst="rect">
               <a:avLst/>
@@ -10180,7 +10100,7 @@
                   <a:ea typeface="+mn-ea"/>
                   <a:cs typeface="+mn-cs"/>
                 </a:rPr>
-                <a:t>How often did cost prevent access?</a:t>
+                <a:t>Context; no cost-change estimate</a:t>
               </a:r>
             </a:p>
           </p:txBody>
@@ -10194,7 +10114,7 @@
           <p:spPr>
             <a:xfrm>
               <a:off x="676656" y="3467100"/>
-              <a:ext cx="287840" cy="352044"/>
+              <a:ext cx="359835" cy="352044"/>
             </a:xfrm>
             <a:prstGeom prst="rect">
               <a:avLst/>
@@ -10220,7 +10140,7 @@
                   <a:ea typeface="+mn-ea"/>
                   <a:cs typeface="+mn-cs"/>
                 </a:rPr>
-                <a:t>03</a:t>
+                <a:t>Q3</a:t>
               </a:r>
             </a:p>
           </p:txBody>
@@ -10233,8 +10153,8 @@
           </p:nvSpPr>
           <p:spPr>
             <a:xfrm>
-              <a:off x="1246632" y="3422650"/>
-              <a:ext cx="1379094" cy="410718"/>
+              <a:off x="1360932" y="3432175"/>
+              <a:ext cx="2763085" cy="410718"/>
             </a:xfrm>
             <a:prstGeom prst="rect">
               <a:avLst/>
@@ -10260,7 +10180,7 @@
                   <a:ea typeface="+mn-ea"/>
                   <a:cs typeface="+mn-cs"/>
                 </a:rPr>
-                <a:t>Suitability</a:t>
+                <a:t>Perceived suitability</a:t>
               </a:r>
             </a:p>
           </p:txBody>
@@ -10273,8 +10193,8 @@
           </p:nvSpPr>
           <p:spPr>
             <a:xfrm>
-              <a:off x="1248156" y="3743325"/>
-              <a:ext cx="3810215" cy="352044"/>
+              <a:off x="1362456" y="3752850"/>
+              <a:ext cx="3082365" cy="352044"/>
             </a:xfrm>
             <a:prstGeom prst="rect">
               <a:avLst/>
@@ -10300,7 +10220,7 @@
                   <a:ea typeface="+mn-ea"/>
                   <a:cs typeface="+mn-cs"/>
                 </a:rPr>
-                <a:t>How well did the received items fit?</a:t>
+                <a:t>Context; fit of received items</a:t>
               </a:r>
             </a:p>
           </p:txBody>
@@ -10314,7 +10234,7 @@
           <p:spPr>
             <a:xfrm>
               <a:off x="676656" y="4200525"/>
-              <a:ext cx="287840" cy="352044"/>
+              <a:ext cx="359835" cy="352044"/>
             </a:xfrm>
             <a:prstGeom prst="rect">
               <a:avLst/>
@@ -10340,7 +10260,7 @@
                   <a:ea typeface="+mn-ea"/>
                   <a:cs typeface="+mn-cs"/>
                 </a:rPr>
-                <a:t>04</a:t>
+                <a:t>Q4</a:t>
               </a:r>
             </a:p>
           </p:txBody>
@@ -10353,7 +10273,7 @@
           </p:nvSpPr>
           <p:spPr>
             <a:xfrm>
-              <a:off x="1246632" y="4156075"/>
+              <a:off x="1360932" y="4165600"/>
               <a:ext cx="1539207" cy="410718"/>
             </a:xfrm>
             <a:prstGeom prst="rect">
@@ -10393,8 +10313,8 @@
           </p:nvSpPr>
           <p:spPr>
             <a:xfrm>
-              <a:off x="1248156" y="4476750"/>
-              <a:ext cx="3339413" cy="352044"/>
+              <a:off x="1362456" y="4486275"/>
+              <a:ext cx="2827972" cy="352044"/>
             </a:xfrm>
             <a:prstGeom prst="rect">
               <a:avLst/>
@@ -10420,7 +10340,7 @@
                   <a:ea typeface="+mn-ea"/>
                   <a:cs typeface="+mn-cs"/>
                 </a:rPr>
-                <a:t>Use during the last seven days</a:t>
+                <a:t>Context; zero–seven days</a:t>
               </a:r>
             </a:p>
           </p:txBody>
@@ -10434,7 +10354,7 @@
           <p:spPr>
             <a:xfrm>
               <a:off x="676656" y="4933950"/>
-              <a:ext cx="287840" cy="352044"/>
+              <a:ext cx="359835" cy="352044"/>
             </a:xfrm>
             <a:prstGeom prst="rect">
               <a:avLst/>
@@ -10460,7 +10380,7 @@
                   <a:ea typeface="+mn-ea"/>
                   <a:cs typeface="+mn-cs"/>
                 </a:rPr>
-                <a:t>05</a:t>
+                <a:t>Q5</a:t>
               </a:r>
             </a:p>
           </p:txBody>
@@ -10473,8 +10393,8 @@
           </p:nvSpPr>
           <p:spPr>
             <a:xfrm>
-              <a:off x="1246632" y="4889500"/>
-              <a:ext cx="1631766" cy="410718"/>
+              <a:off x="1360932" y="4899025"/>
+              <a:ext cx="2402156" cy="410718"/>
             </a:xfrm>
             <a:prstGeom prst="rect">
               <a:avLst/>
@@ -10500,7 +10420,7 @@
                   <a:ea typeface="+mn-ea"/>
                   <a:cs typeface="+mn-cs"/>
                 </a:rPr>
-                <a:t>Explanation</a:t>
+                <a:t>Open explanation</a:t>
               </a:r>
             </a:p>
           </p:txBody>
@@ -10513,8 +10433,8 @@
           </p:nvSpPr>
           <p:spPr>
             <a:xfrm>
-              <a:off x="1248156" y="5210175"/>
-              <a:ext cx="4930395" cy="352044"/>
+              <a:off x="1362456" y="5219700"/>
+              <a:ext cx="4458680" cy="352044"/>
             </a:xfrm>
             <a:prstGeom prst="rect">
               <a:avLst/>
@@ -10540,7 +10460,7 @@
                   <a:ea typeface="+mn-ea"/>
                   <a:cs typeface="+mn-cs"/>
                 </a:rPr>
-                <a:t>What changed, and what helped or hindered?</a:t>
+                <a:t>What changed; what helped or hindered?</a:t>
               </a:r>
             </a:p>
           </p:txBody>
@@ -10548,16 +10468,16 @@
       </p:grpSp>
       <p:grpSp>
         <p:nvGrpSpPr>
-          <p:cNvPr id="25" name="survey-rules"/>
+          <p:cNvPr id="25" name="reporting-rules"/>
           <p:cNvGrpSpPr/>
           <p:nvPr/>
         </p:nvGrpSpPr>
         <p:grpSpPr>
           <a:xfrm>
-            <a:off x="8237982" y="1822450"/>
-            <a:ext cx="2917043" cy="3777869"/>
-            <a:chOff x="8237982" y="1822450"/>
-            <a:chExt cx="2917043" cy="3777869"/>
+            <a:off x="8314182" y="1879600"/>
+            <a:ext cx="2727781" cy="3128201"/>
+            <a:chOff x="8314182" y="1879600"/>
+            <a:chExt cx="2727781" cy="3128201"/>
           </a:xfrm>
         </p:grpSpPr>
         <p:sp>
@@ -10568,8 +10488,8 @@
           </p:nvSpPr>
           <p:spPr>
             <a:xfrm>
-              <a:off x="8237982" y="1822450"/>
-              <a:ext cx="2653193" cy="410718"/>
+              <a:off x="8314182" y="1879600"/>
+              <a:ext cx="2418052" cy="410718"/>
             </a:xfrm>
             <a:prstGeom prst="rect">
               <a:avLst/>
@@ -10595,7 +10515,7 @@
                   <a:ea typeface="+mn-ea"/>
                   <a:cs typeface="+mn-cs"/>
                 </a:rPr>
-                <a:t>Interpret separately</a:t>
+                <a:t>Report separately</a:t>
               </a:r>
             </a:p>
           </p:txBody>
@@ -10608,8 +10528,8 @@
           </p:nvSpPr>
           <p:spPr>
             <a:xfrm>
-              <a:off x="8239506" y="2441575"/>
-              <a:ext cx="2915519" cy="675894"/>
+              <a:off x="8316087" y="2568575"/>
+              <a:ext cx="2422070" cy="651700"/>
             </a:xfrm>
             <a:prstGeom prst="rect">
               <a:avLst/>
@@ -10627,11 +10547,11 @@
             <a:p>
               <a:pPr algn="l">
                 <a:lnSpc>
-                  <a:spcPts val="2550"/>
+                  <a:spcPts val="2475"/>
                 </a:lnSpc>
               </a:pPr>
               <a:r>
-                <a:rPr lang="en-AU" sz="1800" dirty="0">
+                <a:rPr lang="en-AU" sz="1720" dirty="0">
                   <a:solidFill>
                     <a:schemeClr val="dk1"/>
                   </a:solidFill>
@@ -10639,10 +10559,10 @@
                   <a:ea typeface="+mn-ea"/>
                   <a:cs typeface="+mn-cs"/>
                 </a:rPr>
-                <a:t>Proposed: invite adult carers</a:t>
+                <a:t>Show each category and</a:t>
               </a:r>
               <a:br>
-                <a:rPr lang="en-AU" sz="1800" dirty="0">
+                <a:rPr lang="en-AU" sz="1720" dirty="0">
                   <a:solidFill>
                     <a:schemeClr val="dk1"/>
                   </a:solidFill>
@@ -10652,7 +10572,7 @@
                 </a:rPr>
               </a:br>
               <a:r>
-                <a:rPr lang="en-AU" sz="1800" dirty="0">
+                <a:rPr lang="en-AU" sz="1720" dirty="0">
                   <a:solidFill>
                     <a:schemeClr val="dk1"/>
                   </a:solidFill>
@@ -10660,7 +10580,7 @@
                   <a:ea typeface="+mn-ea"/>
                   <a:cs typeface="+mn-cs"/>
                 </a:rPr>
-                <a:t>four weeks after one visit.</a:t>
+                <a:t>its valid item count.</a:t>
               </a:r>
             </a:p>
           </p:txBody>
@@ -10673,8 +10593,8 @@
           </p:nvSpPr>
           <p:spPr>
             <a:xfrm>
-              <a:off x="8240268" y="3460750"/>
-              <a:ext cx="2905243" cy="1294257"/>
+              <a:off x="8316087" y="3473450"/>
+              <a:ext cx="2725876" cy="651700"/>
             </a:xfrm>
             <a:prstGeom prst="rect">
               <a:avLst/>
@@ -10692,11 +10612,11 @@
             <a:p>
               <a:pPr algn="l">
                 <a:lnSpc>
-                  <a:spcPts val="2550"/>
+                  <a:spcPts val="2475"/>
                 </a:lnSpc>
               </a:pPr>
               <a:r>
-                <a:rPr lang="en-AU" sz="1650" dirty="0">
+                <a:rPr lang="en-AU" sz="1720" dirty="0">
                   <a:solidFill>
                     <a:schemeClr val="dk1"/>
                   </a:solidFill>
@@ -10704,10 +10624,10 @@
                   <a:ea typeface="+mn-ea"/>
                   <a:cs typeface="+mn-cs"/>
                 </a:rPr>
-                <a:t>Define the reference periods.</a:t>
+                <a:t>Keep uncertain and skipped</a:t>
               </a:r>
               <a:br>
-                <a:rPr lang="en-AU" sz="1650" dirty="0">
+                <a:rPr lang="en-AU" sz="1720" dirty="0">
                   <a:solidFill>
                     <a:schemeClr val="dk1"/>
                   </a:solidFill>
@@ -10717,7 +10637,7 @@
                 </a:rPr>
               </a:br>
               <a:r>
-                <a:rPr lang="en-AU" sz="1650" dirty="0">
+                <a:rPr lang="en-AU" sz="1720" dirty="0">
                   <a:solidFill>
                     <a:schemeClr val="dk1"/>
                   </a:solidFill>
@@ -10725,49 +10645,7 @@
                   <a:ea typeface="+mn-ea"/>
                   <a:cs typeface="+mn-cs"/>
                 </a:rPr>
-                <a:t>Keep valid “not sure” options.</a:t>
-              </a:r>
-              <a:br>
-                <a:rPr lang="en-AU" sz="1650" dirty="0">
-                  <a:solidFill>
-                    <a:schemeClr val="dk1"/>
-                  </a:solidFill>
-                  <a:latin typeface="+mn-lt"/>
-                  <a:ea typeface="+mn-ea"/>
-                  <a:cs typeface="+mn-cs"/>
-                </a:rPr>
-              </a:br>
-              <a:r>
-                <a:rPr lang="en-AU" sz="1650" dirty="0">
-                  <a:solidFill>
-                    <a:schemeClr val="dk1"/>
-                  </a:solidFill>
-                  <a:latin typeface="+mn-lt"/>
-                  <a:ea typeface="+mn-ea"/>
-                  <a:cs typeface="+mn-cs"/>
-                </a:rPr>
-                <a:t>Leave options unselected.</a:t>
-              </a:r>
-              <a:br>
-                <a:rPr lang="en-AU" sz="1650" dirty="0">
-                  <a:solidFill>
-                    <a:schemeClr val="dk1"/>
-                  </a:solidFill>
-                  <a:latin typeface="+mn-lt"/>
-                  <a:ea typeface="+mn-ea"/>
-                  <a:cs typeface="+mn-cs"/>
-                </a:rPr>
-              </a:br>
-              <a:r>
-                <a:rPr lang="en-AU" sz="1650" dirty="0">
-                  <a:solidFill>
-                    <a:schemeClr val="dk1"/>
-                  </a:solidFill>
-                  <a:latin typeface="+mn-lt"/>
-                  <a:ea typeface="+mn-ea"/>
-                  <a:cs typeface="+mn-cs"/>
-                </a:rPr>
-                <a:t>Allow review before submitting.</a:t>
+                <a:t>answers distinct.</a:t>
               </a:r>
             </a:p>
           </p:txBody>
@@ -10780,8 +10658,8 @@
           </p:nvSpPr>
           <p:spPr>
             <a:xfrm>
-              <a:off x="8239506" y="5248275"/>
-              <a:ext cx="2585386" cy="352044"/>
+              <a:off x="8316087" y="4670425"/>
+              <a:ext cx="2470531" cy="337376"/>
             </a:xfrm>
             <a:prstGeom prst="rect">
               <a:avLst/>
@@ -10799,7 +10677,7 @@
             <a:p>
               <a:pPr algn="l"/>
               <a:r>
-                <a:rPr lang="en-AU" sz="1800" b="1" dirty="0">
+                <a:rPr lang="en-AU" sz="1720" b="1" dirty="0">
                   <a:solidFill>
                     <a:schemeClr val="accent2"/>
                   </a:solidFill>
@@ -10822,9 +10700,9 @@
         <p:grpSpPr>
           <a:xfrm>
             <a:off x="679704" y="5962650"/>
-            <a:ext cx="7795061" cy="234696"/>
+            <a:ext cx="8122377" cy="234696"/>
             <a:chOff x="679704" y="5962650"/>
-            <a:chExt cx="7795061" cy="234696"/>
+            <a:chExt cx="8122377" cy="234696"/>
           </a:xfrm>
         </p:grpSpPr>
         <p:sp>
@@ -10836,7 +10714,7 @@
           <p:spPr>
             <a:xfrm>
               <a:off x="679704" y="5962650"/>
-              <a:ext cx="7795061" cy="234696"/>
+              <a:ext cx="8122377" cy="234696"/>
             </a:xfrm>
             <a:prstGeom prst="rect">
               <a:avLst/>
@@ -10862,7 +10740,7 @@
                   <a:ea typeface="+mn-ea"/>
                   <a:cs typeface="+mn-cs"/>
                 </a:rPr>
-                <a:t>Draft items; pilot required. Sources: Bjarkefur et al. 2021; ONS n.d.; GDS n.d.a–c. Full wording: Appendix A.</a:t>
+                <a:t>Full wording: Appendix A; item-specific interpretation: Appendix B. Administration details remain in reading notes.</a:t>
               </a:r>
             </a:p>
           </p:txBody>
@@ -11029,9 +10907,9 @@
         <p:grpSpPr>
           <a:xfrm>
             <a:off x="669036" y="527050"/>
-            <a:ext cx="5849036" cy="645414"/>
+            <a:ext cx="7923091" cy="645414"/>
             <a:chOff x="669036" y="527050"/>
-            <a:chExt cx="5849036" cy="645414"/>
+            <a:chExt cx="7923091" cy="645414"/>
           </a:xfrm>
         </p:grpSpPr>
         <p:sp>
@@ -11043,7 +10921,7 @@
           <p:spPr>
             <a:xfrm>
               <a:off x="669036" y="527050"/>
-              <a:ext cx="5849036" cy="645414"/>
+              <a:ext cx="7923091" cy="645414"/>
             </a:xfrm>
             <a:prstGeom prst="rect">
               <a:avLst/>
@@ -11069,7 +10947,7 @@
                   <a:ea typeface="+mn-ea"/>
                   <a:cs typeface="+mn-cs"/>
                 </a:rPr>
-                <a:t>Reported change has limits</a:t>
+                <a:t>Match each claim to the study design</a:t>
               </a:r>
             </a:p>
           </p:txBody>
@@ -11113,16 +10991,16 @@
       </p:sp>
       <p:grpSp>
         <p:nvGrpSpPr>
-          <p:cNvPr id="6" name="limits-intro"/>
+          <p:cNvPr id="6" name="intro"/>
           <p:cNvGrpSpPr/>
           <p:nvPr/>
         </p:nvGrpSpPr>
         <p:grpSpPr>
           <a:xfrm>
-            <a:off x="673608" y="1651000"/>
-            <a:ext cx="7630346" cy="469392"/>
-            <a:chOff x="673608" y="1651000"/>
-            <a:chExt cx="7630346" cy="469392"/>
+            <a:off x="674370" y="1673225"/>
+            <a:ext cx="8145522" cy="440055"/>
+            <a:chOff x="674370" y="1673225"/>
+            <a:chExt cx="8145522" cy="440055"/>
           </a:xfrm>
         </p:grpSpPr>
         <p:sp>
@@ -11133,8 +11011,8 @@
           </p:nvSpPr>
           <p:spPr>
             <a:xfrm>
-              <a:off x="673608" y="1651000"/>
-              <a:ext cx="7630346" cy="469392"/>
+              <a:off x="674370" y="1673225"/>
+              <a:ext cx="8145522" cy="440055"/>
             </a:xfrm>
             <a:prstGeom prst="rect">
               <a:avLst/>
@@ -11152,7 +11030,7 @@
             <a:p>
               <a:pPr algn="l"/>
               <a:r>
-                <a:rPr lang="en-AU" sz="2400" b="1" dirty="0">
+                <a:rPr lang="en-AU" sz="2250" b="1" dirty="0">
                   <a:solidFill>
                     <a:schemeClr val="accent2"/>
                   </a:solidFill>
@@ -11160,7 +11038,7 @@
                   <a:ea typeface="+mn-ea"/>
                   <a:cs typeface="+mn-cs"/>
                 </a:rPr>
-                <a:t>A recalled change report is not a causal estimate.</a:t>
+                <a:t>Reported change does not establish programme effects.</a:t>
               </a:r>
             </a:p>
           </p:txBody>
@@ -11175,8 +11053,8 @@
           <p:nvPr/>
         </p:nvGraphicFramePr>
         <p:xfrm>
-          <a:off x="685800" y="2400300"/>
-          <a:ext cx="10820400" cy="2857500"/>
+          <a:off x="685800" y="2409825"/>
+          <a:ext cx="10820400" cy="2800350"/>
         </p:xfrm>
         <a:graphic>
           <a:graphicData uri="http://schemas.openxmlformats.org/drawingml/2006/table">
@@ -11185,8 +11063,8 @@
                 <a:tableStyleId>{5C22544A-7EE6-4342-B048-85BDC9FD1C3A}</a:tableStyleId>
               </a:tblPr>
               <a:tblGrid>
-                <a:gridCol w="4191000"/>
-                <a:gridCol w="6629400"/>
+                <a:gridCol w="4343400"/>
+                <a:gridCol w="6477000"/>
               </a:tblGrid>
               <a:tr h="514350">
                 <a:tc>
@@ -11204,7 +11082,7 @@
                           <a:ea typeface="Microsoft YaHei"/>
                           <a:cs typeface="Arial"/>
                         </a:rPr>
-                        <a:t>Limitation</a:t>
+                        <a:t>Threat / condition</a:t>
                       </a:r>
                     </a:p>
                   </a:txBody>
@@ -11252,7 +11130,7 @@
                   </a:tcPr>
                 </a:tc>
               </a:tr>
-              <a:tr h="781050">
+              <a:tr h="762000">
                 <a:tc>
                   <a:txBody>
                     <a:bodyPr/>
@@ -11268,7 +11146,7 @@
                           <a:ea typeface="Microsoft YaHei"/>
                           <a:cs typeface="Arial"/>
                         </a:rPr>
-                        <a:t>Recall and selective response</a:t>
+                        <a:t>Recall</a:t>
                       </a:r>
                     </a:p>
                   </a:txBody>
@@ -11299,7 +11177,7 @@
                           <a:ea typeface="Microsoft YaHei"/>
                           <a:cs typeface="Arial"/>
                         </a:rPr>
-                        <a:t>Specify the period; say “among responding families”.</a:t>
+                        <a:t>State the before/after reference periods.</a:t>
                       </a:r>
                     </a:p>
                   </a:txBody>
@@ -11316,7 +11194,7 @@
                   </a:tcPr>
                 </a:tc>
               </a:tr>
-              <a:tr h="781050">
+              <a:tr h="762000">
                 <a:tc>
                   <a:txBody>
                     <a:bodyPr/>
@@ -11332,7 +11210,7 @@
                           <a:ea typeface="Microsoft YaHei"/>
                           <a:cs typeface="Arial"/>
                         </a:rPr>
-                        <a:t>No baseline or counterfactual</a:t>
+                        <a:t>Selective response</a:t>
                       </a:r>
                     </a:p>
                   </a:txBody>
@@ -11363,7 +11241,7 @@
                           <a:ea typeface="Microsoft YaHei"/>
                           <a:cs typeface="Arial"/>
                         </a:rPr>
-                        <a:t>Do not attribute the change to the programme.</a:t>
+                        <a:t>Say “among responding families”; retain uncertainty.</a:t>
                       </a:r>
                     </a:p>
                   </a:txBody>
@@ -11380,7 +11258,7 @@
                   </a:tcPr>
                 </a:tc>
               </a:tr>
-              <a:tr h="781050">
+              <a:tr h="762000">
                 <a:tc>
                   <a:txBody>
                     <a:bodyPr/>
@@ -11396,7 +11274,7 @@
                           <a:ea typeface="Microsoft YaHei"/>
                           <a:cs typeface="Arial"/>
                         </a:rPr>
-                        <a:t>General methods guidance</a:t>
+                        <a:t>Without an adequate comparison</a:t>
                       </a:r>
                     </a:p>
                   </a:txBody>
@@ -11427,7 +11305,7 @@
                           <a:ea typeface="Microsoft YaHei"/>
                           <a:cs typeface="Arial"/>
                         </a:rPr>
-                        <a:t>Test the items in this family and toy context.</a:t>
+                        <a:t>Do not attribute reported change to the programme.</a:t>
                       </a:r>
                     </a:p>
                   </a:txBody>
@@ -11456,10 +11334,10 @@
         </p:nvGrpSpPr>
         <p:grpSpPr>
           <a:xfrm>
-            <a:off x="676656" y="5543550"/>
-            <a:ext cx="9437636" cy="352044"/>
-            <a:chOff x="676656" y="5543550"/>
-            <a:chExt cx="9437636" cy="352044"/>
+            <a:off x="677037" y="5546725"/>
+            <a:ext cx="8862925" cy="337376"/>
+            <a:chOff x="677037" y="5546725"/>
+            <a:chExt cx="8862925" cy="337376"/>
           </a:xfrm>
         </p:grpSpPr>
         <p:sp>
@@ -11470,8 +11348,8 @@
           </p:nvSpPr>
           <p:spPr>
             <a:xfrm>
-              <a:off x="676656" y="5543550"/>
-              <a:ext cx="9437636" cy="352044"/>
+              <a:off x="677037" y="5546725"/>
+              <a:ext cx="8862925" cy="337376"/>
             </a:xfrm>
             <a:prstGeom prst="rect">
               <a:avLst/>
@@ -11489,7 +11367,7 @@
             <a:p>
               <a:pPr algn="l"/>
               <a:r>
-                <a:rPr lang="en-AU" sz="1800" b="1" dirty="0">
+                <a:rPr lang="en-AU" sz="1720" b="1" dirty="0">
                   <a:solidFill>
                     <a:schemeClr val="accent1"/>
                   </a:solidFill>
@@ -11497,7 +11375,7 @@
                   <a:ea typeface="+mn-ea"/>
                   <a:cs typeface="+mn-cs"/>
                 </a:rPr>
-                <a:t>Records and interviews strengthen interpretation; they do not establish causality.</a:t>
+                <a:t>Records and interviews can support interpretation; design still limits attribution.</a:t>
               </a:r>
             </a:p>
           </p:txBody>
@@ -11512,9 +11390,9 @@
         <p:grpSpPr>
           <a:xfrm>
             <a:off x="679704" y="5962650"/>
-            <a:ext cx="6391650" cy="234696"/>
+            <a:ext cx="7854017" cy="234696"/>
             <a:chOff x="679704" y="5962650"/>
-            <a:chExt cx="6391650" cy="234696"/>
+            <a:chExt cx="7854017" cy="234696"/>
           </a:xfrm>
         </p:grpSpPr>
         <p:sp>
@@ -11526,7 +11404,7 @@
           <p:spPr>
             <a:xfrm>
               <a:off x="679704" y="5962650"/>
-              <a:ext cx="6391650" cy="234696"/>
+              <a:ext cx="7854017" cy="234696"/>
             </a:xfrm>
             <a:prstGeom prst="rect">
               <a:avLst/>
@@ -11552,7 +11430,7 @@
                   <a:ea typeface="+mn-ea"/>
                   <a:cs typeface="+mn-cs"/>
                 </a:rPr>
-                <a:t>Counterfactual reasoning: Bjarkefur et al. 2021, ch.3. Other risks: A1 and Nguyen 2026a.</a:t>
+                <a:t>Counterfactual reasoning: Bjarkefur et al. 2021, ch.3. Recall/response considerations: A1 and Nguyen 2026a.</a:t>
               </a:r>
             </a:p>
           </p:txBody>
@@ -11719,9 +11597,9 @@
         <p:grpSpPr>
           <a:xfrm>
             <a:off x="669036" y="527050"/>
-            <a:ext cx="9107993" cy="645414"/>
+            <a:ext cx="6454687" cy="645414"/>
             <a:chOff x="669036" y="527050"/>
-            <a:chExt cx="9107993" cy="645414"/>
+            <a:chExt cx="6454687" cy="645414"/>
           </a:xfrm>
         </p:grpSpPr>
         <p:sp>
@@ -11733,7 +11611,7 @@
           <p:spPr>
             <a:xfrm>
               <a:off x="669036" y="527050"/>
-              <a:ext cx="9107993" cy="645414"/>
+              <a:ext cx="6454687" cy="645414"/>
             </a:xfrm>
             <a:prstGeom prst="rect">
               <a:avLst/>
@@ -11759,7 +11637,7 @@
                   <a:ea typeface="+mn-ea"/>
                   <a:cs typeface="+mn-cs"/>
                 </a:rPr>
-                <a:t>Turn the framework into a team deliverable</a:t>
+                <a:t>Testing plan and A3 feasibility</a:t>
               </a:r>
             </a:p>
           </p:txBody>
@@ -11803,16 +11681,16 @@
       </p:sp>
       <p:grpSp>
         <p:nvGrpSpPr>
-          <p:cNvPr id="6" name="closing-claim"/>
+          <p:cNvPr id="8" name="action-1"/>
           <p:cNvGrpSpPr/>
           <p:nvPr/>
         </p:nvGrpSpPr>
         <p:grpSpPr>
           <a:xfrm>
-            <a:off x="672846" y="1689100"/>
-            <a:ext cx="5353694" cy="936879"/>
-            <a:chOff x="672846" y="1689100"/>
-            <a:chExt cx="5353694" cy="936879"/>
+            <a:off x="674370" y="1692275"/>
+            <a:ext cx="2943915" cy="1834007"/>
+            <a:chOff x="674370" y="1692275"/>
+            <a:chExt cx="2943915" cy="1834007"/>
           </a:xfrm>
         </p:grpSpPr>
         <p:sp>
@@ -11823,8 +11701,88 @@
           </p:nvSpPr>
           <p:spPr>
             <a:xfrm>
-              <a:off x="672846" y="1689100"/>
-              <a:ext cx="5353694" cy="936879"/>
+              <a:off x="674370" y="1692275"/>
+              <a:ext cx="359800" cy="440055"/>
+            </a:xfrm>
+            <a:prstGeom prst="rect">
+              <a:avLst/>
+            </a:prstGeom>
+            <a:noFill/>
+            <a:ln>
+              <a:noFill/>
+            </a:ln>
+          </p:spPr>
+          <p:txBody>
+            <a:bodyPr wrap="none" lIns="0" tIns="0" rIns="0" bIns="0" anchor="t" anchorCtr="0">
+              <a:spAutoFit/>
+            </a:bodyPr>
+            <a:lstStyle/>
+            <a:p>
+              <a:pPr algn="l"/>
+              <a:r>
+                <a:rPr lang="en-AU" sz="2250" b="1" dirty="0">
+                  <a:solidFill>
+                    <a:schemeClr val="accent2"/>
+                  </a:solidFill>
+                  <a:latin typeface="+mn-lt"/>
+                  <a:ea typeface="+mn-ea"/>
+                  <a:cs typeface="+mn-cs"/>
+                </a:rPr>
+                <a:t>01</a:t>
+              </a:r>
+            </a:p>
+          </p:txBody>
+        </p:sp>
+        <p:sp>
+          <p:nvSpPr>
+            <p:cNvPr id="6" name="TextBox 6"/>
+            <p:cNvSpPr txBox="1"/>
+            <p:nvPr/>
+          </p:nvSpPr>
+          <p:spPr>
+            <a:xfrm>
+              <a:off x="675513" y="2136775"/>
+              <a:ext cx="2174311" cy="396050"/>
+            </a:xfrm>
+            <a:prstGeom prst="rect">
+              <a:avLst/>
+            </a:prstGeom>
+            <a:noFill/>
+            <a:ln>
+              <a:noFill/>
+            </a:ln>
+          </p:spPr>
+          <p:txBody>
+            <a:bodyPr wrap="none" lIns="0" tIns="0" rIns="0" bIns="0" anchor="t" anchorCtr="0">
+              <a:spAutoFit/>
+            </a:bodyPr>
+            <a:lstStyle/>
+            <a:p>
+              <a:pPr algn="l"/>
+              <a:r>
+                <a:rPr lang="en-AU" sz="2020" b="1" dirty="0">
+                  <a:solidFill>
+                    <a:schemeClr val="accent1"/>
+                  </a:solidFill>
+                  <a:latin typeface="+mn-lt"/>
+                  <a:ea typeface="+mn-ea"/>
+                  <a:cs typeface="+mn-cs"/>
+                </a:rPr>
+                <a:t>Check feasibility</a:t>
+              </a:r>
+            </a:p>
+          </p:txBody>
+        </p:sp>
+        <p:sp>
+          <p:nvSpPr>
+            <p:cNvPr id="7" name="TextBox 7"/>
+            <p:cNvSpPr txBox="1"/>
+            <p:nvPr/>
+          </p:nvSpPr>
+          <p:spPr>
+            <a:xfrm>
+              <a:off x="677418" y="2613025"/>
+              <a:ext cx="2940867" cy="913257"/>
             </a:xfrm>
             <a:prstGeom prst="rect">
               <a:avLst/>
@@ -11842,24 +11800,24 @@
             <a:p>
               <a:pPr algn="l">
                 <a:lnSpc>
-                  <a:spcPts val="3450"/>
+                  <a:spcPts val="2325"/>
                 </a:lnSpc>
               </a:pPr>
               <a:r>
-                <a:rPr lang="en-AU" sz="2550" b="1" dirty="0">
-                  <a:solidFill>
-                    <a:schemeClr val="accent1"/>
-                  </a:solidFill>
-                  <a:latin typeface="+mn-lt"/>
-                  <a:ea typeface="+mn-ea"/>
-                  <a:cs typeface="+mn-cs"/>
-                </a:rPr>
-                <a:t>Describe reported change.</a:t>
+                <a:rPr lang="en-AU" sz="1650" dirty="0">
+                  <a:solidFill>
+                    <a:schemeClr val="dk1"/>
+                  </a:solidFill>
+                  <a:latin typeface="+mn-lt"/>
+                  <a:ea typeface="+mn-ea"/>
+                  <a:cs typeface="+mn-cs"/>
+                </a:rPr>
+                <a:t>Client/Tutor: arrange carer</a:t>
               </a:r>
               <a:br>
-                <a:rPr lang="en-AU" sz="2550" b="1" dirty="0">
-                  <a:solidFill>
-                    <a:schemeClr val="accent1"/>
+                <a:rPr lang="en-AU" sz="1650" dirty="0">
+                  <a:solidFill>
+                    <a:schemeClr val="dk1"/>
                   </a:solidFill>
                   <a:latin typeface="+mn-lt"/>
                   <a:ea typeface="+mn-ea"/>
@@ -11867,15 +11825,36 @@
                 </a:rPr>
               </a:br>
               <a:r>
-                <a:rPr lang="en-AU" sz="2550" b="1" dirty="0">
-                  <a:solidFill>
-                    <a:schemeClr val="accent1"/>
-                  </a:solidFill>
-                  <a:latin typeface="+mn-lt"/>
-                  <a:ea typeface="+mn-ea"/>
-                  <a:cs typeface="+mn-cs"/>
-                </a:rPr>
-                <a:t>Match every claim to the evidence.</a:t>
+                <a:rPr lang="en-AU" sz="1650" dirty="0">
+                  <a:solidFill>
+                    <a:schemeClr val="dk1"/>
+                  </a:solidFill>
+                  <a:latin typeface="+mn-lt"/>
+                  <a:ea typeface="+mn-ea"/>
+                  <a:cs typeface="+mn-cs"/>
+                </a:rPr>
+                <a:t>access; confirm contact route,</a:t>
+              </a:r>
+              <a:br>
+                <a:rPr lang="en-AU" sz="1650" dirty="0">
+                  <a:solidFill>
+                    <a:schemeClr val="dk1"/>
+                  </a:solidFill>
+                  <a:latin typeface="+mn-lt"/>
+                  <a:ea typeface="+mn-ea"/>
+                  <a:cs typeface="+mn-cs"/>
+                </a:rPr>
+              </a:br>
+              <a:r>
+                <a:rPr lang="en-AU" sz="1650" dirty="0">
+                  <a:solidFill>
+                    <a:schemeClr val="dk1"/>
+                  </a:solidFill>
+                  <a:latin typeface="+mn-lt"/>
+                  <a:ea typeface="+mn-ea"/>
+                  <a:cs typeface="+mn-cs"/>
+                </a:rPr>
+                <a:t>baseline/linkage and A3 cut-off.</a:t>
               </a:r>
             </a:p>
           </p:txBody>
@@ -11883,28 +11862,28 @@
       </p:grpSp>
       <p:grpSp>
         <p:nvGrpSpPr>
-          <p:cNvPr id="10" name="next-step-1"/>
+          <p:cNvPr id="12" name="action-2"/>
           <p:cNvGrpSpPr/>
           <p:nvPr/>
         </p:nvGrpSpPr>
         <p:grpSpPr>
           <a:xfrm>
-            <a:off x="673608" y="2946400"/>
-            <a:ext cx="2893238" cy="1799844"/>
-            <a:chOff x="673608" y="2946400"/>
-            <a:chExt cx="2893238" cy="1799844"/>
+            <a:off x="4408170" y="1692275"/>
+            <a:ext cx="3164738" cy="2129282"/>
+            <a:chOff x="4408170" y="1692275"/>
+            <a:chExt cx="3164738" cy="2129282"/>
           </a:xfrm>
         </p:grpSpPr>
         <p:sp>
           <p:nvSpPr>
-            <p:cNvPr id="7" name="TextBox 7"/>
+            <p:cNvPr id="9" name="TextBox 9"/>
             <p:cNvSpPr txBox="1"/>
             <p:nvPr/>
           </p:nvSpPr>
           <p:spPr>
             <a:xfrm>
-              <a:off x="673608" y="2946400"/>
-              <a:ext cx="383787" cy="469392"/>
+              <a:off x="4408170" y="1692275"/>
+              <a:ext cx="359800" cy="440055"/>
             </a:xfrm>
             <a:prstGeom prst="rect">
               <a:avLst/>
@@ -11922,7 +11901,7 @@
             <a:p>
               <a:pPr algn="l"/>
               <a:r>
-                <a:rPr lang="en-AU" sz="2400" b="1" dirty="0">
+                <a:rPr lang="en-AU" sz="2250" b="1" dirty="0">
                   <a:solidFill>
                     <a:schemeClr val="accent2"/>
                   </a:solidFill>
@@ -11930,21 +11909,21 @@
                   <a:ea typeface="+mn-ea"/>
                   <a:cs typeface="+mn-cs"/>
                 </a:rPr>
-                <a:t>01</a:t>
+                <a:t>02</a:t>
               </a:r>
             </a:p>
           </p:txBody>
         </p:sp>
         <p:sp>
           <p:nvSpPr>
-            <p:cNvPr id="8" name="TextBox 8"/>
+            <p:cNvPr id="10" name="TextBox 10"/>
             <p:cNvSpPr txBox="1"/>
             <p:nvPr/>
           </p:nvSpPr>
           <p:spPr>
             <a:xfrm>
-              <a:off x="675132" y="3470275"/>
-              <a:ext cx="2794629" cy="410718"/>
+              <a:off x="4409313" y="2136775"/>
+              <a:ext cx="2763725" cy="396050"/>
             </a:xfrm>
             <a:prstGeom prst="rect">
               <a:avLst/>
@@ -11962,7 +11941,7 @@
             <a:p>
               <a:pPr algn="l"/>
               <a:r>
-                <a:rPr lang="en-AU" sz="2100" b="1" dirty="0">
+                <a:rPr lang="en-AU" sz="2020" b="1" dirty="0">
                   <a:solidFill>
                     <a:schemeClr val="accent1"/>
                   </a:solidFill>
@@ -11970,21 +11949,21 @@
                   <a:ea typeface="+mn-ea"/>
                   <a:cs typeface="+mn-cs"/>
                 </a:rPr>
-                <a:t>Agree with the client</a:t>
+                <a:t>Probe understanding</a:t>
               </a:r>
             </a:p>
           </p:txBody>
         </p:sp>
         <p:sp>
           <p:nvSpPr>
-            <p:cNvPr id="9" name="TextBox 9"/>
+            <p:cNvPr id="11" name="TextBox 11"/>
             <p:cNvSpPr txBox="1"/>
             <p:nvPr/>
           </p:nvSpPr>
           <p:spPr>
             <a:xfrm>
-              <a:off x="676656" y="4070350"/>
-              <a:ext cx="2890190" cy="675894"/>
+              <a:off x="4411218" y="2613025"/>
+              <a:ext cx="3161690" cy="1208532"/>
             </a:xfrm>
             <a:prstGeom prst="rect">
               <a:avLst/>
@@ -12002,11 +11981,11 @@
             <a:p>
               <a:pPr algn="l">
                 <a:lnSpc>
-                  <a:spcPts val="2550"/>
+                  <a:spcPts val="2325"/>
                 </a:lnSpc>
               </a:pPr>
               <a:r>
-                <a:rPr lang="en-AU" sz="1800" dirty="0">
+                <a:rPr lang="en-AU" sz="1650" dirty="0">
                   <a:solidFill>
                     <a:schemeClr val="dk1"/>
                   </a:solidFill>
@@ -12014,10 +11993,10 @@
                   <a:ea typeface="+mn-ea"/>
                   <a:cs typeface="+mn-cs"/>
                 </a:rPr>
-                <a:t>Priority outcome, target</a:t>
+                <a:t>Student: probe meanings, recall</a:t>
               </a:r>
               <a:br>
-                <a:rPr lang="en-AU" sz="1800" dirty="0">
+                <a:rPr lang="en-AU" sz="1650" dirty="0">
                   <a:solidFill>
                     <a:schemeClr val="dk1"/>
                   </a:solidFill>
@@ -12027,7 +12006,7 @@
                 </a:rPr>
               </a:br>
               <a:r>
-                <a:rPr lang="en-AU" sz="1800" dirty="0">
+                <a:rPr lang="en-AU" sz="1650" dirty="0">
                   <a:solidFill>
                     <a:schemeClr val="dk1"/>
                   </a:solidFill>
@@ -12035,7 +12014,49 @@
                   <a:ea typeface="+mn-ea"/>
                   <a:cs typeface="+mn-cs"/>
                 </a:rPr>
-                <a:t>carers and reference period.</a:t>
+                <a:t>windows and answer choices with</a:t>
+              </a:r>
+              <a:br>
+                <a:rPr lang="en-AU" sz="1650" dirty="0">
+                  <a:solidFill>
+                    <a:schemeClr val="dk1"/>
+                  </a:solidFill>
+                  <a:latin typeface="+mn-lt"/>
+                  <a:ea typeface="+mn-ea"/>
+                  <a:cs typeface="+mn-cs"/>
+                </a:rPr>
+              </a:br>
+              <a:r>
+                <a:rPr lang="en-AU" sz="1650" dirty="0">
+                  <a:solidFill>
+                    <a:schemeClr val="dk1"/>
+                  </a:solidFill>
+                  <a:latin typeface="+mn-lt"/>
+                  <a:ea typeface="+mn-ea"/>
+                  <a:cs typeface="+mn-cs"/>
+                </a:rPr>
+                <a:t>3–5 adult carers (proposed); log</a:t>
+              </a:r>
+              <a:br>
+                <a:rPr lang="en-AU" sz="1650" dirty="0">
+                  <a:solidFill>
+                    <a:schemeClr val="dk1"/>
+                  </a:solidFill>
+                  <a:latin typeface="+mn-lt"/>
+                  <a:ea typeface="+mn-ea"/>
+                  <a:cs typeface="+mn-cs"/>
+                </a:rPr>
+              </a:br>
+              <a:r>
+                <a:rPr lang="en-AU" sz="1650" dirty="0">
+                  <a:solidFill>
+                    <a:schemeClr val="dk1"/>
+                  </a:solidFill>
+                  <a:latin typeface="+mn-lt"/>
+                  <a:ea typeface="+mn-ea"/>
+                  <a:cs typeface="+mn-cs"/>
+                </a:rPr>
+                <a:t>confusion.</a:t>
               </a:r>
             </a:p>
           </p:txBody>
@@ -12043,28 +12064,28 @@
       </p:grpSp>
       <p:grpSp>
         <p:nvGrpSpPr>
-          <p:cNvPr id="14" name="next-step-2"/>
+          <p:cNvPr id="16" name="action-3"/>
           <p:cNvGrpSpPr/>
           <p:nvPr/>
         </p:nvGrpSpPr>
         <p:grpSpPr>
           <a:xfrm>
-            <a:off x="4407408" y="2946400"/>
-            <a:ext cx="2937921" cy="2123694"/>
-            <a:chOff x="4407408" y="2946400"/>
-            <a:chExt cx="2937921" cy="2123694"/>
+            <a:off x="8141970" y="1692275"/>
+            <a:ext cx="3158703" cy="2129282"/>
+            <a:chOff x="8141970" y="1692275"/>
+            <a:chExt cx="3158703" cy="2129282"/>
           </a:xfrm>
         </p:grpSpPr>
         <p:sp>
           <p:nvSpPr>
-            <p:cNvPr id="11" name="TextBox 11"/>
+            <p:cNvPr id="13" name="TextBox 13"/>
             <p:cNvSpPr txBox="1"/>
             <p:nvPr/>
           </p:nvSpPr>
           <p:spPr>
             <a:xfrm>
-              <a:off x="4407408" y="2946400"/>
-              <a:ext cx="383787" cy="469392"/>
+              <a:off x="8141970" y="1692275"/>
+              <a:ext cx="359800" cy="440055"/>
             </a:xfrm>
             <a:prstGeom prst="rect">
               <a:avLst/>
@@ -12082,7 +12103,7 @@
             <a:p>
               <a:pPr algn="l"/>
               <a:r>
-                <a:rPr lang="en-AU" sz="2400" b="1" dirty="0">
+                <a:rPr lang="en-AU" sz="2250" b="1" dirty="0">
                   <a:solidFill>
                     <a:schemeClr val="accent2"/>
                   </a:solidFill>
@@ -12090,21 +12111,21 @@
                   <a:ea typeface="+mn-ea"/>
                   <a:cs typeface="+mn-cs"/>
                 </a:rPr>
-                <a:t>02</a:t>
+                <a:t>03</a:t>
               </a:r>
             </a:p>
           </p:txBody>
         </p:sp>
         <p:sp>
           <p:nvSpPr>
-            <p:cNvPr id="12" name="TextBox 12"/>
+            <p:cNvPr id="14" name="TextBox 14"/>
             <p:cNvSpPr txBox="1"/>
             <p:nvPr/>
           </p:nvSpPr>
           <p:spPr>
             <a:xfrm>
-              <a:off x="4408932" y="3470275"/>
-              <a:ext cx="2936397" cy="410718"/>
+              <a:off x="8143113" y="2136775"/>
+              <a:ext cx="2569190" cy="396050"/>
             </a:xfrm>
             <a:prstGeom prst="rect">
               <a:avLst/>
@@ -12122,7 +12143,7 @@
             <a:p>
               <a:pPr algn="l"/>
               <a:r>
-                <a:rPr lang="en-AU" sz="2100" b="1" dirty="0">
+                <a:rPr lang="en-AU" sz="2020" b="1" dirty="0">
                   <a:solidFill>
                     <a:schemeClr val="accent1"/>
                   </a:solidFill>
@@ -12130,21 +12151,21 @@
                   <a:ea typeface="+mn-ea"/>
                   <a:cs typeface="+mn-cs"/>
                 </a:rPr>
-                <a:t>Test with adult carers</a:t>
+                <a:t>Revise and recheck</a:t>
               </a:r>
             </a:p>
           </p:txBody>
         </p:sp>
         <p:sp>
           <p:nvSpPr>
-            <p:cNvPr id="13" name="TextBox 13"/>
+            <p:cNvPr id="15" name="TextBox 15"/>
             <p:cNvSpPr txBox="1"/>
             <p:nvPr/>
           </p:nvSpPr>
           <p:spPr>
             <a:xfrm>
-              <a:off x="4410456" y="4070350"/>
-              <a:ext cx="2572756" cy="999744"/>
+              <a:off x="8145018" y="2613025"/>
+              <a:ext cx="3155655" cy="1208532"/>
             </a:xfrm>
             <a:prstGeom prst="rect">
               <a:avLst/>
@@ -12162,11 +12183,11 @@
             <a:p>
               <a:pPr algn="l">
                 <a:lnSpc>
-                  <a:spcPts val="2550"/>
+                  <a:spcPts val="2325"/>
                 </a:lnSpc>
               </a:pPr>
               <a:r>
-                <a:rPr lang="en-AU" sz="1800" dirty="0">
+                <a:rPr lang="en-AU" sz="1650" dirty="0">
                   <a:solidFill>
                     <a:schemeClr val="dk1"/>
                   </a:solidFill>
@@ -12174,10 +12195,10 @@
                   <a:ea typeface="+mn-ea"/>
                   <a:cs typeface="+mn-cs"/>
                 </a:rPr>
-                <a:t>Understanding, response</a:t>
+                <a:t>Student + team: clarify terms, add</a:t>
               </a:r>
               <a:br>
-                <a:rPr lang="en-AU" sz="1800" dirty="0">
+                <a:rPr lang="en-AU" sz="1650" dirty="0">
                   <a:solidFill>
                     <a:schemeClr val="dk1"/>
                   </a:solidFill>
@@ -12187,7 +12208,7 @@
                 </a:rPr>
               </a:br>
               <a:r>
-                <a:rPr lang="en-AU" sz="1800" dirty="0">
+                <a:rPr lang="en-AU" sz="1650" dirty="0">
                   <a:solidFill>
                     <a:schemeClr val="dk1"/>
                   </a:solidFill>
@@ -12195,10 +12216,10 @@
                   <a:ea typeface="+mn-ea"/>
                   <a:cs typeface="+mn-cs"/>
                 </a:rPr>
-                <a:t>options and completion</a:t>
+                <a:t>missing options, remove</a:t>
               </a:r>
               <a:br>
-                <a:rPr lang="en-AU" sz="1800" dirty="0">
+                <a:rPr lang="en-AU" sz="1650" dirty="0">
                   <a:solidFill>
                     <a:schemeClr val="dk1"/>
                   </a:solidFill>
@@ -12208,7 +12229,7 @@
                 </a:rPr>
               </a:br>
               <a:r>
-                <a:rPr lang="en-AU" sz="1800" dirty="0">
+                <a:rPr lang="en-AU" sz="1650" dirty="0">
                   <a:solidFill>
                     <a:schemeClr val="dk1"/>
                   </a:solidFill>
@@ -12216,7 +12237,28 @@
                   <a:ea typeface="+mn-ea"/>
                   <a:cs typeface="+mn-cs"/>
                 </a:rPr>
-                <a:t>burden.</a:t>
+                <a:t>nonessential items and recheck</a:t>
+              </a:r>
+              <a:br>
+                <a:rPr lang="en-AU" sz="1650" dirty="0">
+                  <a:solidFill>
+                    <a:schemeClr val="dk1"/>
+                  </a:solidFill>
+                  <a:latin typeface="+mn-lt"/>
+                  <a:ea typeface="+mn-ea"/>
+                  <a:cs typeface="+mn-cs"/>
+                </a:rPr>
+              </a:br>
+              <a:r>
+                <a:rPr lang="en-AU" sz="1650" dirty="0">
+                  <a:solidFill>
+                    <a:schemeClr val="dk1"/>
+                  </a:solidFill>
+                  <a:latin typeface="+mn-lt"/>
+                  <a:ea typeface="+mn-ea"/>
+                  <a:cs typeface="+mn-cs"/>
+                </a:rPr>
+                <a:t>changes.</a:t>
               </a:r>
             </a:p>
           </p:txBody>
@@ -12224,28 +12266,28 @@
       </p:grpSp>
       <p:grpSp>
         <p:nvGrpSpPr>
-          <p:cNvPr id="18" name="next-step-3"/>
+          <p:cNvPr id="19" name="test-observations"/>
           <p:cNvGrpSpPr/>
           <p:nvPr/>
         </p:nvGrpSpPr>
         <p:grpSpPr>
           <a:xfrm>
-            <a:off x="8141208" y="2946400"/>
-            <a:ext cx="3047827" cy="1799844"/>
-            <a:chOff x="8141208" y="2946400"/>
-            <a:chExt cx="3047827" cy="1799844"/>
+            <a:off x="677418" y="4035425"/>
+            <a:ext cx="8742027" cy="626491"/>
+            <a:chOff x="677418" y="4035425"/>
+            <a:chExt cx="8742027" cy="626491"/>
           </a:xfrm>
         </p:grpSpPr>
         <p:sp>
           <p:nvSpPr>
-            <p:cNvPr id="15" name="TextBox 15"/>
+            <p:cNvPr id="17" name="TextBox 17"/>
             <p:cNvSpPr txBox="1"/>
             <p:nvPr/>
           </p:nvSpPr>
           <p:spPr>
             <a:xfrm>
-              <a:off x="8141208" y="2946400"/>
-              <a:ext cx="383787" cy="469392"/>
+              <a:off x="677418" y="4035425"/>
+              <a:ext cx="8133961" cy="322707"/>
             </a:xfrm>
             <a:prstGeom prst="rect">
               <a:avLst/>
@@ -12263,29 +12305,29 @@
             <a:p>
               <a:pPr algn="l"/>
               <a:r>
-                <a:rPr lang="en-AU" sz="2400" b="1" dirty="0">
-                  <a:solidFill>
-                    <a:schemeClr val="accent2"/>
-                  </a:solidFill>
-                  <a:latin typeface="+mn-lt"/>
-                  <a:ea typeface="+mn-ea"/>
-                  <a:cs typeface="+mn-cs"/>
-                </a:rPr>
-                <a:t>03</a:t>
+                <a:rPr lang="en-AU" sz="1650" b="1" dirty="0">
+                  <a:solidFill>
+                    <a:schemeClr val="accent1"/>
+                  </a:solidFill>
+                  <a:latin typeface="+mn-lt"/>
+                  <a:ea typeface="+mn-ea"/>
+                  <a:cs typeface="+mn-cs"/>
+                </a:rPr>
+                <a:t>If digital: UX walkthrough checks completion, navigation and understanding.</a:t>
               </a:r>
             </a:p>
           </p:txBody>
         </p:sp>
         <p:sp>
           <p:nvSpPr>
-            <p:cNvPr id="16" name="TextBox 16"/>
+            <p:cNvPr id="18" name="TextBox 18"/>
             <p:cNvSpPr txBox="1"/>
             <p:nvPr/>
           </p:nvSpPr>
           <p:spPr>
             <a:xfrm>
-              <a:off x="8142732" y="3470275"/>
-              <a:ext cx="3046303" cy="410718"/>
+              <a:off x="677799" y="4352925"/>
+              <a:ext cx="8741646" cy="308991"/>
             </a:xfrm>
             <a:prstGeom prst="rect">
               <a:avLst/>
@@ -12303,51 +12345,7 @@
             <a:p>
               <a:pPr algn="l"/>
               <a:r>
-                <a:rPr lang="en-AU" sz="2100" b="1" dirty="0">
-                  <a:solidFill>
-                    <a:schemeClr val="accent1"/>
-                  </a:solidFill>
-                  <a:latin typeface="+mn-lt"/>
-                  <a:ea typeface="+mn-ea"/>
-                  <a:cs typeface="+mn-cs"/>
-                </a:rPr>
-                <a:t>Revise and triangulate</a:t>
-              </a:r>
-            </a:p>
-          </p:txBody>
-        </p:sp>
-        <p:sp>
-          <p:nvSpPr>
-            <p:cNvPr id="17" name="TextBox 17"/>
-            <p:cNvSpPr txBox="1"/>
-            <p:nvPr/>
-          </p:nvSpPr>
-          <p:spPr>
-            <a:xfrm>
-              <a:off x="8144256" y="4070350"/>
-              <a:ext cx="2775295" cy="675894"/>
-            </a:xfrm>
-            <a:prstGeom prst="rect">
-              <a:avLst/>
-            </a:prstGeom>
-            <a:noFill/>
-            <a:ln>
-              <a:noFill/>
-            </a:ln>
-          </p:spPr>
-          <p:txBody>
-            <a:bodyPr wrap="none" lIns="0" tIns="0" rIns="0" bIns="0" anchor="t" anchorCtr="0">
-              <a:spAutoFit/>
-            </a:bodyPr>
-            <a:lstStyle/>
-            <a:p>
-              <a:pPr algn="l">
-                <a:lnSpc>
-                  <a:spcPts val="2550"/>
-                </a:lnSpc>
-              </a:pPr>
-              <a:r>
-                <a:rPr lang="en-AU" sz="1800" dirty="0">
+                <a:rPr lang="en-AU" sz="1580" dirty="0">
                   <a:solidFill>
                     <a:schemeClr val="dk1"/>
                   </a:solidFill>
@@ -12355,28 +12353,7 @@
                   <a:ea typeface="+mn-ea"/>
                   <a:cs typeface="+mn-cs"/>
                 </a:rPr>
-                <a:t>Refine items; compare with</a:t>
-              </a:r>
-              <a:br>
-                <a:rPr lang="en-AU" sz="1800" dirty="0">
-                  <a:solidFill>
-                    <a:schemeClr val="dk1"/>
-                  </a:solidFill>
-                  <a:latin typeface="+mn-lt"/>
-                  <a:ea typeface="+mn-ea"/>
-                  <a:cs typeface="+mn-cs"/>
-                </a:rPr>
-              </a:br>
-              <a:r>
-                <a:rPr lang="en-AU" sz="1800" dirty="0">
-                  <a:solidFill>
-                    <a:schemeClr val="dk1"/>
-                  </a:solidFill>
-                  <a:latin typeface="+mn-lt"/>
-                  <a:ea typeface="+mn-ea"/>
-                  <a:cs typeface="+mn-cs"/>
-                </a:rPr>
-                <a:t>records or interviews.</a:t>
+                <a:t>Log missing options and time. Proposed form target: ≤3 minutes, excluding interview probes.</a:t>
               </a:r>
             </a:p>
           </p:txBody>
@@ -12384,28 +12361,28 @@
       </p:grpSp>
       <p:grpSp>
         <p:nvGrpSpPr>
-          <p:cNvPr id="21" name="deliverables"/>
+          <p:cNvPr id="23" name="feasibility-branch"/>
           <p:cNvGrpSpPr/>
           <p:nvPr/>
         </p:nvGrpSpPr>
         <p:grpSpPr>
           <a:xfrm>
-            <a:off x="675132" y="5299075"/>
-            <a:ext cx="6314187" cy="649732"/>
-            <a:chOff x="675132" y="5299075"/>
-            <a:chExt cx="6314187" cy="649732"/>
+            <a:off x="677037" y="4927600"/>
+            <a:ext cx="9180505" cy="973582"/>
+            <a:chOff x="677037" y="4927600"/>
+            <a:chExt cx="9180505" cy="973582"/>
           </a:xfrm>
         </p:grpSpPr>
         <p:sp>
           <p:nvSpPr>
-            <p:cNvPr id="19" name="TextBox 19"/>
+            <p:cNvPr id="20" name="TextBox 20"/>
             <p:cNvSpPr txBox="1"/>
             <p:nvPr/>
           </p:nvSpPr>
           <p:spPr>
             <a:xfrm>
-              <a:off x="675132" y="5299075"/>
-              <a:ext cx="6314187" cy="410718"/>
+              <a:off x="677037" y="4927600"/>
+              <a:ext cx="9180505" cy="337376"/>
             </a:xfrm>
             <a:prstGeom prst="rect">
               <a:avLst/>
@@ -12423,7 +12400,7 @@
             <a:p>
               <a:pPr algn="l"/>
               <a:r>
-                <a:rPr lang="en-AU" sz="2100" b="1" dirty="0">
+                <a:rPr lang="en-AU" sz="1720" b="1" dirty="0">
                   <a:solidFill>
                     <a:schemeClr val="accent2"/>
                   </a:solidFill>
@@ -12431,21 +12408,21 @@
                   <a:ea typeface="+mn-ea"/>
                   <a:cs typeface="+mn-cs"/>
                 </a:rPr>
-                <a:t>Indicator guide + draft survey + reporting rules</a:t>
+                <a:t>Four-week follow-up only if eligible past visits, contact access and A3 timing allow.</a:t>
               </a:r>
             </a:p>
           </p:txBody>
         </p:sp>
         <p:sp>
           <p:nvSpPr>
-            <p:cNvPr id="20" name="TextBox 20"/>
+            <p:cNvPr id="21" name="TextBox 21"/>
             <p:cNvSpPr txBox="1"/>
             <p:nvPr/>
           </p:nvSpPr>
           <p:spPr>
             <a:xfrm>
-              <a:off x="677418" y="5626100"/>
-              <a:ext cx="4309770" cy="322707"/>
+              <a:off x="677418" y="5292725"/>
+              <a:ext cx="7640324" cy="322707"/>
             </a:xfrm>
             <a:prstGeom prst="rect">
               <a:avLst/>
@@ -12465,32 +12442,17 @@
               <a:r>
                 <a:rPr lang="en-AU" sz="1650" dirty="0">
                   <a:solidFill>
-                    <a:schemeClr val="accent6"/>
-                  </a:solidFill>
-                  <a:latin typeface="+mn-lt"/>
-                  <a:ea typeface="+mn-ea"/>
-                  <a:cs typeface="+mn-cs"/>
-                </a:rPr>
-                <a:t>For the Impact Report and Media Collateral</a:t>
+                    <a:schemeClr val="dk1"/>
+                  </a:solidFill>
+                  <a:latin typeface="+mn-lt"/>
+                  <a:ea typeface="+mn-ea"/>
+                  <a:cs typeface="+mn-cs"/>
+                </a:rPr>
+                <a:t>If a new wait leaves too little analysis/writing time, or the client survey is fixed:</a:t>
               </a:r>
             </a:p>
           </p:txBody>
         </p:sp>
-      </p:grpSp>
-      <p:grpSp>
-        <p:nvGrpSpPr>
-          <p:cNvPr id="23" name="source-note"/>
-          <p:cNvGrpSpPr/>
-          <p:nvPr/>
-        </p:nvGrpSpPr>
-        <p:grpSpPr>
-          <a:xfrm>
-            <a:off x="679704" y="5962650"/>
-            <a:ext cx="7034380" cy="234696"/>
-            <a:chOff x="679704" y="5962650"/>
-            <a:chExt cx="7034380" cy="234696"/>
-          </a:xfrm>
-        </p:grpSpPr>
         <p:sp>
           <p:nvSpPr>
             <p:cNvPr id="22" name="TextBox 22"/>
@@ -12499,8 +12461,8 @@
           </p:nvSpPr>
           <p:spPr>
             <a:xfrm>
-              <a:off x="679704" y="5962650"/>
-              <a:ext cx="7034380" cy="234696"/>
+              <a:off x="677418" y="5578475"/>
+              <a:ext cx="9084570" cy="322707"/>
             </a:xfrm>
             <a:prstGeom prst="rect">
               <a:avLst/>
@@ -12518,6 +12480,61 @@
             <a:p>
               <a:pPr algn="l"/>
               <a:r>
+                <a:rPr lang="en-AU" sz="1650" b="1" dirty="0">
+                  <a:solidFill>
+                    <a:schemeClr val="accent1"/>
+                  </a:solidFill>
+                  <a:latin typeface="+mn-lt"/>
+                  <a:ea typeface="+mn-ea"/>
+                  <a:cs typeface="+mn-cs"/>
+                </a:rPr>
+                <a:t>Audit existing items/data → interpret results → recommend next-cycle improvements.</a:t>
+              </a:r>
+            </a:p>
+          </p:txBody>
+        </p:sp>
+      </p:grpSp>
+      <p:grpSp>
+        <p:nvGrpSpPr>
+          <p:cNvPr id="25" name="source-note"/>
+          <p:cNvGrpSpPr/>
+          <p:nvPr/>
+        </p:nvGrpSpPr>
+        <p:grpSpPr>
+          <a:xfrm>
+            <a:off x="679704" y="5962650"/>
+            <a:ext cx="8368742" cy="234696"/>
+            <a:chOff x="679704" y="5962650"/>
+            <a:chExt cx="8368742" cy="234696"/>
+          </a:xfrm>
+        </p:grpSpPr>
+        <p:sp>
+          <p:nvSpPr>
+            <p:cNvPr id="24" name="TextBox 24"/>
+            <p:cNvSpPr txBox="1"/>
+            <p:nvPr/>
+          </p:nvSpPr>
+          <p:spPr>
+            <a:xfrm>
+              <a:off x="679704" y="5962650"/>
+              <a:ext cx="8368742" cy="234696"/>
+            </a:xfrm>
+            <a:prstGeom prst="rect">
+              <a:avLst/>
+            </a:prstGeom>
+            <a:noFill/>
+            <a:ln>
+              <a:noFill/>
+            </a:ln>
+          </p:spPr>
+          <p:txBody>
+            <a:bodyPr wrap="none" lIns="0" tIns="0" rIns="0" bIns="0" anchor="t" anchorCtr="0">
+              <a:spAutoFit/>
+            </a:bodyPr>
+            <a:lstStyle/>
+            <a:p>
+              <a:pPr algn="l"/>
+              <a:r>
                 <a:rPr lang="en-AU" sz="1200" dirty="0">
                   <a:solidFill>
                     <a:schemeClr val="accent6"/>
@@ -12526,7 +12543,7 @@
                   <a:ea typeface="+mn-ea"/>
                   <a:cs typeface="+mn-cs"/>
                 </a:rPr>
-                <a:t>Proposed A3 work plan. Pilot principles: Bjarkefur et al. 2021. Check/review guidance: GDS n.d.c.</a:t>
+                <a:t>Testing: ONS n.d., §3 Table 1, §4 and Annex 2; Bjarkefur et al. 2021. Roles, numbers and target time are proposals.</a:t>
               </a:r>
             </a:p>
           </p:txBody>
@@ -12534,7 +12551,7 @@
       </p:grpSp>
       <p:sp>
         <p:nvSpPr>
-          <p:cNvPr id="24" name="Line 24"/>
+          <p:cNvPr id="26" name="Line 26"/>
           <p:cNvSpPr/>
           <p:nvPr/>
         </p:nvSpPr>
@@ -12570,7 +12587,7 @@
       </p:sp>
       <p:sp>
         <p:nvSpPr>
-          <p:cNvPr id="25" name="footer-label"/>
+          <p:cNvPr id="27" name="footer-label"/>
           <p:cNvSpPr txBox="1"/>
           <p:nvPr/>
         </p:nvSpPr>
@@ -12610,7 +12627,7 @@
       </p:sp>
       <p:sp>
         <p:nvSpPr>
-          <p:cNvPr id="26" name="page-number"/>
+          <p:cNvPr id="28" name="page-number"/>
           <p:cNvSpPr txBox="1"/>
           <p:nvPr/>
         </p:nvSpPr>
@@ -12693,9 +12710,9 @@
         <p:grpSpPr>
           <a:xfrm>
             <a:off x="669036" y="527050"/>
-            <a:ext cx="7135034" cy="645414"/>
+            <a:ext cx="7283290" cy="645414"/>
             <a:chOff x="669036" y="527050"/>
-            <a:chExt cx="7135034" cy="645414"/>
+            <a:chExt cx="7283290" cy="645414"/>
           </a:xfrm>
         </p:grpSpPr>
         <p:sp>
@@ -12707,7 +12724,7 @@
           <p:spPr>
             <a:xfrm>
               <a:off x="669036" y="527050"/>
-              <a:ext cx="7135034" cy="645414"/>
+              <a:ext cx="7283290" cy="645414"/>
             </a:xfrm>
             <a:prstGeom prst="rect">
               <a:avLst/>
@@ -12733,7 +12750,7 @@
                   <a:ea typeface="+mn-ea"/>
                   <a:cs typeface="+mn-cs"/>
                 </a:rPr>
-                <a:t>References | methods and design</a:t>
+                <a:t>References | domain and methods</a:t>
               </a:r>
             </a:p>
           </p:txBody>
@@ -12784,9 +12801,9 @@
         <p:grpSpPr>
           <a:xfrm>
             <a:off x="677418" y="1739900"/>
-            <a:ext cx="8132222" cy="876046"/>
+            <a:ext cx="7114749" cy="809371"/>
             <a:chOff x="677418" y="1739900"/>
-            <a:chExt cx="8132222" cy="876046"/>
+            <a:chExt cx="7114749" cy="809371"/>
           </a:xfrm>
         </p:grpSpPr>
         <p:sp>
@@ -12798,7 +12815,7 @@
           <p:spPr>
             <a:xfrm>
               <a:off x="677418" y="1739900"/>
-              <a:ext cx="7041772" cy="322707"/>
+              <a:ext cx="3152886" cy="322707"/>
             </a:xfrm>
             <a:prstGeom prst="rect">
               <a:avLst/>
@@ -12824,7 +12841,7 @@
                   <a:ea typeface="+mn-ea"/>
                   <a:cs typeface="+mn-cs"/>
                 </a:rPr>
-                <a:t>Bjarkefur, K., de Andrade, L.C., Daniels, B. and Jones, M.R. (2021)</a:t>
+                <a:t>Toy Libraries Australia (2024)</a:t>
               </a:r>
             </a:p>
           </p:txBody>
@@ -12837,8 +12854,8 @@
           </p:nvSpPr>
           <p:spPr>
             <a:xfrm>
-              <a:off x="678942" y="2054225"/>
-              <a:ext cx="5936516" cy="264033"/>
+              <a:off x="678942" y="2035175"/>
+              <a:ext cx="6130456" cy="264033"/>
             </a:xfrm>
             <a:prstGeom prst="rect">
               <a:avLst/>
@@ -12864,7 +12881,7 @@
                   <a:ea typeface="+mn-ea"/>
                   <a:cs typeface="+mn-cs"/>
                 </a:rPr>
-                <a:t>Development Research in Practice: The DIME Analytics Data Handbook.</a:t>
+                <a:t>Opportunities in the circular economy: Productivity Commission submission.</a:t>
               </a:r>
             </a:p>
           </p:txBody>
@@ -12877,8 +12894,8 @@
           </p:nvSpPr>
           <p:spPr>
             <a:xfrm>
-              <a:off x="679704" y="2381250"/>
-              <a:ext cx="8129936" cy="234696"/>
+              <a:off x="679704" y="2314575"/>
+              <a:ext cx="7112463" cy="234696"/>
             </a:xfrm>
             <a:prstGeom prst="rect">
               <a:avLst/>
@@ -12904,7 +12921,7 @@
                   <a:ea typeface="+mn-ea"/>
                   <a:cs typeface="+mn-cs"/>
                 </a:rPr>
-                <a:t>World Bank, chs.3–4, source version viewed 19 October 2026. https://github.com/worldbank/dime-data-handbook</a:t>
+                <a:t>Submission 130, November, pp.1–3. Supplied PDF; industry submission reporting sector evidence.</a:t>
               </a:r>
             </a:p>
           </p:txBody>
@@ -12919,9 +12936,9 @@
         <p:grpSpPr>
           <a:xfrm>
             <a:off x="677418" y="2740025"/>
-            <a:ext cx="6928122" cy="876046"/>
+            <a:ext cx="7430891" cy="809371"/>
             <a:chOff x="677418" y="2740025"/>
-            <a:chExt cx="6928122" cy="876046"/>
+            <a:chExt cx="7430891" cy="809371"/>
           </a:xfrm>
         </p:grpSpPr>
         <p:sp>
@@ -12972,8 +12989,8 @@
           </p:nvSpPr>
           <p:spPr>
             <a:xfrm>
-              <a:off x="678942" y="3054350"/>
-              <a:ext cx="4081056" cy="264033"/>
+              <a:off x="678942" y="3035300"/>
+              <a:ext cx="5542061" cy="264033"/>
             </a:xfrm>
             <a:prstGeom prst="rect">
               <a:avLst/>
@@ -12999,7 +13016,7 @@
                   <a:ea typeface="+mn-ea"/>
                   <a:cs typeface="+mn-cs"/>
                 </a:rPr>
-                <a:t>Question anatomy example. ONS Design System.</a:t>
+                <a:t>Question and questionnaire development overview for Census 2021.</a:t>
               </a:r>
             </a:p>
           </p:txBody>
@@ -13012,8 +13029,8 @@
           </p:nvSpPr>
           <p:spPr>
             <a:xfrm>
-              <a:off x="679704" y="3381375"/>
-              <a:ext cx="6925836" cy="234696"/>
+              <a:off x="679704" y="3314700"/>
+              <a:ext cx="7428605" cy="234696"/>
             </a:xfrm>
             <a:prstGeom prst="rect">
               <a:avLst/>
@@ -13039,7 +13056,7 @@
                   <a:ea typeface="+mn-ea"/>
                   <a:cs typeface="+mn-cs"/>
                 </a:rPr>
-                <a:t>Official source repository, viewed 19 October 2026. https://github.com/ONSdigital/design-system</a:t>
+                <a:t>§§3–4, §7 and Annex 2. Supplied converted reading copy, pp.4, 7, 14, 18–19; viewed 19 October 2026.</a:t>
               </a:r>
             </a:p>
           </p:txBody>
@@ -13054,9 +13071,9 @@
         <p:grpSpPr>
           <a:xfrm>
             <a:off x="677418" y="3740150"/>
-            <a:ext cx="7280711" cy="876046"/>
+            <a:ext cx="8132222" cy="809371"/>
             <a:chOff x="677418" y="3740150"/>
-            <a:chExt cx="7280711" cy="876046"/>
+            <a:chExt cx="8132222" cy="809371"/>
           </a:xfrm>
         </p:grpSpPr>
         <p:sp>
@@ -13068,7 +13085,7 @@
           <p:spPr>
             <a:xfrm>
               <a:off x="677418" y="3740150"/>
-              <a:ext cx="4385561" cy="322707"/>
+              <a:ext cx="7041772" cy="322707"/>
             </a:xfrm>
             <a:prstGeom prst="rect">
               <a:avLst/>
@@ -13094,7 +13111,7 @@
                   <a:ea typeface="+mn-ea"/>
                   <a:cs typeface="+mn-cs"/>
                 </a:rPr>
-                <a:t>Government Digital Service (GDS) (n.d.a)</a:t>
+                <a:t>Bjarkefur, K., de Andrade, L.C., Daniels, B. and Jones, M.R. (2021)</a:t>
               </a:r>
             </a:p>
           </p:txBody>
@@ -13107,8 +13124,8 @@
           </p:nvSpPr>
           <p:spPr>
             <a:xfrm>
-              <a:off x="678942" y="4054475"/>
-              <a:ext cx="3469178" cy="264033"/>
+              <a:off x="678942" y="4035425"/>
+              <a:ext cx="5936516" cy="264033"/>
             </a:xfrm>
             <a:prstGeom prst="rect">
               <a:avLst/>
@@ -13134,7 +13151,7 @@
                   <a:ea typeface="+mn-ea"/>
                   <a:cs typeface="+mn-cs"/>
                 </a:rPr>
-                <a:t>Question pages. GOV.UK Design System.</a:t>
+                <a:t>Development Research in Practice: The DIME Analytics Data Handbook.</a:t>
               </a:r>
             </a:p>
           </p:txBody>
@@ -13147,8 +13164,8 @@
           </p:nvSpPr>
           <p:spPr>
             <a:xfrm>
-              <a:off x="679704" y="4381500"/>
-              <a:ext cx="7278425" cy="234696"/>
+              <a:off x="679704" y="4314825"/>
+              <a:ext cx="8129936" cy="234696"/>
             </a:xfrm>
             <a:prstGeom prst="rect">
               <a:avLst/>
@@ -13174,7 +13191,7 @@
                   <a:ea typeface="+mn-ea"/>
                   <a:cs typeface="+mn-cs"/>
                 </a:rPr>
-                <a:t>Official source repository, viewed 19 October 2026. https://github.com/alphagov/govuk-design-system</a:t>
+                <a:t>World Bank, chs.3–4, source version viewed 19 October 2026. https://github.com/worldbank/dime-data-handbook</a:t>
               </a:r>
             </a:p>
           </p:txBody>
@@ -13189,9 +13206,9 @@
         <p:grpSpPr>
           <a:xfrm>
             <a:off x="677418" y="4740275"/>
-            <a:ext cx="7280711" cy="876046"/>
+            <a:ext cx="7280711" cy="809371"/>
             <a:chOff x="677418" y="4740275"/>
-            <a:chExt cx="7280711" cy="876046"/>
+            <a:chExt cx="7280711" cy="809371"/>
           </a:xfrm>
         </p:grpSpPr>
         <p:sp>
@@ -13203,7 +13220,7 @@
           <p:spPr>
             <a:xfrm>
               <a:off x="677418" y="4740275"/>
-              <a:ext cx="4397826" cy="322707"/>
+              <a:ext cx="4385561" cy="322707"/>
             </a:xfrm>
             <a:prstGeom prst="rect">
               <a:avLst/>
@@ -13229,7 +13246,7 @@
                   <a:ea typeface="+mn-ea"/>
                   <a:cs typeface="+mn-cs"/>
                 </a:rPr>
-                <a:t>Government Digital Service (GDS) (n.d.b)</a:t>
+                <a:t>Government Digital Service (GDS) (n.d.a)</a:t>
               </a:r>
             </a:p>
           </p:txBody>
@@ -13242,8 +13259,8 @@
           </p:nvSpPr>
           <p:spPr>
             <a:xfrm>
-              <a:off x="678942" y="5054600"/>
-              <a:ext cx="2763532" cy="264033"/>
+              <a:off x="678942" y="5035550"/>
+              <a:ext cx="3469178" cy="264033"/>
             </a:xfrm>
             <a:prstGeom prst="rect">
               <a:avLst/>
@@ -13269,7 +13286,7 @@
                   <a:ea typeface="+mn-ea"/>
                   <a:cs typeface="+mn-cs"/>
                 </a:rPr>
-                <a:t>Radios. GOV.UK Design System.</a:t>
+                <a:t>Question pages. GOV.UK Design System.</a:t>
               </a:r>
             </a:p>
           </p:txBody>
@@ -13282,7 +13299,7 @@
           </p:nvSpPr>
           <p:spPr>
             <a:xfrm>
-              <a:off x="679704" y="5381625"/>
+              <a:off x="679704" y="5314950"/>
               <a:ext cx="7278425" cy="234696"/>
             </a:xfrm>
             <a:prstGeom prst="rect">
@@ -13443,9 +13460,9 @@
 </file>
 
 <file path=ppt/theme/theme1.xml><?xml version="1.0" encoding="utf-8"?>
-<a:theme xmlns:a="http://schemas.openxmlformats.org/drawingml/2006/main" name="comm5030_play_access">
+<a:theme xmlns:a="http://schemas.openxmlformats.org/drawingml/2006/main" name="comm5030_play_access_v2">
   <a:themeElements>
-    <a:clrScheme name="comm5030_play_access">
+    <a:clrScheme name="comm5030_play_access_v2">
       <a:dk1>
         <a:srgbClr val="25313E"/>
       </a:dk1>
@@ -13483,7 +13500,7 @@
         <a:srgbClr val="7A98AC"/>
       </a:folHlink>
     </a:clrScheme>
-    <a:fontScheme name="comm5030_play_access">
+    <a:fontScheme name="comm5030_play_access_v2">
       <a:majorFont>
         <a:latin typeface="Arial"/>
         <a:ea typeface="Microsoft YaHei"/>
@@ -13555,7 +13572,7 @@
         <a:font script="Geor" typeface="Sylfaen"/>
       </a:minorFont>
     </a:fontScheme>
-    <a:fmtScheme name="comm5030_play_access">
+    <a:fmtScheme name="comm5030_play_access_v2">
       <a:fillStyleLst>
         <a:solidFill>
           <a:schemeClr val="phClr"/>
@@ -13763,9 +13780,9 @@
 </file>
 
 <file path=ppt/theme/theme2.xml><?xml version="1.0" encoding="utf-8"?>
-<a:theme xmlns:a="http://schemas.openxmlformats.org/drawingml/2006/main" name="comm5030_play_access">
+<a:theme xmlns:a="http://schemas.openxmlformats.org/drawingml/2006/main" name="comm5030_play_access_v2">
   <a:themeElements>
-    <a:clrScheme name="comm5030_play_access">
+    <a:clrScheme name="comm5030_play_access_v2">
       <a:dk1>
         <a:srgbClr val="25313E"/>
       </a:dk1>
@@ -13803,7 +13820,7 @@
         <a:srgbClr val="7A98AC"/>
       </a:folHlink>
     </a:clrScheme>
-    <a:fontScheme name="comm5030_play_access">
+    <a:fontScheme name="comm5030_play_access_v2">
       <a:majorFont>
         <a:latin typeface="Arial"/>
         <a:ea typeface="Microsoft YaHei"/>
@@ -13875,7 +13892,7 @@
         <a:font script="Geor" typeface="Sylfaen"/>
       </a:minorFont>
     </a:fontScheme>
-    <a:fmtScheme name="comm5030_play_access">
+    <a:fmtScheme name="comm5030_play_access_v2">
       <a:fillStyleLst>
         <a:solidFill>
           <a:schemeClr val="phClr"/>
